--- a/docs/tutoriais/Tutorial-Formador.pptx
+++ b/docs/tutoriais/Tutorial-Formador.pptx
@@ -18,9 +18,10 @@
     <p:sldId id="266" r:id="rId12"/>
     <p:sldId id="267" r:id="rId13"/>
     <p:sldId id="268" r:id="rId14"/>
+    <p:sldId id="269" r:id="rId15"/>
   </p:sldIdLst>
   <p:notesMasterIdLst>
-    <p:notesMasterId r:id="rId15"/>
+    <p:notesMasterId r:id="rId16"/>
   </p:notesMasterIdLst>
   <p:sldSz cx="12192000" cy="6858000"/>
   <p:notesSz cx="6858000" cy="12192000"/>
@@ -890,6 +891,94 @@
             <a:fld id="{F7021451-1387-4CA6-816F-3879F97B5CBC}" type="slidenum">
               <a:rPr lang="en-US"/>
               <a:t>13</a:t>
+            </a:fld>
+            <a:endParaRPr lang="en-US"/>
+          </a:p>
+        </p:txBody>
+      </p:sp>
+    </p:spTree>
+    <p:extLst>
+      <p:ext uri="{BB962C8B-B14F-4D97-AF65-F5344CB8AC3E}">
+        <p14:creationId xmlns:p14="http://schemas.microsoft.com/office/powerpoint/2010/main" val="1024086991"/>
+      </p:ext>
+    </p:extLst>
+  </p:cSld>
+  <p:clrMapOvr>
+    <a:masterClrMapping/>
+  </p:clrMapOvr>
+</p:notes>
+</file>
+
+<file path=ppt/notesSlides/notesSlide14.xml><?xml version="1.0" encoding="utf-8"?>
+<p:notes xmlns:a="http://schemas.openxmlformats.org/drawingml/2006/main" xmlns:r="http://schemas.openxmlformats.org/officeDocument/2006/relationships" xmlns:p="http://schemas.openxmlformats.org/presentationml/2006/main">
+  <p:cSld>
+    <p:spTree>
+      <p:nvGrpSpPr>
+        <p:cNvPr id="1" name=""/>
+        <p:cNvGrpSpPr/>
+        <p:nvPr/>
+      </p:nvGrpSpPr>
+      <p:grpSpPr>
+        <a:xfrm>
+          <a:off x="0" y="0"/>
+          <a:ext cx="0" cy="0"/>
+          <a:chOff x="0" y="0"/>
+          <a:chExt cx="0" cy="0"/>
+        </a:xfrm>
+      </p:grpSpPr>
+      <p:sp>
+        <p:nvSpPr>
+          <p:cNvPr id="2" name="Slide Image Placeholder 1"/>
+          <p:cNvSpPr>
+            <a:spLocks noGrp="1" noRot="1" noChangeAspect="1"/>
+          </p:cNvSpPr>
+          <p:nvPr>
+            <p:ph type="sldImg"/>
+          </p:nvPr>
+        </p:nvSpPr>
+        <p:spPr/>
+      </p:sp>
+      <p:sp>
+        <p:nvSpPr>
+          <p:cNvPr id="3" name="Notes Placeholder 2"/>
+          <p:cNvSpPr>
+            <a:spLocks noGrp="1"/>
+          </p:cNvSpPr>
+          <p:nvPr>
+            <p:ph type="body" idx="1"/>
+          </p:nvPr>
+        </p:nvSpPr>
+        <p:spPr/>
+        <p:txBody>
+          <a:bodyPr/>
+          <a:lstStyle/>
+          <a:p>
+            <a:r>
+              <a:rPr lang="en-US" dirty="0"/>
+              <a:t/>
+            </a:r>
+            <a:endParaRPr lang="en-US" dirty="0"/>
+          </a:p>
+        </p:txBody>
+      </p:sp>
+      <p:sp>
+        <p:nvSpPr>
+          <p:cNvPr id="4" name="Slide Number Placeholder 3"/>
+          <p:cNvSpPr>
+            <a:spLocks noGrp="1"/>
+          </p:cNvSpPr>
+          <p:nvPr>
+            <p:ph type="sldNum" sz="quarter" idx="10"/>
+          </p:nvPr>
+        </p:nvSpPr>
+        <p:spPr/>
+        <p:txBody>
+          <a:bodyPr/>
+          <a:lstStyle/>
+          <a:p>
+            <a:fld id="{F7021451-1387-4CA6-816F-3879F97B5CBC}" type="slidenum">
+              <a:rPr lang="en-US"/>
+              <a:t>14</a:t>
             </a:fld>
             <a:endParaRPr lang="en-US"/>
           </a:p>
@@ -2138,7 +2227,7 @@
                 <a:ea typeface="Calibri" pitchFamily="34" charset="-122"/>
                 <a:cs typeface="Calibri" pitchFamily="34" charset="-120"/>
               </a:rPr>
-              <a:t>e acompanhar cada fase — sem precisar de nenhum conhecimento técnico.</a:t>
+              <a:t>e analisar os vídeos produzidos pela MB Estúdios.</a:t>
             </a:r>
             <a:endParaRPr lang="en-US" sz="1700" dirty="0"/>
           </a:p>
@@ -2153,7 +2242,7 @@
         <p:spPr>
           <a:xfrm>
             <a:off x="822960" y="5349240"/>
-            <a:ext cx="4114800" cy="457200"/>
+            <a:ext cx="4480560" cy="457200"/>
           </a:xfrm>
           <a:prstGeom prst="roundRect">
             <a:avLst>
@@ -2180,7 +2269,7 @@
         <p:spPr>
           <a:xfrm>
             <a:off x="822960" y="5349240"/>
-            <a:ext cx="4114800" cy="457200"/>
+            <a:ext cx="4480560" cy="457200"/>
           </a:xfrm>
           <a:prstGeom prst="rect">
             <a:avLst/>
@@ -2367,7 +2456,7 @@
                 <a:ea typeface="Calibri" pitchFamily="34" charset="-122"/>
                 <a:cs typeface="Calibri" pitchFamily="34" charset="-120"/>
               </a:rPr>
-              <a:t>6. Enviar os materiais do curso</a:t>
+              <a:t>6.1 A ordem de entrega e os itens opcionais</a:t>
             </a:r>
             <a:endParaRPr lang="en-US" sz="3000" dirty="0"/>
           </a:p>
@@ -2381,516 +2470,12 @@
         </p:nvSpPr>
         <p:spPr>
           <a:xfrm>
-            <a:off x="640080" y="1737360"/>
-            <a:ext cx="310896" cy="310896"/>
-          </a:xfrm>
-          <a:prstGeom prst="ellipse">
-            <a:avLst/>
-          </a:prstGeom>
-          <a:solidFill>
-            <a:srgbClr val="22D3EE"/>
-          </a:solidFill>
-          <a:ln/>
-        </p:spPr>
-      </p:sp>
-      <p:sp>
-        <p:nvSpPr>
-          <p:cNvPr id="5" name="Text 3"/>
-          <p:cNvSpPr/>
-          <p:nvPr/>
-        </p:nvSpPr>
-        <p:spPr>
-          <a:xfrm>
-            <a:off x="640080" y="1737360"/>
-            <a:ext cx="310896" cy="310896"/>
-          </a:xfrm>
-          <a:prstGeom prst="rect">
-            <a:avLst/>
-          </a:prstGeom>
-          <a:noFill/>
-          <a:ln/>
-        </p:spPr>
-        <p:txBody>
-          <a:bodyPr wrap="square" lIns="0" tIns="0" rIns="0" bIns="0" rtlCol="0" anchor="ctr"/>
-          <a:lstStyle/>
-          <a:p>
-            <a:pPr algn="ctr" indent="0" marL="0">
-              <a:buNone/>
-            </a:pPr>
-            <a:r>
-              <a:rPr lang="en-US" sz="1300" b="1" dirty="0">
-                <a:solidFill>
-                  <a:srgbClr val="07101F"/>
-                </a:solidFill>
-                <a:latin typeface="Calibri" pitchFamily="34" charset="0"/>
-                <a:ea typeface="Calibri" pitchFamily="34" charset="-122"/>
-                <a:cs typeface="Calibri" pitchFamily="34" charset="-120"/>
-              </a:rPr>
-              <a:t>1</a:t>
-            </a:r>
-            <a:endParaRPr lang="en-US" sz="1300" dirty="0"/>
-          </a:p>
-        </p:txBody>
-      </p:sp>
-      <p:sp>
-        <p:nvSpPr>
-          <p:cNvPr id="6" name="Text 4"/>
-          <p:cNvSpPr/>
-          <p:nvPr/>
-        </p:nvSpPr>
-        <p:spPr>
-          <a:xfrm>
-            <a:off x="1097280" y="1691640"/>
-            <a:ext cx="5303520" cy="658368"/>
-          </a:xfrm>
-          <a:prstGeom prst="rect">
-            <a:avLst/>
-          </a:prstGeom>
-          <a:noFill/>
-          <a:ln/>
-        </p:spPr>
-        <p:txBody>
-          <a:bodyPr wrap="square" lIns="0" tIns="0" rIns="0" bIns="0" rtlCol="0" anchor="t"/>
-          <a:lstStyle/>
-          <a:p>
-            <a:pPr indent="0" marL="0">
-              <a:buNone/>
-            </a:pPr>
-            <a:r>
-              <a:rPr lang="en-US" sz="1400" dirty="0">
-                <a:solidFill>
-                  <a:srgbClr val="E8EEF7"/>
-                </a:solidFill>
-                <a:latin typeface="Calibri" pitchFamily="34" charset="0"/>
-                <a:ea typeface="Calibri" pitchFamily="34" charset="-122"/>
-                <a:cs typeface="Calibri" pitchFamily="34" charset="-120"/>
-              </a:rPr>
-              <a:t>Escolha o </a:t>
-            </a:r>
-            <a:pPr indent="0" marL="0">
-              <a:buNone/>
-            </a:pPr>
-            <a:r>
-              <a:rPr lang="en-US" sz="1400" b="1" dirty="0">
-                <a:solidFill>
-                  <a:srgbClr val="22D3EE"/>
-                </a:solidFill>
-                <a:latin typeface="Calibri" pitchFamily="34" charset="0"/>
-                <a:ea typeface="Calibri" pitchFamily="34" charset="-122"/>
-                <a:cs typeface="Calibri" pitchFamily="34" charset="-120"/>
-              </a:rPr>
-              <a:t>Módulo</a:t>
-            </a:r>
-            <a:pPr indent="0" marL="0">
-              <a:buNone/>
-            </a:pPr>
-            <a:r>
-              <a:rPr lang="en-US" sz="1400" dirty="0">
-                <a:solidFill>
-                  <a:srgbClr val="E8EEF7"/>
-                </a:solidFill>
-                <a:latin typeface="Calibri" pitchFamily="34" charset="0"/>
-                <a:ea typeface="Calibri" pitchFamily="34" charset="-122"/>
-                <a:cs typeface="Calibri" pitchFamily="34" charset="-120"/>
-              </a:rPr>
-              <a:t> — Geral (curso inteiro) ou Módulo 1 a 8;</a:t>
-            </a:r>
-            <a:endParaRPr lang="en-US" sz="1400" dirty="0"/>
-          </a:p>
-        </p:txBody>
-      </p:sp>
-      <p:sp>
-        <p:nvSpPr>
-          <p:cNvPr id="7" name="Shape 5"/>
-          <p:cNvSpPr/>
-          <p:nvPr/>
-        </p:nvSpPr>
-        <p:spPr>
-          <a:xfrm>
-            <a:off x="640080" y="2395728"/>
-            <a:ext cx="310896" cy="310896"/>
-          </a:xfrm>
-          <a:prstGeom prst="ellipse">
-            <a:avLst/>
-          </a:prstGeom>
-          <a:solidFill>
-            <a:srgbClr val="22D3EE"/>
-          </a:solidFill>
-          <a:ln/>
-        </p:spPr>
-      </p:sp>
-      <p:sp>
-        <p:nvSpPr>
-          <p:cNvPr id="8" name="Text 6"/>
-          <p:cNvSpPr/>
-          <p:nvPr/>
-        </p:nvSpPr>
-        <p:spPr>
-          <a:xfrm>
-            <a:off x="640080" y="2395728"/>
-            <a:ext cx="310896" cy="310896"/>
-          </a:xfrm>
-          <a:prstGeom prst="rect">
-            <a:avLst/>
-          </a:prstGeom>
-          <a:noFill/>
-          <a:ln/>
-        </p:spPr>
-        <p:txBody>
-          <a:bodyPr wrap="square" lIns="0" tIns="0" rIns="0" bIns="0" rtlCol="0" anchor="ctr"/>
-          <a:lstStyle/>
-          <a:p>
-            <a:pPr algn="ctr" indent="0" marL="0">
-              <a:buNone/>
-            </a:pPr>
-            <a:r>
-              <a:rPr lang="en-US" sz="1300" b="1" dirty="0">
-                <a:solidFill>
-                  <a:srgbClr val="07101F"/>
-                </a:solidFill>
-                <a:latin typeface="Calibri" pitchFamily="34" charset="0"/>
-                <a:ea typeface="Calibri" pitchFamily="34" charset="-122"/>
-                <a:cs typeface="Calibri" pitchFamily="34" charset="-120"/>
-              </a:rPr>
-              <a:t>2</a:t>
-            </a:r>
-            <a:endParaRPr lang="en-US" sz="1300" dirty="0"/>
-          </a:p>
-        </p:txBody>
-      </p:sp>
-      <p:sp>
-        <p:nvSpPr>
-          <p:cNvPr id="9" name="Text 7"/>
-          <p:cNvSpPr/>
-          <p:nvPr/>
-        </p:nvSpPr>
-        <p:spPr>
-          <a:xfrm>
-            <a:off x="1097280" y="2350008"/>
-            <a:ext cx="5303520" cy="658368"/>
-          </a:xfrm>
-          <a:prstGeom prst="rect">
-            <a:avLst/>
-          </a:prstGeom>
-          <a:noFill/>
-          <a:ln/>
-        </p:spPr>
-        <p:txBody>
-          <a:bodyPr wrap="square" lIns="0" tIns="0" rIns="0" bIns="0" rtlCol="0" anchor="t"/>
-          <a:lstStyle/>
-          <a:p>
-            <a:pPr indent="0" marL="0">
-              <a:buNone/>
-            </a:pPr>
-            <a:r>
-              <a:rPr lang="en-US" sz="1400" dirty="0">
-                <a:solidFill>
-                  <a:srgbClr val="E8EEF7"/>
-                </a:solidFill>
-                <a:latin typeface="Calibri" pitchFamily="34" charset="0"/>
-                <a:ea typeface="Calibri" pitchFamily="34" charset="-122"/>
-                <a:cs typeface="Calibri" pitchFamily="34" charset="-120"/>
-              </a:rPr>
-              <a:t>Escolha a </a:t>
-            </a:r>
-            <a:pPr indent="0" marL="0">
-              <a:buNone/>
-            </a:pPr>
-            <a:r>
-              <a:rPr lang="en-US" sz="1400" b="1" dirty="0">
-                <a:solidFill>
-                  <a:srgbClr val="22D3EE"/>
-                </a:solidFill>
-                <a:latin typeface="Calibri" pitchFamily="34" charset="0"/>
-                <a:ea typeface="Calibri" pitchFamily="34" charset="-122"/>
-                <a:cs typeface="Calibri" pitchFamily="34" charset="-120"/>
-              </a:rPr>
-              <a:t>Categoria</a:t>
-            </a:r>
-            <a:pPr indent="0" marL="0">
-              <a:buNone/>
-            </a:pPr>
-            <a:r>
-              <a:rPr lang="en-US" sz="1400" dirty="0">
-                <a:solidFill>
-                  <a:srgbClr val="E8EEF7"/>
-                </a:solidFill>
-                <a:latin typeface="Calibri" pitchFamily="34" charset="0"/>
-                <a:ea typeface="Calibri" pitchFamily="34" charset="-122"/>
-                <a:cs typeface="Calibri" pitchFamily="34" charset="-120"/>
-              </a:rPr>
-              <a:t> — só a próxima etapa da sequência está liberada; as demais ficam cinza até chegar a vez;</a:t>
-            </a:r>
-            <a:endParaRPr lang="en-US" sz="1400" dirty="0"/>
-          </a:p>
-        </p:txBody>
-      </p:sp>
-      <p:sp>
-        <p:nvSpPr>
-          <p:cNvPr id="10" name="Shape 8"/>
-          <p:cNvSpPr/>
-          <p:nvPr/>
-        </p:nvSpPr>
-        <p:spPr>
-          <a:xfrm>
-            <a:off x="640080" y="3054096"/>
-            <a:ext cx="310896" cy="310896"/>
-          </a:xfrm>
-          <a:prstGeom prst="ellipse">
-            <a:avLst/>
-          </a:prstGeom>
-          <a:solidFill>
-            <a:srgbClr val="22D3EE"/>
-          </a:solidFill>
-          <a:ln/>
-        </p:spPr>
-      </p:sp>
-      <p:sp>
-        <p:nvSpPr>
-          <p:cNvPr id="11" name="Text 9"/>
-          <p:cNvSpPr/>
-          <p:nvPr/>
-        </p:nvSpPr>
-        <p:spPr>
-          <a:xfrm>
-            <a:off x="640080" y="3054096"/>
-            <a:ext cx="310896" cy="310896"/>
-          </a:xfrm>
-          <a:prstGeom prst="rect">
-            <a:avLst/>
-          </a:prstGeom>
-          <a:noFill/>
-          <a:ln/>
-        </p:spPr>
-        <p:txBody>
-          <a:bodyPr wrap="square" lIns="0" tIns="0" rIns="0" bIns="0" rtlCol="0" anchor="ctr"/>
-          <a:lstStyle/>
-          <a:p>
-            <a:pPr algn="ctr" indent="0" marL="0">
-              <a:buNone/>
-            </a:pPr>
-            <a:r>
-              <a:rPr lang="en-US" sz="1300" b="1" dirty="0">
-                <a:solidFill>
-                  <a:srgbClr val="07101F"/>
-                </a:solidFill>
-                <a:latin typeface="Calibri" pitchFamily="34" charset="0"/>
-                <a:ea typeface="Calibri" pitchFamily="34" charset="-122"/>
-                <a:cs typeface="Calibri" pitchFamily="34" charset="-120"/>
-              </a:rPr>
-              <a:t>3</a:t>
-            </a:r>
-            <a:endParaRPr lang="en-US" sz="1300" dirty="0"/>
-          </a:p>
-        </p:txBody>
-      </p:sp>
-      <p:sp>
-        <p:nvSpPr>
-          <p:cNvPr id="12" name="Text 10"/>
-          <p:cNvSpPr/>
-          <p:nvPr/>
-        </p:nvSpPr>
-        <p:spPr>
-          <a:xfrm>
-            <a:off x="1097280" y="3008376"/>
-            <a:ext cx="5303520" cy="658368"/>
-          </a:xfrm>
-          <a:prstGeom prst="rect">
-            <a:avLst/>
-          </a:prstGeom>
-          <a:noFill/>
-          <a:ln/>
-        </p:spPr>
-        <p:txBody>
-          <a:bodyPr wrap="square" lIns="0" tIns="0" rIns="0" bIns="0" rtlCol="0" anchor="t"/>
-          <a:lstStyle/>
-          <a:p>
-            <a:pPr indent="0" marL="0">
-              <a:buNone/>
-            </a:pPr>
-            <a:r>
-              <a:rPr lang="en-US" sz="1400" dirty="0">
-                <a:solidFill>
-                  <a:srgbClr val="E8EEF7"/>
-                </a:solidFill>
-                <a:latin typeface="Calibri" pitchFamily="34" charset="0"/>
-                <a:ea typeface="Calibri" pitchFamily="34" charset="-122"/>
-                <a:cs typeface="Calibri" pitchFamily="34" charset="-120"/>
-              </a:rPr>
-              <a:t>Clique em </a:t>
-            </a:r>
-            <a:pPr indent="0" marL="0">
-              <a:buNone/>
-            </a:pPr>
-            <a:r>
-              <a:rPr lang="en-US" sz="1400" b="1" dirty="0">
-                <a:solidFill>
-                  <a:srgbClr val="E8EEF7"/>
-                </a:solidFill>
-                <a:latin typeface="Calibri" pitchFamily="34" charset="0"/>
-                <a:ea typeface="Calibri" pitchFamily="34" charset="-122"/>
-                <a:cs typeface="Calibri" pitchFamily="34" charset="-120"/>
-              </a:rPr>
-              <a:t>Escolher arquivo</a:t>
-            </a:r>
-            <a:pPr indent="0" marL="0">
-              <a:buNone/>
-            </a:pPr>
-            <a:r>
-              <a:rPr lang="en-US" sz="1400" dirty="0">
-                <a:solidFill>
-                  <a:srgbClr val="E8EEF7"/>
-                </a:solidFill>
-                <a:latin typeface="Calibri" pitchFamily="34" charset="0"/>
-                <a:ea typeface="Calibri" pitchFamily="34" charset="-122"/>
-                <a:cs typeface="Calibri" pitchFamily="34" charset="-120"/>
-              </a:rPr>
-              <a:t> e localize o documento (até 25MB — PDF, DOCX, PPTX, MP4, ZIP);</a:t>
-            </a:r>
-            <a:endParaRPr lang="en-US" sz="1400" dirty="0"/>
-          </a:p>
-        </p:txBody>
-      </p:sp>
-      <p:sp>
-        <p:nvSpPr>
-          <p:cNvPr id="13" name="Shape 11"/>
-          <p:cNvSpPr/>
-          <p:nvPr/>
-        </p:nvSpPr>
-        <p:spPr>
-          <a:xfrm>
-            <a:off x="640080" y="3712464"/>
-            <a:ext cx="310896" cy="310896"/>
-          </a:xfrm>
-          <a:prstGeom prst="ellipse">
-            <a:avLst/>
-          </a:prstGeom>
-          <a:solidFill>
-            <a:srgbClr val="22D3EE"/>
-          </a:solidFill>
-          <a:ln/>
-        </p:spPr>
-      </p:sp>
-      <p:sp>
-        <p:nvSpPr>
-          <p:cNvPr id="14" name="Text 12"/>
-          <p:cNvSpPr/>
-          <p:nvPr/>
-        </p:nvSpPr>
-        <p:spPr>
-          <a:xfrm>
-            <a:off x="640080" y="3712464"/>
-            <a:ext cx="310896" cy="310896"/>
-          </a:xfrm>
-          <a:prstGeom prst="rect">
-            <a:avLst/>
-          </a:prstGeom>
-          <a:noFill/>
-          <a:ln/>
-        </p:spPr>
-        <p:txBody>
-          <a:bodyPr wrap="square" lIns="0" tIns="0" rIns="0" bIns="0" rtlCol="0" anchor="ctr"/>
-          <a:lstStyle/>
-          <a:p>
-            <a:pPr algn="ctr" indent="0" marL="0">
-              <a:buNone/>
-            </a:pPr>
-            <a:r>
-              <a:rPr lang="en-US" sz="1300" b="1" dirty="0">
-                <a:solidFill>
-                  <a:srgbClr val="07101F"/>
-                </a:solidFill>
-                <a:latin typeface="Calibri" pitchFamily="34" charset="0"/>
-                <a:ea typeface="Calibri" pitchFamily="34" charset="-122"/>
-                <a:cs typeface="Calibri" pitchFamily="34" charset="-120"/>
-              </a:rPr>
-              <a:t>4</a:t>
-            </a:r>
-            <a:endParaRPr lang="en-US" sz="1300" dirty="0"/>
-          </a:p>
-        </p:txBody>
-      </p:sp>
-      <p:sp>
-        <p:nvSpPr>
-          <p:cNvPr id="15" name="Text 13"/>
-          <p:cNvSpPr/>
-          <p:nvPr/>
-        </p:nvSpPr>
-        <p:spPr>
-          <a:xfrm>
-            <a:off x="1097280" y="3666744"/>
-            <a:ext cx="5303520" cy="658368"/>
-          </a:xfrm>
-          <a:prstGeom prst="rect">
-            <a:avLst/>
-          </a:prstGeom>
-          <a:noFill/>
-          <a:ln/>
-        </p:spPr>
-        <p:txBody>
-          <a:bodyPr wrap="square" lIns="0" tIns="0" rIns="0" bIns="0" rtlCol="0" anchor="t"/>
-          <a:lstStyle/>
-          <a:p>
-            <a:pPr indent="0" marL="0">
-              <a:buNone/>
-            </a:pPr>
-            <a:r>
-              <a:rPr lang="en-US" sz="1400" dirty="0">
-                <a:solidFill>
-                  <a:srgbClr val="E8EEF7"/>
-                </a:solidFill>
-                <a:latin typeface="Calibri" pitchFamily="34" charset="0"/>
-                <a:ea typeface="Calibri" pitchFamily="34" charset="-122"/>
-                <a:cs typeface="Calibri" pitchFamily="34" charset="-120"/>
-              </a:rPr>
-              <a:t>Clique em </a:t>
-            </a:r>
-            <a:pPr indent="0" marL="0">
-              <a:buNone/>
-            </a:pPr>
-            <a:r>
-              <a:rPr lang="en-US" sz="1400" b="1" dirty="0">
-                <a:solidFill>
-                  <a:srgbClr val="22D3EE"/>
-                </a:solidFill>
-                <a:latin typeface="Calibri" pitchFamily="34" charset="0"/>
-                <a:ea typeface="Calibri" pitchFamily="34" charset="-122"/>
-                <a:cs typeface="Calibri" pitchFamily="34" charset="-120"/>
-              </a:rPr>
-              <a:t>Enviar</a:t>
-            </a:r>
-            <a:pPr indent="0" marL="0">
-              <a:buNone/>
-            </a:pPr>
-            <a:r>
-              <a:rPr lang="en-US" sz="1400" dirty="0">
-                <a:solidFill>
-                  <a:srgbClr val="E8EEF7"/>
-                </a:solidFill>
-                <a:latin typeface="Calibri" pitchFamily="34" charset="0"/>
-                <a:ea typeface="Calibri" pitchFamily="34" charset="-122"/>
-                <a:cs typeface="Calibri" pitchFamily="34" charset="-120"/>
-              </a:rPr>
-              <a:t>. A próxima etapa é liberada.</a:t>
-            </a:r>
-            <a:endParaRPr lang="en-US" sz="1400" dirty="0"/>
-          </a:p>
-        </p:txBody>
-      </p:sp>
-      <p:sp>
-        <p:nvSpPr>
-          <p:cNvPr id="16" name="Shape 14"/>
-          <p:cNvSpPr/>
-          <p:nvPr/>
-        </p:nvSpPr>
-        <p:spPr>
-          <a:xfrm>
-            <a:off x="6766560" y="1828800"/>
-            <a:ext cx="4846320" cy="1828800"/>
+            <a:off x="640080" y="1508760"/>
+            <a:ext cx="10972800" cy="2095944"/>
           </a:xfrm>
           <a:prstGeom prst="roundRect">
             <a:avLst>
-              <a:gd name="adj" fmla="val 4500"/>
+              <a:gd name="adj" fmla="val 3926"/>
             </a:avLst>
           </a:prstGeom>
           <a:solidFill>
@@ -2904,101 +2489,44 @@
           </a:ln>
         </p:spPr>
       </p:sp>
-      <p:sp>
-        <p:nvSpPr>
-          <p:cNvPr id="17" name="Text 15"/>
-          <p:cNvSpPr/>
-          <p:nvPr/>
-        </p:nvSpPr>
-        <p:spPr>
-          <a:xfrm>
-            <a:off x="6967728" y="1975104"/>
-            <a:ext cx="4443984" cy="329184"/>
-          </a:xfrm>
-          <a:prstGeom prst="rect">
-            <a:avLst/>
-          </a:prstGeom>
-          <a:noFill/>
-          <a:ln/>
-        </p:spPr>
-        <p:txBody>
-          <a:bodyPr wrap="square" lIns="0" tIns="0" rIns="0" bIns="0" rtlCol="0" anchor="ctr"/>
-          <a:lstStyle/>
-          <a:p>
-            <a:pPr indent="0" marL="0">
-              <a:buNone/>
-            </a:pPr>
-            <a:r>
-              <a:rPr lang="en-US" sz="1400" b="1" dirty="0">
-                <a:solidFill>
-                  <a:srgbClr val="22D3EE"/>
-                </a:solidFill>
-                <a:latin typeface="Calibri" pitchFamily="34" charset="0"/>
-                <a:ea typeface="Calibri" pitchFamily="34" charset="-122"/>
-                <a:cs typeface="Calibri" pitchFamily="34" charset="-120"/>
-              </a:rPr>
-              <a:t>Por que existe uma ordem?</a:t>
-            </a:r>
-            <a:endParaRPr lang="en-US" sz="1400" dirty="0"/>
-          </a:p>
-        </p:txBody>
-      </p:sp>
-      <p:sp>
-        <p:nvSpPr>
-          <p:cNvPr id="18" name="Text 16"/>
-          <p:cNvSpPr/>
-          <p:nvPr/>
-        </p:nvSpPr>
-        <p:spPr>
-          <a:xfrm>
-            <a:off x="6967728" y="2304288"/>
-            <a:ext cx="4443984" cy="1225296"/>
-          </a:xfrm>
-          <a:prstGeom prst="rect">
-            <a:avLst/>
-          </a:prstGeom>
-          <a:noFill/>
-          <a:ln/>
-        </p:spPr>
-        <p:txBody>
-          <a:bodyPr wrap="square" lIns="0" tIns="0" rIns="0" bIns="0" rtlCol="0" anchor="t"/>
-          <a:lstStyle/>
-          <a:p>
-            <a:pPr indent="0" marL="0">
-              <a:lnSpc>
-                <a:spcPct val="112000"/>
-              </a:lnSpc>
-              <a:buNone/>
-            </a:pPr>
-            <a:r>
-              <a:rPr lang="en-US" sz="1250" dirty="0">
-                <a:solidFill>
-                  <a:srgbClr val="E8EEF7"/>
-                </a:solidFill>
-                <a:latin typeface="Calibri" pitchFamily="34" charset="0"/>
-                <a:ea typeface="Calibri" pitchFamily="34" charset="-122"/>
-                <a:cs typeface="Calibri" pitchFamily="34" charset="-120"/>
-              </a:rPr>
-              <a:t>É a sequência em que a MB Estúdios monta o curso na plataforma. O sistema garante que nada chegue faltando ou fora de lugar.</a:t>
-            </a:r>
-            <a:endParaRPr lang="en-US" sz="1250" dirty="0"/>
-          </a:p>
-        </p:txBody>
-      </p:sp>
-      <p:sp>
-        <p:nvSpPr>
-          <p:cNvPr id="19" name="Shape 17"/>
-          <p:cNvSpPr/>
-          <p:nvPr/>
-        </p:nvSpPr>
-        <p:spPr>
-          <a:xfrm>
-            <a:off x="640080" y="4343400"/>
-            <a:ext cx="10972800" cy="1696352"/>
+      <p:pic>
+        <p:nvPicPr>
+          <p:cNvPr id="5" name="Image 0" descr="/home/user/AutoriaSCS-Scrum-cursos/docs/tutoriais/img/ordem-entrega.png">    </p:cNvPr>
+          <p:cNvPicPr>
+            <a:picLocks noChangeAspect="1"/>
+          </p:cNvPicPr>
+          <p:nvPr/>
+        </p:nvPicPr>
+        <p:blipFill>
+          <a:blip r:embed="rId1"/>
+          <a:stretch>
+            <a:fillRect/>
+          </a:stretch>
+        </p:blipFill>
+        <p:spPr>
+          <a:xfrm>
+            <a:off x="749808" y="1618488"/>
+            <a:ext cx="10753344" cy="1876488"/>
+          </a:xfrm>
+          <a:prstGeom prst="rect">
+            <a:avLst/>
+          </a:prstGeom>
+        </p:spPr>
+      </p:pic>
+      <p:sp>
+        <p:nvSpPr>
+          <p:cNvPr id="6" name="Shape 3"/>
+          <p:cNvSpPr/>
+          <p:nvPr/>
+        </p:nvSpPr>
+        <p:spPr>
+          <a:xfrm>
+            <a:off x="640080" y="3840480"/>
+            <a:ext cx="5394960" cy="2194560"/>
           </a:xfrm>
           <a:prstGeom prst="roundRect">
             <a:avLst>
-              <a:gd name="adj" fmla="val 4851"/>
+              <a:gd name="adj" fmla="val 3750"/>
             </a:avLst>
           </a:prstGeom>
           <a:solidFill>
@@ -3012,33 +2540,367 @@
           </a:ln>
         </p:spPr>
       </p:sp>
-      <p:pic>
-        <p:nvPicPr>
-          <p:cNvPr id="20" name="Image 0" descr="/home/user/AutoriaSCS-Scrum-cursos/docs/tutoriais/img/upload-form.png">    </p:cNvPr>
-          <p:cNvPicPr>
-            <a:picLocks noChangeAspect="1"/>
-          </p:cNvPicPr>
-          <p:nvPr/>
-        </p:nvPicPr>
-        <p:blipFill>
-          <a:blip r:embed="rId1"/>
-          <a:stretch>
-            <a:fillRect/>
-          </a:stretch>
-        </p:blipFill>
-        <p:spPr>
-          <a:xfrm>
-            <a:off x="749808" y="4453128"/>
-            <a:ext cx="10753344" cy="1476896"/>
-          </a:xfrm>
-          <a:prstGeom prst="rect">
-            <a:avLst/>
-          </a:prstGeom>
-        </p:spPr>
-      </p:pic>
-      <p:sp>
-        <p:nvSpPr>
-          <p:cNvPr id="21" name="Text 18"/>
+      <p:sp>
+        <p:nvSpPr>
+          <p:cNvPr id="7" name="Text 4"/>
+          <p:cNvSpPr/>
+          <p:nvPr/>
+        </p:nvSpPr>
+        <p:spPr>
+          <a:xfrm>
+            <a:off x="841248" y="3986784"/>
+            <a:ext cx="4992624" cy="329184"/>
+          </a:xfrm>
+          <a:prstGeom prst="rect">
+            <a:avLst/>
+          </a:prstGeom>
+          <a:noFill/>
+          <a:ln/>
+        </p:spPr>
+        <p:txBody>
+          <a:bodyPr wrap="square" lIns="0" tIns="0" rIns="0" bIns="0" rtlCol="0" anchor="ctr"/>
+          <a:lstStyle/>
+          <a:p>
+            <a:pPr indent="0" marL="0">
+              <a:buNone/>
+            </a:pPr>
+            <a:r>
+              <a:rPr lang="en-US" sz="1400" b="1" dirty="0">
+                <a:solidFill>
+                  <a:srgbClr val="22D3EE"/>
+                </a:solidFill>
+                <a:latin typeface="Calibri" pitchFamily="34" charset="0"/>
+                <a:ea typeface="Calibri" pitchFamily="34" charset="-122"/>
+                <a:cs typeface="Calibri" pitchFamily="34" charset="-120"/>
+              </a:rPr>
+              <a:t>Módulo Geral</a:t>
+            </a:r>
+            <a:endParaRPr lang="en-US" sz="1400" dirty="0"/>
+          </a:p>
+        </p:txBody>
+      </p:sp>
+      <p:sp>
+        <p:nvSpPr>
+          <p:cNvPr id="8" name="Text 5"/>
+          <p:cNvSpPr/>
+          <p:nvPr/>
+        </p:nvSpPr>
+        <p:spPr>
+          <a:xfrm>
+            <a:off x="841248" y="4315968"/>
+            <a:ext cx="4992624" cy="1591056"/>
+          </a:xfrm>
+          <a:prstGeom prst="rect">
+            <a:avLst/>
+          </a:prstGeom>
+          <a:noFill/>
+          <a:ln/>
+        </p:spPr>
+        <p:txBody>
+          <a:bodyPr wrap="square" lIns="0" tIns="0" rIns="0" bIns="0" rtlCol="0" anchor="t"/>
+          <a:lstStyle/>
+          <a:p>
+            <a:pPr indent="0" marL="0">
+              <a:lnSpc>
+                <a:spcPct val="112000"/>
+              </a:lnSpc>
+              <a:buNone/>
+            </a:pPr>
+            <a:r>
+              <a:rPr lang="en-US" sz="1250" dirty="0">
+                <a:solidFill>
+                  <a:srgbClr val="E8EEF7"/>
+                </a:solidFill>
+                <a:latin typeface="Calibri" pitchFamily="34" charset="0"/>
+                <a:ea typeface="Calibri" pitchFamily="34" charset="-122"/>
+                <a:cs typeface="Calibri" pitchFamily="34" charset="-120"/>
+              </a:rPr>
+              <a:t>1. Apresentação do(s) Formador(es)</a:t>
+            </a:r>
+            <a:endParaRPr lang="en-US" sz="1250" dirty="0"/>
+          </a:p>
+          <a:p>
+            <a:pPr indent="0" marL="0">
+              <a:lnSpc>
+                <a:spcPct val="112000"/>
+              </a:lnSpc>
+              <a:buNone/>
+            </a:pPr>
+            <a:r>
+              <a:rPr lang="en-US" sz="1250" dirty="0">
+                <a:solidFill>
+                  <a:srgbClr val="E8EEF7"/>
+                </a:solidFill>
+                <a:latin typeface="Calibri" pitchFamily="34" charset="0"/>
+                <a:ea typeface="Calibri" pitchFamily="34" charset="-122"/>
+                <a:cs typeface="Calibri" pitchFamily="34" charset="-120"/>
+              </a:rPr>
+              <a:t>2. Apresentação do Curso</a:t>
+            </a:r>
+            <a:endParaRPr lang="en-US" sz="1250" dirty="0"/>
+          </a:p>
+          <a:p>
+            <a:pPr indent="0" marL="0">
+              <a:lnSpc>
+                <a:spcPct val="112000"/>
+              </a:lnSpc>
+              <a:buNone/>
+            </a:pPr>
+            <a:r>
+              <a:rPr lang="en-US" sz="1250" dirty="0">
+                <a:solidFill>
+                  <a:srgbClr val="E8EEF7"/>
+                </a:solidFill>
+                <a:latin typeface="Calibri" pitchFamily="34" charset="0"/>
+                <a:ea typeface="Calibri" pitchFamily="34" charset="-122"/>
+                <a:cs typeface="Calibri" pitchFamily="34" charset="-120"/>
+              </a:rPr>
+              <a:t>3. Objetivos</a:t>
+            </a:r>
+            <a:endParaRPr lang="en-US" sz="1250" dirty="0"/>
+          </a:p>
+          <a:p>
+            <a:pPr indent="0" marL="0">
+              <a:lnSpc>
+                <a:spcPct val="112000"/>
+              </a:lnSpc>
+              <a:buNone/>
+            </a:pPr>
+            <a:r>
+              <a:rPr lang="en-US" sz="1250" dirty="0">
+                <a:solidFill>
+                  <a:srgbClr val="E8EEF7"/>
+                </a:solidFill>
+                <a:latin typeface="Calibri" pitchFamily="34" charset="0"/>
+                <a:ea typeface="Calibri" pitchFamily="34" charset="-122"/>
+                <a:cs typeface="Calibri" pitchFamily="34" charset="-120"/>
+              </a:rPr>
+              <a:t>4. Atividade Avaliativa Geral (opcional)</a:t>
+            </a:r>
+            <a:endParaRPr lang="en-US" sz="1250" dirty="0"/>
+          </a:p>
+          <a:p>
+            <a:pPr indent="0" marL="0">
+              <a:lnSpc>
+                <a:spcPct val="112000"/>
+              </a:lnSpc>
+              <a:buNone/>
+            </a:pPr>
+            <a:r>
+              <a:rPr lang="en-US" sz="1250" dirty="0">
+                <a:solidFill>
+                  <a:srgbClr val="E8EEF7"/>
+                </a:solidFill>
+                <a:latin typeface="Calibri" pitchFamily="34" charset="0"/>
+                <a:ea typeface="Calibri" pitchFamily="34" charset="-122"/>
+                <a:cs typeface="Calibri" pitchFamily="34" charset="-120"/>
+              </a:rPr>
+              <a:t>5. Referência Bibliográfica</a:t>
+            </a:r>
+            <a:endParaRPr lang="en-US" sz="1250" dirty="0"/>
+          </a:p>
+        </p:txBody>
+      </p:sp>
+      <p:sp>
+        <p:nvSpPr>
+          <p:cNvPr id="9" name="Shape 6"/>
+          <p:cNvSpPr/>
+          <p:nvPr/>
+        </p:nvSpPr>
+        <p:spPr>
+          <a:xfrm>
+            <a:off x="6217920" y="3840480"/>
+            <a:ext cx="5394960" cy="2194560"/>
+          </a:xfrm>
+          <a:prstGeom prst="roundRect">
+            <a:avLst>
+              <a:gd name="adj" fmla="val 3750"/>
+            </a:avLst>
+          </a:prstGeom>
+          <a:solidFill>
+            <a:srgbClr val="10233F"/>
+          </a:solidFill>
+          <a:ln w="12700">
+            <a:solidFill>
+              <a:srgbClr val="1D3A5F"/>
+            </a:solidFill>
+            <a:prstDash val="solid"/>
+          </a:ln>
+        </p:spPr>
+      </p:sp>
+      <p:sp>
+        <p:nvSpPr>
+          <p:cNvPr id="10" name="Text 7"/>
+          <p:cNvSpPr/>
+          <p:nvPr/>
+        </p:nvSpPr>
+        <p:spPr>
+          <a:xfrm>
+            <a:off x="6419088" y="3986784"/>
+            <a:ext cx="4992624" cy="329184"/>
+          </a:xfrm>
+          <a:prstGeom prst="rect">
+            <a:avLst/>
+          </a:prstGeom>
+          <a:noFill/>
+          <a:ln/>
+        </p:spPr>
+        <p:txBody>
+          <a:bodyPr wrap="square" lIns="0" tIns="0" rIns="0" bIns="0" rtlCol="0" anchor="ctr"/>
+          <a:lstStyle/>
+          <a:p>
+            <a:pPr indent="0" marL="0">
+              <a:buNone/>
+            </a:pPr>
+            <a:r>
+              <a:rPr lang="en-US" sz="1400" b="1" dirty="0">
+                <a:solidFill>
+                  <a:srgbClr val="22D3EE"/>
+                </a:solidFill>
+                <a:latin typeface="Calibri" pitchFamily="34" charset="0"/>
+                <a:ea typeface="Calibri" pitchFamily="34" charset="-122"/>
+                <a:cs typeface="Calibri" pitchFamily="34" charset="-120"/>
+              </a:rPr>
+              <a:t>Módulos 1 a 8</a:t>
+            </a:r>
+            <a:endParaRPr lang="en-US" sz="1400" dirty="0"/>
+          </a:p>
+        </p:txBody>
+      </p:sp>
+      <p:sp>
+        <p:nvSpPr>
+          <p:cNvPr id="11" name="Text 8"/>
+          <p:cNvSpPr/>
+          <p:nvPr/>
+        </p:nvSpPr>
+        <p:spPr>
+          <a:xfrm>
+            <a:off x="6419088" y="4315968"/>
+            <a:ext cx="4992624" cy="1591056"/>
+          </a:xfrm>
+          <a:prstGeom prst="rect">
+            <a:avLst/>
+          </a:prstGeom>
+          <a:noFill/>
+          <a:ln/>
+        </p:spPr>
+        <p:txBody>
+          <a:bodyPr wrap="square" lIns="0" tIns="0" rIns="0" bIns="0" rtlCol="0" anchor="t"/>
+          <a:lstStyle/>
+          <a:p>
+            <a:pPr indent="0" marL="0">
+              <a:lnSpc>
+                <a:spcPct val="112000"/>
+              </a:lnSpc>
+              <a:buNone/>
+            </a:pPr>
+            <a:r>
+              <a:rPr lang="en-US" sz="1250" dirty="0">
+                <a:solidFill>
+                  <a:srgbClr val="E8EEF7"/>
+                </a:solidFill>
+                <a:latin typeface="Calibri" pitchFamily="34" charset="0"/>
+                <a:ea typeface="Calibri" pitchFamily="34" charset="-122"/>
+                <a:cs typeface="Calibri" pitchFamily="34" charset="-120"/>
+              </a:rPr>
+              <a:t>1. Apresentação do Módulo</a:t>
+            </a:r>
+            <a:endParaRPr lang="en-US" sz="1250" dirty="0"/>
+          </a:p>
+          <a:p>
+            <a:pPr indent="0" marL="0">
+              <a:lnSpc>
+                <a:spcPct val="112000"/>
+              </a:lnSpc>
+              <a:buNone/>
+            </a:pPr>
+            <a:r>
+              <a:rPr lang="en-US" sz="1250" dirty="0">
+                <a:solidFill>
+                  <a:srgbClr val="E8EEF7"/>
+                </a:solidFill>
+                <a:latin typeface="Calibri" pitchFamily="34" charset="0"/>
+                <a:ea typeface="Calibri" pitchFamily="34" charset="-122"/>
+                <a:cs typeface="Calibri" pitchFamily="34" charset="-120"/>
+              </a:rPr>
+              <a:t>2. Slide   3. Vídeo   4. Anexo</a:t>
+            </a:r>
+            <a:endParaRPr lang="en-US" sz="1250" dirty="0"/>
+          </a:p>
+          <a:p>
+            <a:pPr indent="0" marL="0">
+              <a:lnSpc>
+                <a:spcPct val="112000"/>
+              </a:lnSpc>
+              <a:buNone/>
+            </a:pPr>
+            <a:r>
+              <a:rPr lang="en-US" sz="1250" dirty="0">
+                <a:solidFill>
+                  <a:srgbClr val="E8EEF7"/>
+                </a:solidFill>
+                <a:latin typeface="Calibri" pitchFamily="34" charset="0"/>
+                <a:ea typeface="Calibri" pitchFamily="34" charset="-122"/>
+                <a:cs typeface="Calibri" pitchFamily="34" charset="-120"/>
+              </a:rPr>
+              <a:t>5. Texto Complementar (opcional)</a:t>
+            </a:r>
+            <a:endParaRPr lang="en-US" sz="1250" dirty="0"/>
+          </a:p>
+          <a:p>
+            <a:pPr indent="0" marL="0">
+              <a:lnSpc>
+                <a:spcPct val="112000"/>
+              </a:lnSpc>
+              <a:buNone/>
+            </a:pPr>
+            <a:r>
+              <a:rPr lang="en-US" sz="1250" dirty="0">
+                <a:solidFill>
+                  <a:srgbClr val="E8EEF7"/>
+                </a:solidFill>
+                <a:latin typeface="Calibri" pitchFamily="34" charset="0"/>
+                <a:ea typeface="Calibri" pitchFamily="34" charset="-122"/>
+                <a:cs typeface="Calibri" pitchFamily="34" charset="-120"/>
+              </a:rPr>
+              <a:t>6. Atividade Avaliativa (opcional)</a:t>
+            </a:r>
+            <a:endParaRPr lang="en-US" sz="1250" dirty="0"/>
+          </a:p>
+          <a:p>
+            <a:pPr indent="0" marL="0">
+              <a:lnSpc>
+                <a:spcPct val="112000"/>
+              </a:lnSpc>
+              <a:buNone/>
+            </a:pPr>
+            <a:endParaRPr lang="en-US" sz="1250" dirty="0"/>
+          </a:p>
+          <a:p>
+            <a:pPr indent="0" marL="0">
+              <a:lnSpc>
+                <a:spcPct val="112000"/>
+              </a:lnSpc>
+              <a:buNone/>
+            </a:pPr>
+            <a:r>
+              <a:rPr lang="en-US" sz="1250" dirty="0">
+                <a:solidFill>
+                  <a:srgbClr val="E8EEF7"/>
+                </a:solidFill>
+                <a:latin typeface="Calibri" pitchFamily="34" charset="0"/>
+                <a:ea typeface="Calibri" pitchFamily="34" charset="-122"/>
+                <a:cs typeface="Calibri" pitchFamily="34" charset="-120"/>
+              </a:rPr>
+              <a:t>Nos opcionais, marque "não possuo este material" para liberar a etapa seguinte.</a:t>
+            </a:r>
+            <a:endParaRPr lang="en-US" sz="1250" dirty="0"/>
+          </a:p>
+        </p:txBody>
+      </p:sp>
+      <p:sp>
+        <p:nvSpPr>
+          <p:cNvPr id="12" name="Text 9"/>
           <p:cNvSpPr/>
           <p:nvPr/>
         </p:nvSpPr>
@@ -3077,7 +2939,7 @@
       </p:sp>
       <p:sp>
         <p:nvSpPr>
-          <p:cNvPr id="22" name="Text 19"/>
+          <p:cNvPr id="13" name="Text 10"/>
           <p:cNvSpPr/>
           <p:nvPr/>
         </p:nvSpPr>
@@ -3108,7 +2970,7 @@
                 <a:ea typeface="Calibri" pitchFamily="34" charset="-122"/>
                 <a:cs typeface="Calibri" pitchFamily="34" charset="-120"/>
               </a:rPr>
-              <a:t>10 / 13</a:t>
+              <a:t>10 / 14</a:t>
             </a:r>
             <a:endParaRPr lang="en-US" sz="950" dirty="0"/>
           </a:p>
@@ -3155,7 +3017,7 @@
         <p:spPr>
           <a:xfrm>
             <a:off x="548640" y="320040"/>
-            <a:ext cx="7315200" cy="292608"/>
+            <a:ext cx="5486400" cy="292608"/>
           </a:xfrm>
           <a:prstGeom prst="rect">
             <a:avLst/>
@@ -3179,7 +3041,7 @@
                 <a:ea typeface="Calibri" pitchFamily="34" charset="-122"/>
                 <a:cs typeface="Calibri" pitchFamily="34" charset="-120"/>
               </a:rPr>
-              <a:t>A PARTE MAIS IMPORTANTE</a:t>
+              <a:t>NOVIDADE</a:t>
             </a:r>
             <a:endParaRPr lang="en-US" sz="1200" dirty="0"/>
           </a:p>
@@ -3218,7 +3080,7 @@
                 <a:ea typeface="Calibri" pitchFamily="34" charset="-122"/>
                 <a:cs typeface="Calibri" pitchFamily="34" charset="-120"/>
               </a:rPr>
-              <a:t>6.1 O painel "Ordem de entrega"</a:t>
+              <a:t>7. Analisar os vídeos da MB Estúdios</a:t>
             </a:r>
             <a:endParaRPr lang="en-US" sz="3000" dirty="0"/>
           </a:p>
@@ -3226,18 +3088,441 @@
       </p:sp>
       <p:sp>
         <p:nvSpPr>
-          <p:cNvPr id="4" name="Shape 2"/>
-          <p:cNvSpPr/>
-          <p:nvPr/>
-        </p:nvSpPr>
-        <p:spPr>
-          <a:xfrm>
-            <a:off x="640080" y="1508760"/>
-            <a:ext cx="10972800" cy="2095944"/>
+          <p:cNvPr id="4" name="Text 2"/>
+          <p:cNvSpPr/>
+          <p:nvPr/>
+        </p:nvSpPr>
+        <p:spPr>
+          <a:xfrm>
+            <a:off x="640080" y="1554480"/>
+            <a:ext cx="10972800" cy="731520"/>
+          </a:xfrm>
+          <a:prstGeom prst="rect">
+            <a:avLst/>
+          </a:prstGeom>
+          <a:noFill/>
+          <a:ln/>
+        </p:spPr>
+        <p:txBody>
+          <a:bodyPr wrap="square" lIns="0" tIns="0" rIns="0" bIns="0" rtlCol="0" anchor="ctr"/>
+          <a:lstStyle/>
+          <a:p>
+            <a:pPr indent="0" marL="0">
+              <a:lnSpc>
+                <a:spcPct val="115000"/>
+              </a:lnSpc>
+              <a:buNone/>
+            </a:pPr>
+            <a:r>
+              <a:rPr lang="en-US" sz="1450" dirty="0">
+                <a:solidFill>
+                  <a:srgbClr val="E8EEF7"/>
+                </a:solidFill>
+                <a:latin typeface="Calibri" pitchFamily="34" charset="0"/>
+                <a:ea typeface="Calibri" pitchFamily="34" charset="-122"/>
+                <a:cs typeface="Calibri" pitchFamily="34" charset="-120"/>
+              </a:rPr>
+              <a:t>Os vídeos do seu curso são produzidos pela MB Estúdios. Quando um vídeo fica pronto, você recebe um e-mail com a descrição exata do material e o link. Sua função é assistir e conferir.</a:t>
+            </a:r>
+            <a:endParaRPr lang="en-US" sz="1450" dirty="0"/>
+          </a:p>
+        </p:txBody>
+      </p:sp>
+      <p:sp>
+        <p:nvSpPr>
+          <p:cNvPr id="5" name="Shape 3"/>
+          <p:cNvSpPr/>
+          <p:nvPr/>
+        </p:nvSpPr>
+        <p:spPr>
+          <a:xfrm>
+            <a:off x="640080" y="2331720"/>
+            <a:ext cx="1543507" cy="402336"/>
           </a:xfrm>
           <a:prstGeom prst="roundRect">
             <a:avLst>
-              <a:gd name="adj" fmla="val 3926"/>
+              <a:gd name="adj" fmla="val 50000"/>
+            </a:avLst>
+          </a:prstGeom>
+          <a:solidFill>
+            <a:srgbClr val="10233F"/>
+          </a:solidFill>
+          <a:ln w="15240">
+            <a:solidFill>
+              <a:srgbClr val="1D3A5F"/>
+            </a:solidFill>
+            <a:prstDash val="solid"/>
+          </a:ln>
+        </p:spPr>
+      </p:sp>
+      <p:sp>
+        <p:nvSpPr>
+          <p:cNvPr id="6" name="Text 4"/>
+          <p:cNvSpPr/>
+          <p:nvPr/>
+        </p:nvSpPr>
+        <p:spPr>
+          <a:xfrm>
+            <a:off x="640080" y="2331720"/>
+            <a:ext cx="1543507" cy="402336"/>
+          </a:xfrm>
+          <a:prstGeom prst="rect">
+            <a:avLst/>
+          </a:prstGeom>
+          <a:noFill/>
+          <a:ln/>
+        </p:spPr>
+        <p:txBody>
+          <a:bodyPr wrap="square" lIns="0" tIns="0" rIns="0" bIns="0" rtlCol="0" anchor="ctr"/>
+          <a:lstStyle/>
+          <a:p>
+            <a:pPr algn="ctr" indent="0" marL="0">
+              <a:buNone/>
+            </a:pPr>
+            <a:r>
+              <a:rPr lang="en-US" sz="1250" dirty="0">
+                <a:solidFill>
+                  <a:srgbClr val="E8EEF7"/>
+                </a:solidFill>
+                <a:latin typeface="Calibri" pitchFamily="34" charset="0"/>
+                <a:ea typeface="Calibri" pitchFamily="34" charset="-122"/>
+                <a:cs typeface="Calibri" pitchFamily="34" charset="-120"/>
+              </a:rPr>
+              <a:t>MB disponibiliza</a:t>
+            </a:r>
+            <a:endParaRPr lang="en-US" sz="1250" dirty="0"/>
+          </a:p>
+        </p:txBody>
+      </p:sp>
+      <p:sp>
+        <p:nvSpPr>
+          <p:cNvPr id="7" name="Text 5"/>
+          <p:cNvSpPr/>
+          <p:nvPr/>
+        </p:nvSpPr>
+        <p:spPr>
+          <a:xfrm>
+            <a:off x="2220163" y="2331720"/>
+            <a:ext cx="274320" cy="402336"/>
+          </a:xfrm>
+          <a:prstGeom prst="rect">
+            <a:avLst/>
+          </a:prstGeom>
+          <a:noFill/>
+          <a:ln/>
+        </p:spPr>
+        <p:txBody>
+          <a:bodyPr wrap="square" lIns="0" tIns="0" rIns="0" bIns="0" rtlCol="0" anchor="ctr"/>
+          <a:lstStyle/>
+          <a:p>
+            <a:pPr algn="ctr" indent="0" marL="0">
+              <a:buNone/>
+            </a:pPr>
+            <a:r>
+              <a:rPr lang="en-US" sz="1500" b="1" dirty="0">
+                <a:solidFill>
+                  <a:srgbClr val="06B6D4"/>
+                </a:solidFill>
+                <a:latin typeface="Calibri" pitchFamily="34" charset="0"/>
+                <a:ea typeface="Calibri" pitchFamily="34" charset="-122"/>
+                <a:cs typeface="Calibri" pitchFamily="34" charset="-120"/>
+              </a:rPr>
+              <a:t>→</a:t>
+            </a:r>
+            <a:endParaRPr lang="en-US" sz="1500" dirty="0"/>
+          </a:p>
+        </p:txBody>
+      </p:sp>
+      <p:sp>
+        <p:nvSpPr>
+          <p:cNvPr id="8" name="Shape 6"/>
+          <p:cNvSpPr/>
+          <p:nvPr/>
+        </p:nvSpPr>
+        <p:spPr>
+          <a:xfrm>
+            <a:off x="2531059" y="2331720"/>
+            <a:ext cx="1865376" cy="402336"/>
+          </a:xfrm>
+          <a:prstGeom prst="roundRect">
+            <a:avLst>
+              <a:gd name="adj" fmla="val 50000"/>
+            </a:avLst>
+          </a:prstGeom>
+          <a:solidFill>
+            <a:srgbClr val="10233F"/>
+          </a:solidFill>
+          <a:ln w="15240">
+            <a:solidFill>
+              <a:srgbClr val="1D3A5F"/>
+            </a:solidFill>
+            <a:prstDash val="solid"/>
+          </a:ln>
+        </p:spPr>
+      </p:sp>
+      <p:sp>
+        <p:nvSpPr>
+          <p:cNvPr id="9" name="Text 7"/>
+          <p:cNvSpPr/>
+          <p:nvPr/>
+        </p:nvSpPr>
+        <p:spPr>
+          <a:xfrm>
+            <a:off x="2531059" y="2331720"/>
+            <a:ext cx="1865376" cy="402336"/>
+          </a:xfrm>
+          <a:prstGeom prst="rect">
+            <a:avLst/>
+          </a:prstGeom>
+          <a:noFill/>
+          <a:ln/>
+        </p:spPr>
+        <p:txBody>
+          <a:bodyPr wrap="square" lIns="0" tIns="0" rIns="0" bIns="0" rtlCol="0" anchor="ctr"/>
+          <a:lstStyle/>
+          <a:p>
+            <a:pPr algn="ctr" indent="0" marL="0">
+              <a:buNone/>
+            </a:pPr>
+            <a:r>
+              <a:rPr lang="en-US" sz="1250" dirty="0">
+                <a:solidFill>
+                  <a:srgbClr val="E8EEF7"/>
+                </a:solidFill>
+                <a:latin typeface="Calibri" pitchFamily="34" charset="0"/>
+                <a:ea typeface="Calibri" pitchFamily="34" charset="-122"/>
+                <a:cs typeface="Calibri" pitchFamily="34" charset="-120"/>
+              </a:rPr>
+              <a:t>Você analisa e marca</a:t>
+            </a:r>
+            <a:endParaRPr lang="en-US" sz="1250" dirty="0"/>
+          </a:p>
+        </p:txBody>
+      </p:sp>
+      <p:sp>
+        <p:nvSpPr>
+          <p:cNvPr id="10" name="Text 8"/>
+          <p:cNvSpPr/>
+          <p:nvPr/>
+        </p:nvSpPr>
+        <p:spPr>
+          <a:xfrm>
+            <a:off x="4433011" y="2331720"/>
+            <a:ext cx="274320" cy="402336"/>
+          </a:xfrm>
+          <a:prstGeom prst="rect">
+            <a:avLst/>
+          </a:prstGeom>
+          <a:noFill/>
+          <a:ln/>
+        </p:spPr>
+        <p:txBody>
+          <a:bodyPr wrap="square" lIns="0" tIns="0" rIns="0" bIns="0" rtlCol="0" anchor="ctr"/>
+          <a:lstStyle/>
+          <a:p>
+            <a:pPr algn="ctr" indent="0" marL="0">
+              <a:buNone/>
+            </a:pPr>
+            <a:r>
+              <a:rPr lang="en-US" sz="1500" b="1" dirty="0">
+                <a:solidFill>
+                  <a:srgbClr val="06B6D4"/>
+                </a:solidFill>
+                <a:latin typeface="Calibri" pitchFamily="34" charset="0"/>
+                <a:ea typeface="Calibri" pitchFamily="34" charset="-122"/>
+                <a:cs typeface="Calibri" pitchFamily="34" charset="-120"/>
+              </a:rPr>
+              <a:t>→</a:t>
+            </a:r>
+            <a:endParaRPr lang="en-US" sz="1500" dirty="0"/>
+          </a:p>
+        </p:txBody>
+      </p:sp>
+      <p:sp>
+        <p:nvSpPr>
+          <p:cNvPr id="11" name="Shape 9"/>
+          <p:cNvSpPr/>
+          <p:nvPr/>
+        </p:nvSpPr>
+        <p:spPr>
+          <a:xfrm>
+            <a:off x="4743907" y="2331720"/>
+            <a:ext cx="1060704" cy="402336"/>
+          </a:xfrm>
+          <a:prstGeom prst="roundRect">
+            <a:avLst>
+              <a:gd name="adj" fmla="val 50000"/>
+            </a:avLst>
+          </a:prstGeom>
+          <a:solidFill>
+            <a:srgbClr val="10233F"/>
+          </a:solidFill>
+          <a:ln w="15240">
+            <a:solidFill>
+              <a:srgbClr val="1D3A5F"/>
+            </a:solidFill>
+            <a:prstDash val="solid"/>
+          </a:ln>
+        </p:spPr>
+      </p:sp>
+      <p:sp>
+        <p:nvSpPr>
+          <p:cNvPr id="12" name="Text 10"/>
+          <p:cNvSpPr/>
+          <p:nvPr/>
+        </p:nvSpPr>
+        <p:spPr>
+          <a:xfrm>
+            <a:off x="4743907" y="2331720"/>
+            <a:ext cx="1060704" cy="402336"/>
+          </a:xfrm>
+          <a:prstGeom prst="rect">
+            <a:avLst/>
+          </a:prstGeom>
+          <a:noFill/>
+          <a:ln/>
+        </p:spPr>
+        <p:txBody>
+          <a:bodyPr wrap="square" lIns="0" tIns="0" rIns="0" bIns="0" rtlCol="0" anchor="ctr"/>
+          <a:lstStyle/>
+          <a:p>
+            <a:pPr algn="ctr" indent="0" marL="0">
+              <a:buNone/>
+            </a:pPr>
+            <a:r>
+              <a:rPr lang="en-US" sz="1250" dirty="0">
+                <a:solidFill>
+                  <a:srgbClr val="E8EEF7"/>
+                </a:solidFill>
+                <a:latin typeface="Calibri" pitchFamily="34" charset="0"/>
+                <a:ea typeface="Calibri" pitchFamily="34" charset="-122"/>
+                <a:cs typeface="Calibri" pitchFamily="34" charset="-120"/>
+              </a:rPr>
+              <a:t>MB corrige</a:t>
+            </a:r>
+            <a:endParaRPr lang="en-US" sz="1250" dirty="0"/>
+          </a:p>
+        </p:txBody>
+      </p:sp>
+      <p:sp>
+        <p:nvSpPr>
+          <p:cNvPr id="13" name="Text 11"/>
+          <p:cNvSpPr/>
+          <p:nvPr/>
+        </p:nvSpPr>
+        <p:spPr>
+          <a:xfrm>
+            <a:off x="5841187" y="2331720"/>
+            <a:ext cx="274320" cy="402336"/>
+          </a:xfrm>
+          <a:prstGeom prst="rect">
+            <a:avLst/>
+          </a:prstGeom>
+          <a:noFill/>
+          <a:ln/>
+        </p:spPr>
+        <p:txBody>
+          <a:bodyPr wrap="square" lIns="0" tIns="0" rIns="0" bIns="0" rtlCol="0" anchor="ctr"/>
+          <a:lstStyle/>
+          <a:p>
+            <a:pPr algn="ctr" indent="0" marL="0">
+              <a:buNone/>
+            </a:pPr>
+            <a:r>
+              <a:rPr lang="en-US" sz="1500" b="1" dirty="0">
+                <a:solidFill>
+                  <a:srgbClr val="06B6D4"/>
+                </a:solidFill>
+                <a:latin typeface="Calibri" pitchFamily="34" charset="0"/>
+                <a:ea typeface="Calibri" pitchFamily="34" charset="-122"/>
+                <a:cs typeface="Calibri" pitchFamily="34" charset="-120"/>
+              </a:rPr>
+              <a:t>→</a:t>
+            </a:r>
+            <a:endParaRPr lang="en-US" sz="1500" dirty="0"/>
+          </a:p>
+        </p:txBody>
+      </p:sp>
+      <p:sp>
+        <p:nvSpPr>
+          <p:cNvPr id="14" name="Shape 12"/>
+          <p:cNvSpPr/>
+          <p:nvPr/>
+        </p:nvSpPr>
+        <p:spPr>
+          <a:xfrm>
+            <a:off x="6152083" y="2331720"/>
+            <a:ext cx="1141171" cy="402336"/>
+          </a:xfrm>
+          <a:prstGeom prst="roundRect">
+            <a:avLst>
+              <a:gd name="adj" fmla="val 50000"/>
+            </a:avLst>
+          </a:prstGeom>
+          <a:solidFill>
+            <a:srgbClr val="10233F"/>
+          </a:solidFill>
+          <a:ln w="15240">
+            <a:solidFill>
+              <a:srgbClr val="34D399"/>
+            </a:solidFill>
+            <a:prstDash val="solid"/>
+          </a:ln>
+        </p:spPr>
+      </p:sp>
+      <p:sp>
+        <p:nvSpPr>
+          <p:cNvPr id="15" name="Text 13"/>
+          <p:cNvSpPr/>
+          <p:nvPr/>
+        </p:nvSpPr>
+        <p:spPr>
+          <a:xfrm>
+            <a:off x="6152083" y="2331720"/>
+            <a:ext cx="1141171" cy="402336"/>
+          </a:xfrm>
+          <a:prstGeom prst="rect">
+            <a:avLst/>
+          </a:prstGeom>
+          <a:noFill/>
+          <a:ln/>
+        </p:spPr>
+        <p:txBody>
+          <a:bodyPr wrap="square" lIns="0" tIns="0" rIns="0" bIns="0" rtlCol="0" anchor="ctr"/>
+          <a:lstStyle/>
+          <a:p>
+            <a:pPr algn="ctr" indent="0" marL="0">
+              <a:buNone/>
+            </a:pPr>
+            <a:r>
+              <a:rPr lang="en-US" sz="1250" b="1" dirty="0">
+                <a:solidFill>
+                  <a:srgbClr val="34D399"/>
+                </a:solidFill>
+                <a:latin typeface="Calibri" pitchFamily="34" charset="0"/>
+                <a:ea typeface="Calibri" pitchFamily="34" charset="-122"/>
+                <a:cs typeface="Calibri" pitchFamily="34" charset="-120"/>
+              </a:rPr>
+              <a:t>Você aprova</a:t>
+            </a:r>
+            <a:endParaRPr lang="en-US" sz="1250" dirty="0"/>
+          </a:p>
+        </p:txBody>
+      </p:sp>
+      <p:sp>
+        <p:nvSpPr>
+          <p:cNvPr id="16" name="Shape 14"/>
+          <p:cNvSpPr/>
+          <p:nvPr/>
+        </p:nvSpPr>
+        <p:spPr>
+          <a:xfrm>
+            <a:off x="1094537" y="3017520"/>
+            <a:ext cx="10063886" cy="1371600"/>
+          </a:xfrm>
+          <a:prstGeom prst="roundRect">
+            <a:avLst>
+              <a:gd name="adj" fmla="val 6000"/>
             </a:avLst>
           </a:prstGeom>
           <a:solidFill>
@@ -3253,7 +3538,7 @@
       </p:sp>
       <p:pic>
         <p:nvPicPr>
-          <p:cNvPr id="5" name="Image 0" descr="/home/user/AutoriaSCS-Scrum-cursos/docs/tutoriais/img/ordem-entrega.png">    </p:cNvPr>
+          <p:cNvPr id="17" name="Image 0" descr="/home/user/AutoriaSCS-Scrum-cursos/docs/tutoriais/img/video-descricao-mb.png">    </p:cNvPr>
           <p:cNvPicPr>
             <a:picLocks noChangeAspect="1"/>
           </p:cNvPicPr>
@@ -3267,8 +3552,8 @@
         </p:blipFill>
         <p:spPr>
           <a:xfrm>
-            <a:off x="749808" y="1618488"/>
-            <a:ext cx="10753344" cy="1876488"/>
+            <a:off x="1204265" y="3127248"/>
+            <a:ext cx="9844430" cy="1152144"/>
           </a:xfrm>
           <a:prstGeom prst="rect">
             <a:avLst/>
@@ -3277,18 +3562,18 @@
       </p:pic>
       <p:sp>
         <p:nvSpPr>
-          <p:cNvPr id="6" name="Shape 3"/>
-          <p:cNvSpPr/>
-          <p:nvPr/>
-        </p:nvSpPr>
-        <p:spPr>
-          <a:xfrm>
-            <a:off x="640080" y="4023360"/>
-            <a:ext cx="5394960" cy="2103120"/>
+          <p:cNvPr id="18" name="Shape 15"/>
+          <p:cNvSpPr/>
+          <p:nvPr/>
+        </p:nvSpPr>
+        <p:spPr>
+          <a:xfrm>
+            <a:off x="640080" y="4572000"/>
+            <a:ext cx="10972800" cy="1463040"/>
           </a:xfrm>
           <a:prstGeom prst="roundRect">
             <a:avLst>
-              <a:gd name="adj" fmla="val 3913"/>
+              <a:gd name="adj" fmla="val 5625"/>
             </a:avLst>
           </a:prstGeom>
           <a:solidFill>
@@ -3304,14 +3589,14 @@
       </p:sp>
       <p:sp>
         <p:nvSpPr>
-          <p:cNvPr id="7" name="Text 4"/>
-          <p:cNvSpPr/>
-          <p:nvPr/>
-        </p:nvSpPr>
-        <p:spPr>
-          <a:xfrm>
-            <a:off x="841248" y="4169664"/>
-            <a:ext cx="4992624" cy="329184"/>
+          <p:cNvPr id="19" name="Text 16"/>
+          <p:cNvSpPr/>
+          <p:nvPr/>
+        </p:nvSpPr>
+        <p:spPr>
+          <a:xfrm>
+            <a:off x="841248" y="4718304"/>
+            <a:ext cx="10570464" cy="329184"/>
           </a:xfrm>
           <a:prstGeom prst="rect">
             <a:avLst/>
@@ -3335,7 +3620,7 @@
                 <a:ea typeface="Calibri" pitchFamily="34" charset="-122"/>
                 <a:cs typeface="Calibri" pitchFamily="34" charset="-120"/>
               </a:rPr>
-              <a:t>Módulo Geral (ordem fixa)</a:t>
+              <a:t>Onde encontrar</a:t>
             </a:r>
             <a:endParaRPr lang="en-US" sz="1400" dirty="0"/>
           </a:p>
@@ -3343,14 +3628,14 @@
       </p:sp>
       <p:sp>
         <p:nvSpPr>
-          <p:cNvPr id="8" name="Text 5"/>
-          <p:cNvSpPr/>
-          <p:nvPr/>
-        </p:nvSpPr>
-        <p:spPr>
-          <a:xfrm>
-            <a:off x="841248" y="4498848"/>
-            <a:ext cx="4992624" cy="1499616"/>
+          <p:cNvPr id="20" name="Text 17"/>
+          <p:cNvSpPr/>
+          <p:nvPr/>
+        </p:nvSpPr>
+        <p:spPr>
+          <a:xfrm>
+            <a:off x="841248" y="5047488"/>
+            <a:ext cx="10570464" cy="859536"/>
           </a:xfrm>
           <a:prstGeom prst="rect">
             <a:avLst/>
@@ -3369,7 +3654,7 @@
               <a:buNone/>
             </a:pPr>
             <a:r>
-              <a:rPr lang="en-US" sz="1250" dirty="0">
+              <a:rPr lang="en-US" sz="1300" dirty="0">
                 <a:solidFill>
                   <a:srgbClr val="E8EEF7"/>
                 </a:solidFill>
@@ -3377,263 +3662,15 @@
                 <a:ea typeface="Calibri" pitchFamily="34" charset="-122"/>
                 <a:cs typeface="Calibri" pitchFamily="34" charset="-120"/>
               </a:rPr>
-              <a:t>1. Apresentação do(s) Formador(es)</a:t>
-            </a:r>
-            <a:endParaRPr lang="en-US" sz="1250" dirty="0"/>
-          </a:p>
-          <a:p>
-            <a:pPr indent="0" marL="0">
-              <a:lnSpc>
-                <a:spcPct val="112000"/>
-              </a:lnSpc>
-              <a:buNone/>
-            </a:pPr>
-            <a:r>
-              <a:rPr lang="en-US" sz="1250" dirty="0">
-                <a:solidFill>
-                  <a:srgbClr val="E8EEF7"/>
-                </a:solidFill>
-                <a:latin typeface="Calibri" pitchFamily="34" charset="0"/>
-                <a:ea typeface="Calibri" pitchFamily="34" charset="-122"/>
-                <a:cs typeface="Calibri" pitchFamily="34" charset="-120"/>
-              </a:rPr>
-              <a:t>2. Apresentação do Curso</a:t>
-            </a:r>
-            <a:endParaRPr lang="en-US" sz="1250" dirty="0"/>
-          </a:p>
-          <a:p>
-            <a:pPr indent="0" marL="0">
-              <a:lnSpc>
-                <a:spcPct val="112000"/>
-              </a:lnSpc>
-              <a:buNone/>
-            </a:pPr>
-            <a:r>
-              <a:rPr lang="en-US" sz="1250" dirty="0">
-                <a:solidFill>
-                  <a:srgbClr val="E8EEF7"/>
-                </a:solidFill>
-                <a:latin typeface="Calibri" pitchFamily="34" charset="0"/>
-                <a:ea typeface="Calibri" pitchFamily="34" charset="-122"/>
-                <a:cs typeface="Calibri" pitchFamily="34" charset="-120"/>
-              </a:rPr>
-              <a:t>3. Objetivos</a:t>
-            </a:r>
-            <a:endParaRPr lang="en-US" sz="1250" dirty="0"/>
-          </a:p>
-          <a:p>
-            <a:pPr indent="0" marL="0">
-              <a:lnSpc>
-                <a:spcPct val="112000"/>
-              </a:lnSpc>
-              <a:buNone/>
-            </a:pPr>
-            <a:r>
-              <a:rPr lang="en-US" sz="1250" dirty="0">
-                <a:solidFill>
-                  <a:srgbClr val="E8EEF7"/>
-                </a:solidFill>
-                <a:latin typeface="Calibri" pitchFamily="34" charset="0"/>
-                <a:ea typeface="Calibri" pitchFamily="34" charset="-122"/>
-                <a:cs typeface="Calibri" pitchFamily="34" charset="-120"/>
-              </a:rPr>
-              <a:t>4. Atividade Avaliativa Geral (opcional)</a:t>
-            </a:r>
-            <a:endParaRPr lang="en-US" sz="1250" dirty="0"/>
-          </a:p>
-          <a:p>
-            <a:pPr indent="0" marL="0">
-              <a:lnSpc>
-                <a:spcPct val="112000"/>
-              </a:lnSpc>
-              <a:buNone/>
-            </a:pPr>
-            <a:r>
-              <a:rPr lang="en-US" sz="1250" dirty="0">
-                <a:solidFill>
-                  <a:srgbClr val="E8EEF7"/>
-                </a:solidFill>
-                <a:latin typeface="Calibri" pitchFamily="34" charset="0"/>
-                <a:ea typeface="Calibri" pitchFamily="34" charset="-122"/>
-                <a:cs typeface="Calibri" pitchFamily="34" charset="-120"/>
-              </a:rPr>
-              <a:t>5. Referência Bibliográfica</a:t>
-            </a:r>
-            <a:endParaRPr lang="en-US" sz="1250" dirty="0"/>
-          </a:p>
-        </p:txBody>
-      </p:sp>
-      <p:sp>
-        <p:nvSpPr>
-          <p:cNvPr id="9" name="Shape 6"/>
-          <p:cNvSpPr/>
-          <p:nvPr/>
-        </p:nvSpPr>
-        <p:spPr>
-          <a:xfrm>
-            <a:off x="6217920" y="4023360"/>
-            <a:ext cx="5394960" cy="2103120"/>
-          </a:xfrm>
-          <a:prstGeom prst="roundRect">
-            <a:avLst>
-              <a:gd name="adj" fmla="val 3913"/>
-            </a:avLst>
-          </a:prstGeom>
-          <a:solidFill>
-            <a:srgbClr val="10233F"/>
-          </a:solidFill>
-          <a:ln w="12700">
-            <a:solidFill>
-              <a:srgbClr val="1D3A5F"/>
-            </a:solidFill>
-            <a:prstDash val="solid"/>
-          </a:ln>
-        </p:spPr>
-      </p:sp>
-      <p:sp>
-        <p:nvSpPr>
-          <p:cNvPr id="10" name="Text 7"/>
-          <p:cNvSpPr/>
-          <p:nvPr/>
-        </p:nvSpPr>
-        <p:spPr>
-          <a:xfrm>
-            <a:off x="6419088" y="4169664"/>
-            <a:ext cx="4992624" cy="329184"/>
-          </a:xfrm>
-          <a:prstGeom prst="rect">
-            <a:avLst/>
-          </a:prstGeom>
-          <a:noFill/>
-          <a:ln/>
-        </p:spPr>
-        <p:txBody>
-          <a:bodyPr wrap="square" lIns="0" tIns="0" rIns="0" bIns="0" rtlCol="0" anchor="ctr"/>
-          <a:lstStyle/>
-          <a:p>
-            <a:pPr indent="0" marL="0">
-              <a:buNone/>
-            </a:pPr>
-            <a:r>
-              <a:rPr lang="en-US" sz="1400" b="1" dirty="0">
-                <a:solidFill>
-                  <a:srgbClr val="22D3EE"/>
-                </a:solidFill>
-                <a:latin typeface="Calibri" pitchFamily="34" charset="0"/>
-                <a:ea typeface="Calibri" pitchFamily="34" charset="-122"/>
-                <a:cs typeface="Calibri" pitchFamily="34" charset="-120"/>
-              </a:rPr>
-              <a:t>Módulos 1 a 8 (cada um tem a sua)</a:t>
-            </a:r>
-            <a:endParaRPr lang="en-US" sz="1400" dirty="0"/>
-          </a:p>
-        </p:txBody>
-      </p:sp>
-      <p:sp>
-        <p:nvSpPr>
-          <p:cNvPr id="11" name="Text 8"/>
-          <p:cNvSpPr/>
-          <p:nvPr/>
-        </p:nvSpPr>
-        <p:spPr>
-          <a:xfrm>
-            <a:off x="6419088" y="4498848"/>
-            <a:ext cx="4992624" cy="1499616"/>
-          </a:xfrm>
-          <a:prstGeom prst="rect">
-            <a:avLst/>
-          </a:prstGeom>
-          <a:noFill/>
-          <a:ln/>
-        </p:spPr>
-        <p:txBody>
-          <a:bodyPr wrap="square" lIns="0" tIns="0" rIns="0" bIns="0" rtlCol="0" anchor="t"/>
-          <a:lstStyle/>
-          <a:p>
-            <a:pPr indent="0" marL="0">
-              <a:lnSpc>
-                <a:spcPct val="112000"/>
-              </a:lnSpc>
-              <a:buNone/>
-            </a:pPr>
-            <a:r>
-              <a:rPr lang="en-US" sz="1250" dirty="0">
-                <a:solidFill>
-                  <a:srgbClr val="E8EEF7"/>
-                </a:solidFill>
-                <a:latin typeface="Calibri" pitchFamily="34" charset="0"/>
-                <a:ea typeface="Calibri" pitchFamily="34" charset="-122"/>
-                <a:cs typeface="Calibri" pitchFamily="34" charset="-120"/>
-              </a:rPr>
-              <a:t>1. Apresentação do Módulo</a:t>
-            </a:r>
-            <a:endParaRPr lang="en-US" sz="1250" dirty="0"/>
-          </a:p>
-          <a:p>
-            <a:pPr indent="0" marL="0">
-              <a:lnSpc>
-                <a:spcPct val="112000"/>
-              </a:lnSpc>
-              <a:buNone/>
-            </a:pPr>
-            <a:r>
-              <a:rPr lang="en-US" sz="1250" dirty="0">
-                <a:solidFill>
-                  <a:srgbClr val="E8EEF7"/>
-                </a:solidFill>
-                <a:latin typeface="Calibri" pitchFamily="34" charset="0"/>
-                <a:ea typeface="Calibri" pitchFamily="34" charset="-122"/>
-                <a:cs typeface="Calibri" pitchFamily="34" charset="-120"/>
-              </a:rPr>
-              <a:t>2. Slide   3. Vídeo   4. Anexo</a:t>
-            </a:r>
-            <a:endParaRPr lang="en-US" sz="1250" dirty="0"/>
-          </a:p>
-          <a:p>
-            <a:pPr indent="0" marL="0">
-              <a:lnSpc>
-                <a:spcPct val="112000"/>
-              </a:lnSpc>
-              <a:buNone/>
-            </a:pPr>
-            <a:r>
-              <a:rPr lang="en-US" sz="1250" dirty="0">
-                <a:solidFill>
-                  <a:srgbClr val="E8EEF7"/>
-                </a:solidFill>
-                <a:latin typeface="Calibri" pitchFamily="34" charset="0"/>
-                <a:ea typeface="Calibri" pitchFamily="34" charset="-122"/>
-                <a:cs typeface="Calibri" pitchFamily="34" charset="-120"/>
-              </a:rPr>
-              <a:t>5. Texto Complementar (opcional)</a:t>
-            </a:r>
-            <a:endParaRPr lang="en-US" sz="1250" dirty="0"/>
-          </a:p>
-          <a:p>
-            <a:pPr indent="0" marL="0">
-              <a:lnSpc>
-                <a:spcPct val="112000"/>
-              </a:lnSpc>
-              <a:buNone/>
-            </a:pPr>
-            <a:r>
-              <a:rPr lang="en-US" sz="1250" dirty="0">
-                <a:solidFill>
-                  <a:srgbClr val="E8EEF7"/>
-                </a:solidFill>
-                <a:latin typeface="Calibri" pitchFamily="34" charset="0"/>
-                <a:ea typeface="Calibri" pitchFamily="34" charset="-122"/>
-                <a:cs typeface="Calibri" pitchFamily="34" charset="-120"/>
-              </a:rPr>
-              <a:t>6. Atividade Avaliativa (opcional)</a:t>
-            </a:r>
-            <a:endParaRPr lang="en-US" sz="1250" dirty="0"/>
-          </a:p>
-        </p:txBody>
-      </p:sp>
-      <p:sp>
-        <p:nvSpPr>
-          <p:cNvPr id="12" name="Text 9"/>
+              <a:t>Abra o curso e clique no botão 🎬 Vídeos (no topo, ao lado de "Apontamentos"). A lista mostra todos os vídeos, a situação de cada um e quantos apontamentos estão em aberto. Clique em "Abrir revisão".</a:t>
+            </a:r>
+            <a:endParaRPr lang="en-US" sz="1300" dirty="0"/>
+          </a:p>
+        </p:txBody>
+      </p:sp>
+      <p:sp>
+        <p:nvSpPr>
+          <p:cNvPr id="21" name="Text 18"/>
           <p:cNvSpPr/>
           <p:nvPr/>
         </p:nvSpPr>
@@ -3672,7 +3709,7 @@
       </p:sp>
       <p:sp>
         <p:nvSpPr>
-          <p:cNvPr id="13" name="Text 10"/>
+          <p:cNvPr id="22" name="Text 19"/>
           <p:cNvSpPr/>
           <p:nvPr/>
         </p:nvSpPr>
@@ -3703,7 +3740,7 @@
                 <a:ea typeface="Calibri" pitchFamily="34" charset="-122"/>
                 <a:cs typeface="Calibri" pitchFamily="34" charset="-120"/>
               </a:rPr>
-              <a:t>11 / 13</a:t>
+              <a:t>11 / 14</a:t>
             </a:r>
             <a:endParaRPr lang="en-US" sz="950" dirty="0"/>
           </a:p>
@@ -3750,7 +3787,7 @@
         <p:spPr>
           <a:xfrm>
             <a:off x="548640" y="320040"/>
-            <a:ext cx="7315200" cy="292608"/>
+            <a:ext cx="5486400" cy="292608"/>
           </a:xfrm>
           <a:prstGeom prst="rect">
             <a:avLst/>
@@ -3774,7 +3811,7 @@
                 <a:ea typeface="Calibri" pitchFamily="34" charset="-122"/>
                 <a:cs typeface="Calibri" pitchFamily="34" charset="-120"/>
               </a:rPr>
-              <a:t>A PARTE MAIS IMPORTANTE</a:t>
+              <a:t>NOVIDADE</a:t>
             </a:r>
             <a:endParaRPr lang="en-US" sz="1200" dirty="0"/>
           </a:p>
@@ -3813,7 +3850,7 @@
                 <a:ea typeface="Calibri" pitchFamily="34" charset="-122"/>
                 <a:cs typeface="Calibri" pitchFamily="34" charset="-120"/>
               </a:rPr>
-              <a:t>6.2 Não tenho esse material — e arquivos grandes</a:t>
+              <a:t>7.1 Marcar um problema no vídeo</a:t>
             </a:r>
             <a:endParaRPr lang="en-US" sz="3000" dirty="0"/>
           </a:p>
@@ -3827,12 +3864,614 @@
         </p:nvSpPr>
         <p:spPr>
           <a:xfrm>
-            <a:off x="640080" y="1600200"/>
-            <a:ext cx="5486400" cy="373235"/>
+            <a:off x="640080" y="1691640"/>
+            <a:ext cx="310896" cy="310896"/>
+          </a:xfrm>
+          <a:prstGeom prst="ellipse">
+            <a:avLst/>
+          </a:prstGeom>
+          <a:solidFill>
+            <a:srgbClr val="22D3EE"/>
+          </a:solidFill>
+          <a:ln/>
+        </p:spPr>
+      </p:sp>
+      <p:sp>
+        <p:nvSpPr>
+          <p:cNvPr id="5" name="Text 3"/>
+          <p:cNvSpPr/>
+          <p:nvPr/>
+        </p:nvSpPr>
+        <p:spPr>
+          <a:xfrm>
+            <a:off x="640080" y="1691640"/>
+            <a:ext cx="310896" cy="310896"/>
+          </a:xfrm>
+          <a:prstGeom prst="rect">
+            <a:avLst/>
+          </a:prstGeom>
+          <a:noFill/>
+          <a:ln/>
+        </p:spPr>
+        <p:txBody>
+          <a:bodyPr wrap="square" lIns="0" tIns="0" rIns="0" bIns="0" rtlCol="0" anchor="ctr"/>
+          <a:lstStyle/>
+          <a:p>
+            <a:pPr algn="ctr" indent="0" marL="0">
+              <a:buNone/>
+            </a:pPr>
+            <a:r>
+              <a:rPr lang="en-US" sz="1300" b="1" dirty="0">
+                <a:solidFill>
+                  <a:srgbClr val="07101F"/>
+                </a:solidFill>
+                <a:latin typeface="Calibri" pitchFamily="34" charset="0"/>
+                <a:ea typeface="Calibri" pitchFamily="34" charset="-122"/>
+                <a:cs typeface="Calibri" pitchFamily="34" charset="-120"/>
+              </a:rPr>
+              <a:t>1</a:t>
+            </a:r>
+            <a:endParaRPr lang="en-US" sz="1300" dirty="0"/>
+          </a:p>
+        </p:txBody>
+      </p:sp>
+      <p:sp>
+        <p:nvSpPr>
+          <p:cNvPr id="6" name="Text 4"/>
+          <p:cNvSpPr/>
+          <p:nvPr/>
+        </p:nvSpPr>
+        <p:spPr>
+          <a:xfrm>
+            <a:off x="1097280" y="1645920"/>
+            <a:ext cx="5120640" cy="749808"/>
+          </a:xfrm>
+          <a:prstGeom prst="rect">
+            <a:avLst/>
+          </a:prstGeom>
+          <a:noFill/>
+          <a:ln/>
+        </p:spPr>
+        <p:txBody>
+          <a:bodyPr wrap="square" lIns="0" tIns="0" rIns="0" bIns="0" rtlCol="0" anchor="t"/>
+          <a:lstStyle/>
+          <a:p>
+            <a:pPr indent="0" marL="0">
+              <a:buNone/>
+            </a:pPr>
+            <a:r>
+              <a:rPr lang="en-US" sz="1350" dirty="0">
+                <a:solidFill>
+                  <a:srgbClr val="E8EEF7"/>
+                </a:solidFill>
+                <a:latin typeface="Calibri" pitchFamily="34" charset="0"/>
+                <a:ea typeface="Calibri" pitchFamily="34" charset="-122"/>
+                <a:cs typeface="Calibri" pitchFamily="34" charset="-120"/>
+              </a:rPr>
+              <a:t>Dê </a:t>
+            </a:r>
+            <a:pPr indent="0" marL="0">
+              <a:buNone/>
+            </a:pPr>
+            <a:r>
+              <a:rPr lang="en-US" sz="1350" b="1" dirty="0">
+                <a:solidFill>
+                  <a:srgbClr val="E8EEF7"/>
+                </a:solidFill>
+                <a:latin typeface="Calibri" pitchFamily="34" charset="0"/>
+                <a:ea typeface="Calibri" pitchFamily="34" charset="-122"/>
+                <a:cs typeface="Calibri" pitchFamily="34" charset="-120"/>
+              </a:rPr>
+              <a:t>play</a:t>
+            </a:r>
+            <a:pPr indent="0" marL="0">
+              <a:buNone/>
+            </a:pPr>
+            <a:r>
+              <a:rPr lang="en-US" sz="1350" dirty="0">
+                <a:solidFill>
+                  <a:srgbClr val="E8EEF7"/>
+                </a:solidFill>
+                <a:latin typeface="Calibri" pitchFamily="34" charset="0"/>
+                <a:ea typeface="Calibri" pitchFamily="34" charset="-122"/>
+                <a:cs typeface="Calibri" pitchFamily="34" charset="-120"/>
+              </a:rPr>
+              <a:t> e assista ao vídeo no próprio sistema;</a:t>
+            </a:r>
+            <a:endParaRPr lang="en-US" sz="1350" dirty="0"/>
+          </a:p>
+        </p:txBody>
+      </p:sp>
+      <p:sp>
+        <p:nvSpPr>
+          <p:cNvPr id="7" name="Shape 5"/>
+          <p:cNvSpPr/>
+          <p:nvPr/>
+        </p:nvSpPr>
+        <p:spPr>
+          <a:xfrm>
+            <a:off x="640080" y="2441448"/>
+            <a:ext cx="310896" cy="310896"/>
+          </a:xfrm>
+          <a:prstGeom prst="ellipse">
+            <a:avLst/>
+          </a:prstGeom>
+          <a:solidFill>
+            <a:srgbClr val="22D3EE"/>
+          </a:solidFill>
+          <a:ln/>
+        </p:spPr>
+      </p:sp>
+      <p:sp>
+        <p:nvSpPr>
+          <p:cNvPr id="8" name="Text 6"/>
+          <p:cNvSpPr/>
+          <p:nvPr/>
+        </p:nvSpPr>
+        <p:spPr>
+          <a:xfrm>
+            <a:off x="640080" y="2441448"/>
+            <a:ext cx="310896" cy="310896"/>
+          </a:xfrm>
+          <a:prstGeom prst="rect">
+            <a:avLst/>
+          </a:prstGeom>
+          <a:noFill/>
+          <a:ln/>
+        </p:spPr>
+        <p:txBody>
+          <a:bodyPr wrap="square" lIns="0" tIns="0" rIns="0" bIns="0" rtlCol="0" anchor="ctr"/>
+          <a:lstStyle/>
+          <a:p>
+            <a:pPr algn="ctr" indent="0" marL="0">
+              <a:buNone/>
+            </a:pPr>
+            <a:r>
+              <a:rPr lang="en-US" sz="1300" b="1" dirty="0">
+                <a:solidFill>
+                  <a:srgbClr val="07101F"/>
+                </a:solidFill>
+                <a:latin typeface="Calibri" pitchFamily="34" charset="0"/>
+                <a:ea typeface="Calibri" pitchFamily="34" charset="-122"/>
+                <a:cs typeface="Calibri" pitchFamily="34" charset="-120"/>
+              </a:rPr>
+              <a:t>2</a:t>
+            </a:r>
+            <a:endParaRPr lang="en-US" sz="1300" dirty="0"/>
+          </a:p>
+        </p:txBody>
+      </p:sp>
+      <p:sp>
+        <p:nvSpPr>
+          <p:cNvPr id="9" name="Text 7"/>
+          <p:cNvSpPr/>
+          <p:nvPr/>
+        </p:nvSpPr>
+        <p:spPr>
+          <a:xfrm>
+            <a:off x="1097280" y="2395728"/>
+            <a:ext cx="5120640" cy="749808"/>
+          </a:xfrm>
+          <a:prstGeom prst="rect">
+            <a:avLst/>
+          </a:prstGeom>
+          <a:noFill/>
+          <a:ln/>
+        </p:spPr>
+        <p:txBody>
+          <a:bodyPr wrap="square" lIns="0" tIns="0" rIns="0" bIns="0" rtlCol="0" anchor="t"/>
+          <a:lstStyle/>
+          <a:p>
+            <a:pPr indent="0" marL="0">
+              <a:buNone/>
+            </a:pPr>
+            <a:r>
+              <a:rPr lang="en-US" sz="1350" dirty="0">
+                <a:solidFill>
+                  <a:srgbClr val="E8EEF7"/>
+                </a:solidFill>
+                <a:latin typeface="Calibri" pitchFamily="34" charset="0"/>
+                <a:ea typeface="Calibri" pitchFamily="34" charset="-122"/>
+                <a:cs typeface="Calibri" pitchFamily="34" charset="-120"/>
+              </a:rPr>
+              <a:t>Ao encontrar um problema, pause e clique em </a:t>
+            </a:r>
+            <a:pPr indent="0" marL="0">
+              <a:buNone/>
+            </a:pPr>
+            <a:r>
+              <a:rPr lang="en-US" sz="1350" b="1" dirty="0">
+                <a:solidFill>
+                  <a:srgbClr val="22D3EE"/>
+                </a:solidFill>
+                <a:latin typeface="Calibri" pitchFamily="34" charset="0"/>
+                <a:ea typeface="Calibri" pitchFamily="34" charset="-122"/>
+                <a:cs typeface="Calibri" pitchFamily="34" charset="-120"/>
+              </a:rPr>
+              <a:t>◉ agora</a:t>
+            </a:r>
+            <a:pPr indent="0" marL="0">
+              <a:buNone/>
+            </a:pPr>
+            <a:r>
+              <a:rPr lang="en-US" sz="1350" dirty="0">
+                <a:solidFill>
+                  <a:srgbClr val="E8EEF7"/>
+                </a:solidFill>
+                <a:latin typeface="Calibri" pitchFamily="34" charset="0"/>
+                <a:ea typeface="Calibri" pitchFamily="34" charset="-122"/>
+                <a:cs typeface="Calibri" pitchFamily="34" charset="-120"/>
+              </a:rPr>
+              <a:t> — minuto, segundo e frame são preenchidos sozinhos;</a:t>
+            </a:r>
+            <a:endParaRPr lang="en-US" sz="1350" dirty="0"/>
+          </a:p>
+        </p:txBody>
+      </p:sp>
+      <p:sp>
+        <p:nvSpPr>
+          <p:cNvPr id="10" name="Shape 8"/>
+          <p:cNvSpPr/>
+          <p:nvPr/>
+        </p:nvSpPr>
+        <p:spPr>
+          <a:xfrm>
+            <a:off x="640080" y="3191256"/>
+            <a:ext cx="310896" cy="310896"/>
+          </a:xfrm>
+          <a:prstGeom prst="ellipse">
+            <a:avLst/>
+          </a:prstGeom>
+          <a:solidFill>
+            <a:srgbClr val="22D3EE"/>
+          </a:solidFill>
+          <a:ln/>
+        </p:spPr>
+      </p:sp>
+      <p:sp>
+        <p:nvSpPr>
+          <p:cNvPr id="11" name="Text 9"/>
+          <p:cNvSpPr/>
+          <p:nvPr/>
+        </p:nvSpPr>
+        <p:spPr>
+          <a:xfrm>
+            <a:off x="640080" y="3191256"/>
+            <a:ext cx="310896" cy="310896"/>
+          </a:xfrm>
+          <a:prstGeom prst="rect">
+            <a:avLst/>
+          </a:prstGeom>
+          <a:noFill/>
+          <a:ln/>
+        </p:spPr>
+        <p:txBody>
+          <a:bodyPr wrap="square" lIns="0" tIns="0" rIns="0" bIns="0" rtlCol="0" anchor="ctr"/>
+          <a:lstStyle/>
+          <a:p>
+            <a:pPr algn="ctr" indent="0" marL="0">
+              <a:buNone/>
+            </a:pPr>
+            <a:r>
+              <a:rPr lang="en-US" sz="1300" b="1" dirty="0">
+                <a:solidFill>
+                  <a:srgbClr val="07101F"/>
+                </a:solidFill>
+                <a:latin typeface="Calibri" pitchFamily="34" charset="0"/>
+                <a:ea typeface="Calibri" pitchFamily="34" charset="-122"/>
+                <a:cs typeface="Calibri" pitchFamily="34" charset="-120"/>
+              </a:rPr>
+              <a:t>3</a:t>
+            </a:r>
+            <a:endParaRPr lang="en-US" sz="1300" dirty="0"/>
+          </a:p>
+        </p:txBody>
+      </p:sp>
+      <p:sp>
+        <p:nvSpPr>
+          <p:cNvPr id="12" name="Text 10"/>
+          <p:cNvSpPr/>
+          <p:nvPr/>
+        </p:nvSpPr>
+        <p:spPr>
+          <a:xfrm>
+            <a:off x="1097280" y="3145536"/>
+            <a:ext cx="5120640" cy="749808"/>
+          </a:xfrm>
+          <a:prstGeom prst="rect">
+            <a:avLst/>
+          </a:prstGeom>
+          <a:noFill/>
+          <a:ln/>
+        </p:spPr>
+        <p:txBody>
+          <a:bodyPr wrap="square" lIns="0" tIns="0" rIns="0" bIns="0" rtlCol="0" anchor="t"/>
+          <a:lstStyle/>
+          <a:p>
+            <a:pPr indent="0" marL="0">
+              <a:buNone/>
+            </a:pPr>
+            <a:r>
+              <a:rPr lang="en-US" sz="1350" dirty="0">
+                <a:solidFill>
+                  <a:srgbClr val="E8EEF7"/>
+                </a:solidFill>
+                <a:latin typeface="Calibri" pitchFamily="34" charset="0"/>
+                <a:ea typeface="Calibri" pitchFamily="34" charset="-122"/>
+                <a:cs typeface="Calibri" pitchFamily="34" charset="-120"/>
+              </a:rPr>
+              <a:t>Escolha a </a:t>
+            </a:r>
+            <a:pPr indent="0" marL="0">
+              <a:buNone/>
+            </a:pPr>
+            <a:r>
+              <a:rPr lang="en-US" sz="1350" b="1" dirty="0">
+                <a:solidFill>
+                  <a:srgbClr val="22D3EE"/>
+                </a:solidFill>
+                <a:latin typeface="Calibri" pitchFamily="34" charset="0"/>
+                <a:ea typeface="Calibri" pitchFamily="34" charset="-122"/>
+                <a:cs typeface="Calibri" pitchFamily="34" charset="-120"/>
+              </a:rPr>
+              <a:t>classificação</a:t>
+            </a:r>
+            <a:pPr indent="0" marL="0">
+              <a:buNone/>
+            </a:pPr>
+            <a:r>
+              <a:rPr lang="en-US" sz="1350" dirty="0">
+                <a:solidFill>
+                  <a:srgbClr val="E8EEF7"/>
+                </a:solidFill>
+                <a:latin typeface="Calibri" pitchFamily="34" charset="0"/>
+                <a:ea typeface="Calibri" pitchFamily="34" charset="-122"/>
+                <a:cs typeface="Calibri" pitchFamily="34" charset="-120"/>
+              </a:rPr>
+              <a:t>: Áudio, Imagem, Conteúdo, Acessibilidade, Edição, Identidade visual ou Erro técnico;</a:t>
+            </a:r>
+            <a:endParaRPr lang="en-US" sz="1350" dirty="0"/>
+          </a:p>
+        </p:txBody>
+      </p:sp>
+      <p:sp>
+        <p:nvSpPr>
+          <p:cNvPr id="13" name="Shape 11"/>
+          <p:cNvSpPr/>
+          <p:nvPr/>
+        </p:nvSpPr>
+        <p:spPr>
+          <a:xfrm>
+            <a:off x="640080" y="3941064"/>
+            <a:ext cx="310896" cy="310896"/>
+          </a:xfrm>
+          <a:prstGeom prst="ellipse">
+            <a:avLst/>
+          </a:prstGeom>
+          <a:solidFill>
+            <a:srgbClr val="22D3EE"/>
+          </a:solidFill>
+          <a:ln/>
+        </p:spPr>
+      </p:sp>
+      <p:sp>
+        <p:nvSpPr>
+          <p:cNvPr id="14" name="Text 12"/>
+          <p:cNvSpPr/>
+          <p:nvPr/>
+        </p:nvSpPr>
+        <p:spPr>
+          <a:xfrm>
+            <a:off x="640080" y="3941064"/>
+            <a:ext cx="310896" cy="310896"/>
+          </a:xfrm>
+          <a:prstGeom prst="rect">
+            <a:avLst/>
+          </a:prstGeom>
+          <a:noFill/>
+          <a:ln/>
+        </p:spPr>
+        <p:txBody>
+          <a:bodyPr wrap="square" lIns="0" tIns="0" rIns="0" bIns="0" rtlCol="0" anchor="ctr"/>
+          <a:lstStyle/>
+          <a:p>
+            <a:pPr algn="ctr" indent="0" marL="0">
+              <a:buNone/>
+            </a:pPr>
+            <a:r>
+              <a:rPr lang="en-US" sz="1300" b="1" dirty="0">
+                <a:solidFill>
+                  <a:srgbClr val="07101F"/>
+                </a:solidFill>
+                <a:latin typeface="Calibri" pitchFamily="34" charset="0"/>
+                <a:ea typeface="Calibri" pitchFamily="34" charset="-122"/>
+                <a:cs typeface="Calibri" pitchFamily="34" charset="-120"/>
+              </a:rPr>
+              <a:t>4</a:t>
+            </a:r>
+            <a:endParaRPr lang="en-US" sz="1300" dirty="0"/>
+          </a:p>
+        </p:txBody>
+      </p:sp>
+      <p:sp>
+        <p:nvSpPr>
+          <p:cNvPr id="15" name="Text 13"/>
+          <p:cNvSpPr/>
+          <p:nvPr/>
+        </p:nvSpPr>
+        <p:spPr>
+          <a:xfrm>
+            <a:off x="1097280" y="3895344"/>
+            <a:ext cx="5120640" cy="749808"/>
+          </a:xfrm>
+          <a:prstGeom prst="rect">
+            <a:avLst/>
+          </a:prstGeom>
+          <a:noFill/>
+          <a:ln/>
+        </p:spPr>
+        <p:txBody>
+          <a:bodyPr wrap="square" lIns="0" tIns="0" rIns="0" bIns="0" rtlCol="0" anchor="t"/>
+          <a:lstStyle/>
+          <a:p>
+            <a:pPr indent="0" marL="0">
+              <a:buNone/>
+            </a:pPr>
+            <a:r>
+              <a:rPr lang="en-US" sz="1350" dirty="0">
+                <a:solidFill>
+                  <a:srgbClr val="E8EEF7"/>
+                </a:solidFill>
+                <a:latin typeface="Calibri" pitchFamily="34" charset="0"/>
+                <a:ea typeface="Calibri" pitchFamily="34" charset="-122"/>
+                <a:cs typeface="Calibri" pitchFamily="34" charset="-120"/>
+              </a:rPr>
+              <a:t>Escreva o que está errado e o que precisa ser corrigido;</a:t>
+            </a:r>
+            <a:endParaRPr lang="en-US" sz="1350" dirty="0"/>
+          </a:p>
+        </p:txBody>
+      </p:sp>
+      <p:sp>
+        <p:nvSpPr>
+          <p:cNvPr id="16" name="Shape 14"/>
+          <p:cNvSpPr/>
+          <p:nvPr/>
+        </p:nvSpPr>
+        <p:spPr>
+          <a:xfrm>
+            <a:off x="640080" y="4690872"/>
+            <a:ext cx="310896" cy="310896"/>
+          </a:xfrm>
+          <a:prstGeom prst="ellipse">
+            <a:avLst/>
+          </a:prstGeom>
+          <a:solidFill>
+            <a:srgbClr val="22D3EE"/>
+          </a:solidFill>
+          <a:ln/>
+        </p:spPr>
+      </p:sp>
+      <p:sp>
+        <p:nvSpPr>
+          <p:cNvPr id="17" name="Text 15"/>
+          <p:cNvSpPr/>
+          <p:nvPr/>
+        </p:nvSpPr>
+        <p:spPr>
+          <a:xfrm>
+            <a:off x="640080" y="4690872"/>
+            <a:ext cx="310896" cy="310896"/>
+          </a:xfrm>
+          <a:prstGeom prst="rect">
+            <a:avLst/>
+          </a:prstGeom>
+          <a:noFill/>
+          <a:ln/>
+        </p:spPr>
+        <p:txBody>
+          <a:bodyPr wrap="square" lIns="0" tIns="0" rIns="0" bIns="0" rtlCol="0" anchor="ctr"/>
+          <a:lstStyle/>
+          <a:p>
+            <a:pPr algn="ctr" indent="0" marL="0">
+              <a:buNone/>
+            </a:pPr>
+            <a:r>
+              <a:rPr lang="en-US" sz="1300" b="1" dirty="0">
+                <a:solidFill>
+                  <a:srgbClr val="07101F"/>
+                </a:solidFill>
+                <a:latin typeface="Calibri" pitchFamily="34" charset="0"/>
+                <a:ea typeface="Calibri" pitchFamily="34" charset="-122"/>
+                <a:cs typeface="Calibri" pitchFamily="34" charset="-120"/>
+              </a:rPr>
+              <a:t>5</a:t>
+            </a:r>
+            <a:endParaRPr lang="en-US" sz="1300" dirty="0"/>
+          </a:p>
+        </p:txBody>
+      </p:sp>
+      <p:sp>
+        <p:nvSpPr>
+          <p:cNvPr id="18" name="Text 16"/>
+          <p:cNvSpPr/>
+          <p:nvPr/>
+        </p:nvSpPr>
+        <p:spPr>
+          <a:xfrm>
+            <a:off x="1097280" y="4645152"/>
+            <a:ext cx="5120640" cy="749808"/>
+          </a:xfrm>
+          <a:prstGeom prst="rect">
+            <a:avLst/>
+          </a:prstGeom>
+          <a:noFill/>
+          <a:ln/>
+        </p:spPr>
+        <p:txBody>
+          <a:bodyPr wrap="square" lIns="0" tIns="0" rIns="0" bIns="0" rtlCol="0" anchor="t"/>
+          <a:lstStyle/>
+          <a:p>
+            <a:pPr indent="0" marL="0">
+              <a:buNone/>
+            </a:pPr>
+            <a:r>
+              <a:rPr lang="en-US" sz="1350" dirty="0">
+                <a:solidFill>
+                  <a:srgbClr val="E8EEF7"/>
+                </a:solidFill>
+                <a:latin typeface="Calibri" pitchFamily="34" charset="0"/>
+                <a:ea typeface="Calibri" pitchFamily="34" charset="-122"/>
+                <a:cs typeface="Calibri" pitchFamily="34" charset="-120"/>
+              </a:rPr>
+              <a:t>Clique em </a:t>
+            </a:r>
+            <a:pPr indent="0" marL="0">
+              <a:buNone/>
+            </a:pPr>
+            <a:r>
+              <a:rPr lang="en-US" sz="1350" b="1" dirty="0">
+                <a:solidFill>
+                  <a:srgbClr val="22D3EE"/>
+                </a:solidFill>
+                <a:latin typeface="Calibri" pitchFamily="34" charset="0"/>
+                <a:ea typeface="Calibri" pitchFamily="34" charset="-122"/>
+                <a:cs typeface="Calibri" pitchFamily="34" charset="-120"/>
+              </a:rPr>
+              <a:t>Registrar apontamento</a:t>
+            </a:r>
+            <a:pPr indent="0" marL="0">
+              <a:buNone/>
+            </a:pPr>
+            <a:r>
+              <a:rPr lang="en-US" sz="1350" dirty="0">
+                <a:solidFill>
+                  <a:srgbClr val="E8EEF7"/>
+                </a:solidFill>
+                <a:latin typeface="Calibri" pitchFamily="34" charset="0"/>
+                <a:ea typeface="Calibri" pitchFamily="34" charset="-122"/>
+                <a:cs typeface="Calibri" pitchFamily="34" charset="-120"/>
+              </a:rPr>
+              <a:t> — a captura do frame vai junto.</a:t>
+            </a:r>
+            <a:endParaRPr lang="en-US" sz="1350" dirty="0"/>
+          </a:p>
+        </p:txBody>
+      </p:sp>
+      <p:sp>
+        <p:nvSpPr>
+          <p:cNvPr id="19" name="Shape 17"/>
+          <p:cNvSpPr/>
+          <p:nvPr/>
+        </p:nvSpPr>
+        <p:spPr>
+          <a:xfrm>
+            <a:off x="6309360" y="1920240"/>
+            <a:ext cx="5303520" cy="2047794"/>
           </a:xfrm>
           <a:prstGeom prst="roundRect">
             <a:avLst>
-              <a:gd name="adj" fmla="val 22049"/>
+              <a:gd name="adj" fmla="val 4019"/>
             </a:avLst>
           </a:prstGeom>
           <a:solidFill>
@@ -3848,7 +4487,7 @@
       </p:sp>
       <p:pic>
         <p:nvPicPr>
-          <p:cNvPr id="5" name="Image 0" descr="/home/user/AutoriaSCS-Scrum-cursos/docs/tutoriais/img/sem-material.png">    </p:cNvPr>
+          <p:cNvPr id="20" name="Image 0" descr="/home/user/AutoriaSCS-Scrum-cursos/docs/tutoriais/img/video-form-marcacao.png">    </p:cNvPr>
           <p:cNvPicPr>
             <a:picLocks noChangeAspect="1"/>
           </p:cNvPicPr>
@@ -3862,8 +4501,8 @@
         </p:blipFill>
         <p:spPr>
           <a:xfrm>
-            <a:off x="749808" y="1709928"/>
-            <a:ext cx="5266944" cy="153779"/>
+            <a:off x="6419088" y="2029968"/>
+            <a:ext cx="5084064" cy="1828338"/>
           </a:xfrm>
           <a:prstGeom prst="rect">
             <a:avLst/>
@@ -3872,229 +4511,7 @@
       </p:pic>
       <p:sp>
         <p:nvSpPr>
-          <p:cNvPr id="6" name="Text 3"/>
-          <p:cNvSpPr/>
-          <p:nvPr/>
-        </p:nvSpPr>
-        <p:spPr>
-          <a:xfrm>
-            <a:off x="640080" y="2834640"/>
-            <a:ext cx="5486400" cy="1554480"/>
-          </a:xfrm>
-          <a:prstGeom prst="rect">
-            <a:avLst/>
-          </a:prstGeom>
-          <a:noFill/>
-          <a:ln/>
-        </p:spPr>
-        <p:txBody>
-          <a:bodyPr wrap="square" lIns="0" tIns="0" rIns="0" bIns="0" rtlCol="0" anchor="ctr"/>
-          <a:lstStyle/>
-          <a:p>
-            <a:pPr indent="0" marL="0">
-              <a:lnSpc>
-                <a:spcPct val="115000"/>
-              </a:lnSpc>
-              <a:buNone/>
-            </a:pPr>
-            <a:r>
-              <a:rPr lang="en-US" sz="1250" b="1" dirty="0">
-                <a:solidFill>
-                  <a:srgbClr val="22D3EE"/>
-                </a:solidFill>
-                <a:latin typeface="Calibri" pitchFamily="34" charset="0"/>
-                <a:ea typeface="Calibri" pitchFamily="34" charset="-122"/>
-                <a:cs typeface="Calibri" pitchFamily="34" charset="-120"/>
-              </a:rPr>
-              <a:t>Etapas opcionais: </a:t>
-            </a:r>
-            <a:pPr indent="0" marL="0">
-              <a:lnSpc>
-                <a:spcPct val="115000"/>
-              </a:lnSpc>
-              <a:buNone/>
-            </a:pPr>
-            <a:r>
-              <a:rPr lang="en-US" sz="1250" dirty="0">
-                <a:solidFill>
-                  <a:srgbClr val="E8EEF7"/>
-                </a:solidFill>
-                <a:latin typeface="Calibri" pitchFamily="34" charset="0"/>
-                <a:ea typeface="Calibri" pitchFamily="34" charset="-122"/>
-                <a:cs typeface="Calibri" pitchFamily="34" charset="-120"/>
-              </a:rPr>
-              <a:t>quando a etapa da vez é opcional e você não produziu o material, marque a caixinha — o botão muda para "Registrar sem material" e a etapa seguinte é liberada. Mudou de ideia? Clique em Desfazer no painel de ordem.</a:t>
-            </a:r>
-            <a:endParaRPr lang="en-US" sz="1250" dirty="0"/>
-          </a:p>
-        </p:txBody>
-      </p:sp>
-      <p:sp>
-        <p:nvSpPr>
-          <p:cNvPr id="7" name="Text 4"/>
-          <p:cNvSpPr/>
-          <p:nvPr/>
-        </p:nvSpPr>
-        <p:spPr>
-          <a:xfrm>
-            <a:off x="640080" y="4480560"/>
-            <a:ext cx="5486400" cy="548640"/>
-          </a:xfrm>
-          <a:prstGeom prst="rect">
-            <a:avLst/>
-          </a:prstGeom>
-          <a:noFill/>
-          <a:ln/>
-        </p:spPr>
-        <p:txBody>
-          <a:bodyPr wrap="square" lIns="0" tIns="0" rIns="0" bIns="0" rtlCol="0" anchor="ctr"/>
-          <a:lstStyle/>
-          <a:p>
-            <a:pPr indent="0" marL="0">
-              <a:buNone/>
-            </a:pPr>
-            <a:r>
-              <a:rPr lang="en-US" sz="1250" b="1" dirty="0">
-                <a:solidFill>
-                  <a:srgbClr val="FBBF24"/>
-                </a:solidFill>
-                <a:latin typeface="Calibri" pitchFamily="34" charset="0"/>
-                <a:ea typeface="Calibri" pitchFamily="34" charset="-122"/>
-                <a:cs typeface="Calibri" pitchFamily="34" charset="-120"/>
-              </a:rPr>
-              <a:t>Etapas obrigatórias </a:t>
-            </a:r>
-            <a:pPr indent="0" marL="0">
-              <a:buNone/>
-            </a:pPr>
-            <a:r>
-              <a:rPr lang="en-US" sz="1250" dirty="0">
-                <a:solidFill>
-                  <a:srgbClr val="8BAAC8"/>
-                </a:solidFill>
-                <a:latin typeface="Calibri" pitchFamily="34" charset="0"/>
-                <a:ea typeface="Calibri" pitchFamily="34" charset="-122"/>
-                <a:cs typeface="Calibri" pitchFamily="34" charset="-120"/>
-              </a:rPr>
-              <a:t>não têm essa caixinha — o arquivo precisa ser enviado.</a:t>
-            </a:r>
-            <a:endParaRPr lang="en-US" sz="1250" dirty="0"/>
-          </a:p>
-        </p:txBody>
-      </p:sp>
-      <p:sp>
-        <p:nvSpPr>
-          <p:cNvPr id="8" name="Shape 5"/>
-          <p:cNvSpPr/>
-          <p:nvPr/>
-        </p:nvSpPr>
-        <p:spPr>
-          <a:xfrm>
-            <a:off x="6400800" y="1600200"/>
-            <a:ext cx="5212080" cy="1079346"/>
-          </a:xfrm>
-          <a:prstGeom prst="roundRect">
-            <a:avLst>
-              <a:gd name="adj" fmla="val 7625"/>
-            </a:avLst>
-          </a:prstGeom>
-          <a:solidFill>
-            <a:srgbClr val="10233F"/>
-          </a:solidFill>
-          <a:ln w="12700">
-            <a:solidFill>
-              <a:srgbClr val="1D3A5F"/>
-            </a:solidFill>
-            <a:prstDash val="solid"/>
-          </a:ln>
-        </p:spPr>
-      </p:sp>
-      <p:pic>
-        <p:nvPicPr>
-          <p:cNvPr id="9" name="Image 1" descr="/home/user/AutoriaSCS-Scrum-cursos/docs/tutoriais/img/links-externos.png">    </p:cNvPr>
-          <p:cNvPicPr>
-            <a:picLocks noChangeAspect="1"/>
-          </p:cNvPicPr>
-          <p:nvPr/>
-        </p:nvPicPr>
-        <p:blipFill>
-          <a:blip r:embed="rId2"/>
-          <a:stretch>
-            <a:fillRect/>
-          </a:stretch>
-        </p:blipFill>
-        <p:spPr>
-          <a:xfrm>
-            <a:off x="6510528" y="1709928"/>
-            <a:ext cx="4992624" cy="859890"/>
-          </a:xfrm>
-          <a:prstGeom prst="rect">
-            <a:avLst/>
-          </a:prstGeom>
-        </p:spPr>
-      </p:pic>
-      <p:sp>
-        <p:nvSpPr>
-          <p:cNvPr id="10" name="Text 6"/>
-          <p:cNvSpPr/>
-          <p:nvPr/>
-        </p:nvSpPr>
-        <p:spPr>
-          <a:xfrm>
-            <a:off x="6400800" y="4709160"/>
-            <a:ext cx="5212080" cy="1188720"/>
-          </a:xfrm>
-          <a:prstGeom prst="rect">
-            <a:avLst/>
-          </a:prstGeom>
-          <a:noFill/>
-          <a:ln/>
-        </p:spPr>
-        <p:txBody>
-          <a:bodyPr wrap="square" lIns="0" tIns="0" rIns="0" bIns="0" rtlCol="0" anchor="ctr"/>
-          <a:lstStyle/>
-          <a:p>
-            <a:pPr indent="0" marL="0">
-              <a:lnSpc>
-                <a:spcPct val="115000"/>
-              </a:lnSpc>
-              <a:buNone/>
-            </a:pPr>
-            <a:r>
-              <a:rPr lang="en-US" sz="1250" b="1" dirty="0">
-                <a:solidFill>
-                  <a:srgbClr val="22D3EE"/>
-                </a:solidFill>
-                <a:latin typeface="Calibri" pitchFamily="34" charset="0"/>
-                <a:ea typeface="Calibri" pitchFamily="34" charset="-122"/>
-                <a:cs typeface="Calibri" pitchFamily="34" charset="-120"/>
-              </a:rPr>
-              <a:t>Acima de 25MB (vídeos brutos): </a:t>
-            </a:r>
-            <a:pPr indent="0" marL="0">
-              <a:lnSpc>
-                <a:spcPct val="115000"/>
-              </a:lnSpc>
-              <a:buNone/>
-            </a:pPr>
-            <a:r>
-              <a:rPr lang="en-US" sz="1250" dirty="0">
-                <a:solidFill>
-                  <a:srgbClr val="E8EEF7"/>
-                </a:solidFill>
-                <a:latin typeface="Calibri" pitchFamily="34" charset="0"/>
-                <a:ea typeface="Calibri" pitchFamily="34" charset="-122"/>
-                <a:cs typeface="Calibri" pitchFamily="34" charset="-120"/>
-              </a:rPr>
-              <a:t>suba o material no Google Drive, copie o link de compartilhamento e registre em Links Externos: título, link e tipo → Adicionar.</a:t>
-            </a:r>
-            <a:endParaRPr lang="en-US" sz="1250" dirty="0"/>
-          </a:p>
-        </p:txBody>
-      </p:sp>
-      <p:sp>
-        <p:nvSpPr>
-          <p:cNvPr id="11" name="Text 7"/>
+          <p:cNvPr id="21" name="Text 18"/>
           <p:cNvSpPr/>
           <p:nvPr/>
         </p:nvSpPr>
@@ -4133,7 +4550,7 @@
       </p:sp>
       <p:sp>
         <p:nvSpPr>
-          <p:cNvPr id="12" name="Text 8"/>
+          <p:cNvPr id="22" name="Text 19"/>
           <p:cNvSpPr/>
           <p:nvPr/>
         </p:nvSpPr>
@@ -4164,7 +4581,7 @@
                 <a:ea typeface="Calibri" pitchFamily="34" charset="-122"/>
                 <a:cs typeface="Calibri" pitchFamily="34" charset="-120"/>
               </a:rPr>
-              <a:t>12 / 13</a:t>
+              <a:t>12 / 14</a:t>
             </a:r>
             <a:endParaRPr lang="en-US" sz="950" dirty="0"/>
           </a:p>
@@ -4181,6 +4598,581 @@
 <file path=ppt/slides/slide13.xml><?xml version="1.0" encoding="utf-8"?>
 <p:sld xmlns:a="http://schemas.openxmlformats.org/drawingml/2006/main" xmlns:r="http://schemas.openxmlformats.org/officeDocument/2006/relationships" xmlns:p="http://schemas.openxmlformats.org/presentationml/2006/main">
   <p:cSld name="Slide 13">
+    <p:bg>
+      <p:bgPr>
+        <a:solidFill>
+          <a:srgbClr val="0A1626"/>
+        </a:solidFill>
+      </p:bgPr>
+    </p:bg>
+    <p:spTree>
+      <p:nvGrpSpPr>
+        <p:cNvPr id="1" name=""/>
+        <p:cNvGrpSpPr/>
+        <p:nvPr/>
+      </p:nvGrpSpPr>
+      <p:grpSpPr>
+        <a:xfrm>
+          <a:off x="0" y="0"/>
+          <a:ext cx="0" cy="0"/>
+          <a:chOff x="0" y="0"/>
+          <a:chExt cx="0" cy="0"/>
+        </a:xfrm>
+      </p:grpSpPr>
+      <p:sp>
+        <p:nvSpPr>
+          <p:cNvPr id="2" name="Text 0"/>
+          <p:cNvSpPr/>
+          <p:nvPr/>
+        </p:nvSpPr>
+        <p:spPr>
+          <a:xfrm>
+            <a:off x="548640" y="320040"/>
+            <a:ext cx="5486400" cy="292608"/>
+          </a:xfrm>
+          <a:prstGeom prst="rect">
+            <a:avLst/>
+          </a:prstGeom>
+          <a:noFill/>
+          <a:ln/>
+        </p:spPr>
+        <p:txBody>
+          <a:bodyPr wrap="square" lIns="0" tIns="0" rIns="0" bIns="0" rtlCol="0" anchor="ctr"/>
+          <a:lstStyle/>
+          <a:p>
+            <a:pPr indent="0" marL="0">
+              <a:buNone/>
+            </a:pPr>
+            <a:r>
+              <a:rPr lang="en-US" sz="1200" b="1" spc="300" kern="0" dirty="0">
+                <a:solidFill>
+                  <a:srgbClr val="22D3EE"/>
+                </a:solidFill>
+                <a:latin typeface="Calibri" pitchFamily="34" charset="0"/>
+                <a:ea typeface="Calibri" pitchFamily="34" charset="-122"/>
+                <a:cs typeface="Calibri" pitchFamily="34" charset="-120"/>
+              </a:rPr>
+              <a:t>NOVIDADE</a:t>
+            </a:r>
+            <a:endParaRPr lang="en-US" sz="1200" dirty="0"/>
+          </a:p>
+        </p:txBody>
+      </p:sp>
+      <p:sp>
+        <p:nvSpPr>
+          <p:cNvPr id="3" name="Text 1"/>
+          <p:cNvSpPr/>
+          <p:nvPr/>
+        </p:nvSpPr>
+        <p:spPr>
+          <a:xfrm>
+            <a:off x="548640" y="566928"/>
+            <a:ext cx="11091672" cy="685800"/>
+          </a:xfrm>
+          <a:prstGeom prst="rect">
+            <a:avLst/>
+          </a:prstGeom>
+          <a:noFill/>
+          <a:ln/>
+        </p:spPr>
+        <p:txBody>
+          <a:bodyPr wrap="square" lIns="0" tIns="0" rIns="0" bIns="0" rtlCol="0" anchor="ctr"/>
+          <a:lstStyle/>
+          <a:p>
+            <a:pPr indent="0" marL="0">
+              <a:buNone/>
+            </a:pPr>
+            <a:r>
+              <a:rPr lang="en-US" sz="3000" b="1" dirty="0">
+                <a:solidFill>
+                  <a:srgbClr val="E8EEF7"/>
+                </a:solidFill>
+                <a:latin typeface="Calibri" pitchFamily="34" charset="0"/>
+                <a:ea typeface="Calibri" pitchFamily="34" charset="-122"/>
+                <a:cs typeface="Calibri" pitchFamily="34" charset="-120"/>
+              </a:rPr>
+              <a:t>7.2 Acompanhar e aprovar</a:t>
+            </a:r>
+            <a:endParaRPr lang="en-US" sz="3000" dirty="0"/>
+          </a:p>
+        </p:txBody>
+      </p:sp>
+      <p:sp>
+        <p:nvSpPr>
+          <p:cNvPr id="4" name="Shape 2"/>
+          <p:cNvSpPr/>
+          <p:nvPr/>
+        </p:nvSpPr>
+        <p:spPr>
+          <a:xfrm>
+            <a:off x="2398644" y="1463040"/>
+            <a:ext cx="3249433" cy="4480560"/>
+          </a:xfrm>
+          <a:prstGeom prst="roundRect">
+            <a:avLst>
+              <a:gd name="adj" fmla="val 2533"/>
+            </a:avLst>
+          </a:prstGeom>
+          <a:solidFill>
+            <a:srgbClr val="10233F"/>
+          </a:solidFill>
+          <a:ln w="12700">
+            <a:solidFill>
+              <a:srgbClr val="1D3A5F"/>
+            </a:solidFill>
+            <a:prstDash val="solid"/>
+          </a:ln>
+        </p:spPr>
+      </p:sp>
+      <p:pic>
+        <p:nvPicPr>
+          <p:cNvPr id="5" name="Image 0" descr="/home/user/AutoriaSCS-Scrum-cursos/docs/tutoriais/img/video-apontamentos.png">    </p:cNvPr>
+          <p:cNvPicPr>
+            <a:picLocks noChangeAspect="1"/>
+          </p:cNvPicPr>
+          <p:nvPr/>
+        </p:nvPicPr>
+        <p:blipFill>
+          <a:blip r:embed="rId1"/>
+          <a:stretch>
+            <a:fillRect/>
+          </a:stretch>
+        </p:blipFill>
+        <p:spPr>
+          <a:xfrm>
+            <a:off x="2508372" y="1572768"/>
+            <a:ext cx="3029977" cy="4261104"/>
+          </a:xfrm>
+          <a:prstGeom prst="rect">
+            <a:avLst/>
+          </a:prstGeom>
+        </p:spPr>
+      </p:pic>
+      <p:sp>
+        <p:nvSpPr>
+          <p:cNvPr id="6" name="Shape 3"/>
+          <p:cNvSpPr/>
+          <p:nvPr/>
+        </p:nvSpPr>
+        <p:spPr>
+          <a:xfrm>
+            <a:off x="7680960" y="1463040"/>
+            <a:ext cx="3931920" cy="2103120"/>
+          </a:xfrm>
+          <a:prstGeom prst="roundRect">
+            <a:avLst>
+              <a:gd name="adj" fmla="val 3913"/>
+            </a:avLst>
+          </a:prstGeom>
+          <a:solidFill>
+            <a:srgbClr val="10233F"/>
+          </a:solidFill>
+          <a:ln w="12700">
+            <a:solidFill>
+              <a:srgbClr val="1D3A5F"/>
+            </a:solidFill>
+            <a:prstDash val="solid"/>
+          </a:ln>
+        </p:spPr>
+      </p:sp>
+      <p:sp>
+        <p:nvSpPr>
+          <p:cNvPr id="7" name="Text 4"/>
+          <p:cNvSpPr/>
+          <p:nvPr/>
+        </p:nvSpPr>
+        <p:spPr>
+          <a:xfrm>
+            <a:off x="7882128" y="1609344"/>
+            <a:ext cx="3529584" cy="329184"/>
+          </a:xfrm>
+          <a:prstGeom prst="rect">
+            <a:avLst/>
+          </a:prstGeom>
+          <a:noFill/>
+          <a:ln/>
+        </p:spPr>
+        <p:txBody>
+          <a:bodyPr wrap="square" lIns="0" tIns="0" rIns="0" bIns="0" rtlCol="0" anchor="ctr"/>
+          <a:lstStyle/>
+          <a:p>
+            <a:pPr indent="0" marL="0">
+              <a:buNone/>
+            </a:pPr>
+            <a:r>
+              <a:rPr lang="en-US" sz="1400" b="1" dirty="0">
+                <a:solidFill>
+                  <a:srgbClr val="22D3EE"/>
+                </a:solidFill>
+                <a:latin typeface="Calibri" pitchFamily="34" charset="0"/>
+                <a:ea typeface="Calibri" pitchFamily="34" charset="-122"/>
+                <a:cs typeface="Calibri" pitchFamily="34" charset="-120"/>
+              </a:rPr>
+              <a:t>As situações</a:t>
+            </a:r>
+            <a:endParaRPr lang="en-US" sz="1400" dirty="0"/>
+          </a:p>
+        </p:txBody>
+      </p:sp>
+      <p:sp>
+        <p:nvSpPr>
+          <p:cNvPr id="8" name="Text 5"/>
+          <p:cNvSpPr/>
+          <p:nvPr/>
+        </p:nvSpPr>
+        <p:spPr>
+          <a:xfrm>
+            <a:off x="7882128" y="1938528"/>
+            <a:ext cx="3529584" cy="1499616"/>
+          </a:xfrm>
+          <a:prstGeom prst="rect">
+            <a:avLst/>
+          </a:prstGeom>
+          <a:noFill/>
+          <a:ln/>
+        </p:spPr>
+        <p:txBody>
+          <a:bodyPr wrap="square" lIns="0" tIns="0" rIns="0" bIns="0" rtlCol="0" anchor="t"/>
+          <a:lstStyle/>
+          <a:p>
+            <a:pPr indent="0" marL="0">
+              <a:lnSpc>
+                <a:spcPct val="112000"/>
+              </a:lnSpc>
+              <a:buNone/>
+            </a:pPr>
+            <a:r>
+              <a:rPr lang="en-US" sz="1250" dirty="0">
+                <a:solidFill>
+                  <a:srgbClr val="E8EEF7"/>
+                </a:solidFill>
+                <a:latin typeface="Calibri" pitchFamily="34" charset="0"/>
+                <a:ea typeface="Calibri" pitchFamily="34" charset="-122"/>
+                <a:cs typeface="Calibri" pitchFamily="34" charset="-120"/>
+              </a:rPr>
+              <a:t>Pendente — a MB ainda não começou</a:t>
+            </a:r>
+            <a:endParaRPr lang="en-US" sz="1250" dirty="0"/>
+          </a:p>
+          <a:p>
+            <a:pPr indent="0" marL="0">
+              <a:lnSpc>
+                <a:spcPct val="112000"/>
+              </a:lnSpc>
+              <a:buNone/>
+            </a:pPr>
+            <a:r>
+              <a:rPr lang="en-US" sz="1250" dirty="0">
+                <a:solidFill>
+                  <a:srgbClr val="E8EEF7"/>
+                </a:solidFill>
+                <a:latin typeface="Calibri" pitchFamily="34" charset="0"/>
+                <a:ea typeface="Calibri" pitchFamily="34" charset="-122"/>
+                <a:cs typeface="Calibri" pitchFamily="34" charset="-120"/>
+              </a:rPr>
+              <a:t>Em correção — a MB está trabalhando</a:t>
+            </a:r>
+            <a:endParaRPr lang="en-US" sz="1250" dirty="0"/>
+          </a:p>
+          <a:p>
+            <a:pPr indent="0" marL="0">
+              <a:lnSpc>
+                <a:spcPct val="112000"/>
+              </a:lnSpc>
+              <a:buNone/>
+            </a:pPr>
+            <a:r>
+              <a:rPr lang="en-US" sz="1250" dirty="0">
+                <a:solidFill>
+                  <a:srgbClr val="E8EEF7"/>
+                </a:solidFill>
+                <a:latin typeface="Calibri" pitchFamily="34" charset="0"/>
+                <a:ea typeface="Calibri" pitchFamily="34" charset="-122"/>
+                <a:cs typeface="Calibri" pitchFamily="34" charset="-120"/>
+              </a:rPr>
+              <a:t>Corrigido — aguarda sua conferência</a:t>
+            </a:r>
+            <a:endParaRPr lang="en-US" sz="1250" dirty="0"/>
+          </a:p>
+          <a:p>
+            <a:pPr indent="0" marL="0">
+              <a:lnSpc>
+                <a:spcPct val="112000"/>
+              </a:lnSpc>
+              <a:buNone/>
+            </a:pPr>
+            <a:r>
+              <a:rPr lang="en-US" sz="1250" dirty="0">
+                <a:solidFill>
+                  <a:srgbClr val="E8EEF7"/>
+                </a:solidFill>
+                <a:latin typeface="Calibri" pitchFamily="34" charset="0"/>
+                <a:ea typeface="Calibri" pitchFamily="34" charset="-122"/>
+                <a:cs typeface="Calibri" pitchFamily="34" charset="-120"/>
+              </a:rPr>
+              <a:t>Aprovado — você validou</a:t>
+            </a:r>
+            <a:endParaRPr lang="en-US" sz="1250" dirty="0"/>
+          </a:p>
+        </p:txBody>
+      </p:sp>
+      <p:sp>
+        <p:nvSpPr>
+          <p:cNvPr id="9" name="Shape 6"/>
+          <p:cNvSpPr/>
+          <p:nvPr/>
+        </p:nvSpPr>
+        <p:spPr>
+          <a:xfrm>
+            <a:off x="7680960" y="3749040"/>
+            <a:ext cx="3931920" cy="2194560"/>
+          </a:xfrm>
+          <a:prstGeom prst="roundRect">
+            <a:avLst>
+              <a:gd name="adj" fmla="val 3750"/>
+            </a:avLst>
+          </a:prstGeom>
+          <a:solidFill>
+            <a:srgbClr val="10233F"/>
+          </a:solidFill>
+          <a:ln w="12700">
+            <a:solidFill>
+              <a:srgbClr val="1D3A5F"/>
+            </a:solidFill>
+            <a:prstDash val="solid"/>
+          </a:ln>
+        </p:spPr>
+      </p:sp>
+      <p:sp>
+        <p:nvSpPr>
+          <p:cNvPr id="10" name="Text 7"/>
+          <p:cNvSpPr/>
+          <p:nvPr/>
+        </p:nvSpPr>
+        <p:spPr>
+          <a:xfrm>
+            <a:off x="7882128" y="3895344"/>
+            <a:ext cx="3529584" cy="329184"/>
+          </a:xfrm>
+          <a:prstGeom prst="rect">
+            <a:avLst/>
+          </a:prstGeom>
+          <a:noFill/>
+          <a:ln/>
+        </p:spPr>
+        <p:txBody>
+          <a:bodyPr wrap="square" lIns="0" tIns="0" rIns="0" bIns="0" rtlCol="0" anchor="ctr"/>
+          <a:lstStyle/>
+          <a:p>
+            <a:pPr indent="0" marL="0">
+              <a:buNone/>
+            </a:pPr>
+            <a:r>
+              <a:rPr lang="en-US" sz="1400" b="1" dirty="0">
+                <a:solidFill>
+                  <a:srgbClr val="22D3EE"/>
+                </a:solidFill>
+                <a:latin typeface="Calibri" pitchFamily="34" charset="0"/>
+                <a:ea typeface="Calibri" pitchFamily="34" charset="-122"/>
+                <a:cs typeface="Calibri" pitchFamily="34" charset="-120"/>
+              </a:rPr>
+              <a:t>Suas ações</a:t>
+            </a:r>
+            <a:endParaRPr lang="en-US" sz="1400" dirty="0"/>
+          </a:p>
+        </p:txBody>
+      </p:sp>
+      <p:sp>
+        <p:nvSpPr>
+          <p:cNvPr id="11" name="Text 8"/>
+          <p:cNvSpPr/>
+          <p:nvPr/>
+        </p:nvSpPr>
+        <p:spPr>
+          <a:xfrm>
+            <a:off x="7882128" y="4224528"/>
+            <a:ext cx="3529584" cy="1591056"/>
+          </a:xfrm>
+          <a:prstGeom prst="rect">
+            <a:avLst/>
+          </a:prstGeom>
+          <a:noFill/>
+          <a:ln/>
+        </p:spPr>
+        <p:txBody>
+          <a:bodyPr wrap="square" lIns="0" tIns="0" rIns="0" bIns="0" rtlCol="0" anchor="t"/>
+          <a:lstStyle/>
+          <a:p>
+            <a:pPr indent="0" marL="0">
+              <a:lnSpc>
+                <a:spcPct val="112000"/>
+              </a:lnSpc>
+              <a:buNone/>
+            </a:pPr>
+            <a:r>
+              <a:rPr lang="en-US" sz="1250" dirty="0">
+                <a:solidFill>
+                  <a:srgbClr val="E8EEF7"/>
+                </a:solidFill>
+                <a:latin typeface="Calibri" pitchFamily="34" charset="0"/>
+                <a:ea typeface="Calibri" pitchFamily="34" charset="-122"/>
+                <a:cs typeface="Calibri" pitchFamily="34" charset="-120"/>
+              </a:rPr>
+              <a:t>• Clique no tempo (▶ 1:08) e o player pula para o ponto</a:t>
+            </a:r>
+            <a:endParaRPr lang="en-US" sz="1250" dirty="0"/>
+          </a:p>
+          <a:p>
+            <a:pPr indent="0" marL="0">
+              <a:lnSpc>
+                <a:spcPct val="112000"/>
+              </a:lnSpc>
+              <a:buNone/>
+            </a:pPr>
+            <a:r>
+              <a:rPr lang="en-US" sz="1250" dirty="0">
+                <a:solidFill>
+                  <a:srgbClr val="E8EEF7"/>
+                </a:solidFill>
+                <a:latin typeface="Calibri" pitchFamily="34" charset="0"/>
+                <a:ea typeface="Calibri" pitchFamily="34" charset="-122"/>
+                <a:cs typeface="Calibri" pitchFamily="34" charset="-120"/>
+              </a:rPr>
+              <a:t>• Responda na caixinha "Responder..."</a:t>
+            </a:r>
+            <a:endParaRPr lang="en-US" sz="1250" dirty="0"/>
+          </a:p>
+          <a:p>
+            <a:pPr indent="0" marL="0">
+              <a:lnSpc>
+                <a:spcPct val="112000"/>
+              </a:lnSpc>
+              <a:buNone/>
+            </a:pPr>
+            <a:r>
+              <a:rPr lang="en-US" sz="1250" dirty="0">
+                <a:solidFill>
+                  <a:srgbClr val="E8EEF7"/>
+                </a:solidFill>
+                <a:latin typeface="Calibri" pitchFamily="34" charset="0"/>
+                <a:ea typeface="Calibri" pitchFamily="34" charset="-122"/>
+                <a:cs typeface="Calibri" pitchFamily="34" charset="-120"/>
+              </a:rPr>
+              <a:t>• Mude para Aprovado quando conferir</a:t>
+            </a:r>
+            <a:endParaRPr lang="en-US" sz="1250" dirty="0"/>
+          </a:p>
+          <a:p>
+            <a:pPr indent="0" marL="0">
+              <a:lnSpc>
+                <a:spcPct val="112000"/>
+              </a:lnSpc>
+              <a:buNone/>
+            </a:pPr>
+            <a:r>
+              <a:rPr lang="en-US" sz="1250" dirty="0">
+                <a:solidFill>
+                  <a:srgbClr val="E8EEF7"/>
+                </a:solidFill>
+                <a:latin typeface="Calibri" pitchFamily="34" charset="0"/>
+                <a:ea typeface="Calibri" pitchFamily="34" charset="-122"/>
+                <a:cs typeface="Calibri" pitchFamily="34" charset="-120"/>
+              </a:rPr>
+              <a:t>• Com tudo resolvido, clique em ✓ Aprovar vídeo</a:t>
+            </a:r>
+            <a:endParaRPr lang="en-US" sz="1250" dirty="0"/>
+          </a:p>
+        </p:txBody>
+      </p:sp>
+      <p:sp>
+        <p:nvSpPr>
+          <p:cNvPr id="12" name="Text 9"/>
+          <p:cNvSpPr/>
+          <p:nvPr/>
+        </p:nvSpPr>
+        <p:spPr>
+          <a:xfrm>
+            <a:off x="548640" y="6473952"/>
+            <a:ext cx="7315200" cy="274320"/>
+          </a:xfrm>
+          <a:prstGeom prst="rect">
+            <a:avLst/>
+          </a:prstGeom>
+          <a:noFill/>
+          <a:ln/>
+        </p:spPr>
+        <p:txBody>
+          <a:bodyPr wrap="square" lIns="0" tIns="0" rIns="0" bIns="0" rtlCol="0" anchor="ctr"/>
+          <a:lstStyle/>
+          <a:p>
+            <a:pPr indent="0" marL="0">
+              <a:buNone/>
+            </a:pPr>
+            <a:r>
+              <a:rPr lang="en-US" sz="950" dirty="0">
+                <a:solidFill>
+                  <a:srgbClr val="8BAAC8"/>
+                </a:solidFill>
+                <a:latin typeface="Calibri" pitchFamily="34" charset="0"/>
+                <a:ea typeface="Calibri" pitchFamily="34" charset="-122"/>
+                <a:cs typeface="Calibri" pitchFamily="34" charset="-120"/>
+              </a:rPr>
+              <a:t>AutoriaSCS • Gestão de Cursos  —  Tutorial do Formador</a:t>
+            </a:r>
+            <a:endParaRPr lang="en-US" sz="950" dirty="0"/>
+          </a:p>
+        </p:txBody>
+      </p:sp>
+      <p:sp>
+        <p:nvSpPr>
+          <p:cNvPr id="13" name="Text 10"/>
+          <p:cNvSpPr/>
+          <p:nvPr/>
+        </p:nvSpPr>
+        <p:spPr>
+          <a:xfrm>
+            <a:off x="10725912" y="6473952"/>
+            <a:ext cx="914400" cy="274320"/>
+          </a:xfrm>
+          <a:prstGeom prst="rect">
+            <a:avLst/>
+          </a:prstGeom>
+          <a:noFill/>
+          <a:ln/>
+        </p:spPr>
+        <p:txBody>
+          <a:bodyPr wrap="square" lIns="0" tIns="0" rIns="0" bIns="0" rtlCol="0" anchor="ctr"/>
+          <a:lstStyle/>
+          <a:p>
+            <a:pPr algn="r" indent="0" marL="0">
+              <a:buNone/>
+            </a:pPr>
+            <a:r>
+              <a:rPr lang="en-US" sz="950" dirty="0">
+                <a:solidFill>
+                  <a:srgbClr val="8BAAC8"/>
+                </a:solidFill>
+                <a:latin typeface="Calibri" pitchFamily="34" charset="0"/>
+                <a:ea typeface="Calibri" pitchFamily="34" charset="-122"/>
+                <a:cs typeface="Calibri" pitchFamily="34" charset="-120"/>
+              </a:rPr>
+              <a:t>13 / 14</a:t>
+            </a:r>
+            <a:endParaRPr lang="en-US" sz="950" dirty="0"/>
+          </a:p>
+        </p:txBody>
+      </p:sp>
+    </p:spTree>
+  </p:cSld>
+  <p:clrMapOvr>
+    <a:masterClrMapping/>
+  </p:clrMapOvr>
+</p:sld>
+</file>
+
+<file path=ppt/slides/slide14.xml><?xml version="1.0" encoding="utf-8"?>
+<p:sld xmlns:a="http://schemas.openxmlformats.org/drawingml/2006/main" xmlns:r="http://schemas.openxmlformats.org/officeDocument/2006/relationships" xmlns:p="http://schemas.openxmlformats.org/presentationml/2006/main">
+  <p:cSld name="Slide 14">
     <p:bg>
       <p:bgPr>
         <a:solidFill>
@@ -4288,12 +5280,12 @@
         </p:nvSpPr>
         <p:spPr>
           <a:xfrm>
-            <a:off x="640080" y="1645920"/>
-            <a:ext cx="10881360" cy="914400"/>
+            <a:off x="640080" y="1691640"/>
+            <a:ext cx="10881360" cy="1024128"/>
           </a:xfrm>
           <a:prstGeom prst="roundRect">
             <a:avLst>
-              <a:gd name="adj" fmla="val 9000"/>
+              <a:gd name="adj" fmla="val 8036"/>
             </a:avLst>
           </a:prstGeom>
           <a:solidFill>
@@ -4315,7 +5307,7 @@
         </p:nvSpPr>
         <p:spPr>
           <a:xfrm>
-            <a:off x="841248" y="1792224"/>
+            <a:off x="841248" y="1837944"/>
             <a:ext cx="10479024" cy="329184"/>
           </a:xfrm>
           <a:prstGeom prst="rect">
@@ -4340,7 +5332,7 @@
                 <a:ea typeface="Calibri" pitchFamily="34" charset="-122"/>
                 <a:cs typeface="Calibri" pitchFamily="34" charset="-120"/>
               </a:rPr>
-              <a:t>Modelos oficiais</a:t>
+              <a:t>Não consigo mover o curso para "Em Planejamento"</a:t>
             </a:r>
             <a:endParaRPr lang="en-US" sz="1400" dirty="0"/>
           </a:p>
@@ -4354,8 +5346,8 @@
         </p:nvSpPr>
         <p:spPr>
           <a:xfrm>
-            <a:off x="841248" y="2121408"/>
-            <a:ext cx="10479024" cy="310896"/>
+            <a:off x="841248" y="2167128"/>
+            <a:ext cx="10479024" cy="420624"/>
           </a:xfrm>
           <a:prstGeom prst="rect">
             <a:avLst/>
@@ -4382,7 +5374,7 @@
                 <a:ea typeface="Calibri" pitchFamily="34" charset="-122"/>
                 <a:cs typeface="Calibri" pitchFamily="34" charset="-120"/>
               </a:rPr>
-              <a:t>Menu Modelos: baixe os templates marcados com ★ vigente (slides, estrutura de curso, guia...). Use sempre a versão vigente.</a:t>
+              <a:t>O projeto precisa ser aprovado pela TI, que define a carga horária. Assim que isso acontecer, a opção aparece.</a:t>
             </a:r>
             <a:endParaRPr lang="en-US" sz="1300" dirty="0"/>
           </a:p>
@@ -4396,12 +5388,12 @@
         </p:nvSpPr>
         <p:spPr>
           <a:xfrm>
-            <a:off x="640080" y="2706624"/>
-            <a:ext cx="10881360" cy="914400"/>
+            <a:off x="640080" y="2862072"/>
+            <a:ext cx="10881360" cy="1024128"/>
           </a:xfrm>
           <a:prstGeom prst="roundRect">
             <a:avLst>
-              <a:gd name="adj" fmla="val 9000"/>
+              <a:gd name="adj" fmla="val 8036"/>
             </a:avLst>
           </a:prstGeom>
           <a:solidFill>
@@ -4423,7 +5415,7 @@
         </p:nvSpPr>
         <p:spPr>
           <a:xfrm>
-            <a:off x="841248" y="2852928"/>
+            <a:off x="841248" y="3008376"/>
             <a:ext cx="10479024" cy="329184"/>
           </a:xfrm>
           <a:prstGeom prst="rect">
@@ -4448,7 +5440,7 @@
                 <a:ea typeface="Calibri" pitchFamily="34" charset="-122"/>
                 <a:cs typeface="Calibri" pitchFamily="34" charset="-120"/>
               </a:rPr>
-              <a:t>Meu Perfil</a:t>
+              <a:t>Recebi e-mail de vídeo — onde vejo?</a:t>
             </a:r>
             <a:endParaRPr lang="en-US" sz="1400" dirty="0"/>
           </a:p>
@@ -4462,8 +5454,8 @@
         </p:nvSpPr>
         <p:spPr>
           <a:xfrm>
-            <a:off x="841248" y="3182112"/>
-            <a:ext cx="10479024" cy="310896"/>
+            <a:off x="841248" y="3337560"/>
+            <a:ext cx="10479024" cy="420624"/>
           </a:xfrm>
           <a:prstGeom prst="rect">
             <a:avLst/>
@@ -4490,7 +5482,7 @@
                 <a:ea typeface="Calibri" pitchFamily="34" charset="-122"/>
                 <a:cs typeface="Calibri" pitchFamily="34" charset="-120"/>
               </a:rPr>
-              <a:t>Clique no 👤 seu nome: troque a senha e escolha como receber os e-mails (imediato, resumo diário ou desativado).</a:t>
+              <a:t>Clique no link do e-mail ou abra o curso e use o botão 🎬 Vídeos.</a:t>
             </a:r>
             <a:endParaRPr lang="en-US" sz="1300" dirty="0"/>
           </a:p>
@@ -4504,12 +5496,12 @@
         </p:nvSpPr>
         <p:spPr>
           <a:xfrm>
-            <a:off x="640080" y="3767328"/>
-            <a:ext cx="10881360" cy="914400"/>
+            <a:off x="640080" y="4032504"/>
+            <a:ext cx="10881360" cy="1024128"/>
           </a:xfrm>
           <a:prstGeom prst="roundRect">
             <a:avLst>
-              <a:gd name="adj" fmla="val 9000"/>
+              <a:gd name="adj" fmla="val 8036"/>
             </a:avLst>
           </a:prstGeom>
           <a:solidFill>
@@ -4531,7 +5523,7 @@
         </p:nvSpPr>
         <p:spPr>
           <a:xfrm>
-            <a:off x="841248" y="3913632"/>
+            <a:off x="841248" y="4178808"/>
             <a:ext cx="10479024" cy="329184"/>
           </a:xfrm>
           <a:prstGeom prst="rect">
@@ -4556,7 +5548,7 @@
                 <a:ea typeface="Calibri" pitchFamily="34" charset="-122"/>
                 <a:cs typeface="Calibri" pitchFamily="34" charset="-120"/>
               </a:rPr>
-              <a:t>Enviei um arquivo errado</a:t>
+              <a:t>Não consigo enviar vídeo</a:t>
             </a:r>
             <a:endParaRPr lang="en-US" sz="1400" dirty="0"/>
           </a:p>
@@ -4570,8 +5562,8 @@
         </p:nvSpPr>
         <p:spPr>
           <a:xfrm>
-            <a:off x="841248" y="4242816"/>
-            <a:ext cx="10479024" cy="310896"/>
+            <a:off x="841248" y="4507992"/>
+            <a:ext cx="10479024" cy="420624"/>
           </a:xfrm>
           <a:prstGeom prst="rect">
             <a:avLst/>
@@ -4598,7 +5590,7 @@
                 <a:ea typeface="Calibri" pitchFamily="34" charset="-122"/>
                 <a:cs typeface="Calibri" pitchFamily="34" charset="-120"/>
               </a:rPr>
-              <a:t>Envie o certo na mesma categoria e peça a exclusão do errado à TI — somente a administração exclui arquivos.</a:t>
+              <a:t>Os vídeos são produzidos e enviados pela MB Estúdios. Você analisa e aprova.</a:t>
             </a:r>
             <a:endParaRPr lang="en-US" sz="1300" dirty="0"/>
           </a:p>
@@ -4612,12 +5604,12 @@
         </p:nvSpPr>
         <p:spPr>
           <a:xfrm>
-            <a:off x="640080" y="4828032"/>
-            <a:ext cx="10881360" cy="914400"/>
+            <a:off x="640080" y="5202936"/>
+            <a:ext cx="10881360" cy="1024128"/>
           </a:xfrm>
           <a:prstGeom prst="roundRect">
             <a:avLst>
-              <a:gd name="adj" fmla="val 9000"/>
+              <a:gd name="adj" fmla="val 8036"/>
             </a:avLst>
           </a:prstGeom>
           <a:solidFill>
@@ -4639,7 +5631,7 @@
         </p:nvSpPr>
         <p:spPr>
           <a:xfrm>
-            <a:off x="841248" y="4974336"/>
+            <a:off x="841248" y="5349240"/>
             <a:ext cx="10479024" cy="329184"/>
           </a:xfrm>
           <a:prstGeom prst="rect">
@@ -4664,7 +5656,7 @@
                 <a:ea typeface="Calibri" pitchFamily="34" charset="-122"/>
                 <a:cs typeface="Calibri" pitchFamily="34" charset="-120"/>
               </a:rPr>
-              <a:t>Categoria bloqueada (cinza)</a:t>
+              <a:t>Categoria de material bloqueada (cinza)</a:t>
             </a:r>
             <a:endParaRPr lang="en-US" sz="1400" dirty="0"/>
           </a:p>
@@ -4678,8 +5670,8 @@
         </p:nvSpPr>
         <p:spPr>
           <a:xfrm>
-            <a:off x="841248" y="5303520"/>
-            <a:ext cx="10479024" cy="310896"/>
+            <a:off x="841248" y="5678424"/>
+            <a:ext cx="10479024" cy="420624"/>
           </a:xfrm>
           <a:prstGeom prst="rect">
             <a:avLst/>
@@ -4706,7 +5698,7 @@
                 <a:ea typeface="Calibri" pitchFamily="34" charset="-122"/>
                 <a:cs typeface="Calibri" pitchFamily="34" charset="-120"/>
               </a:rPr>
-              <a:t>Alguma etapa anterior do módulo não foi concluída. O painel "Ordem de entrega" mostra em azul qual é a etapa da vez.</a:t>
+              <a:t>Alguma etapa anterior do módulo não foi concluída — veja o painel "Ordem de entrega".</a:t>
             </a:r>
             <a:endParaRPr lang="en-US" sz="1300" dirty="0"/>
           </a:p>
@@ -4837,7 +5829,7 @@
                 <a:ea typeface="Calibri" pitchFamily="34" charset="-122"/>
                 <a:cs typeface="Calibri" pitchFamily="34" charset="-120"/>
               </a:rPr>
-              <a:t>13 / 13</a:t>
+              <a:t>14 / 14</a:t>
             </a:r>
             <a:endParaRPr lang="en-US" sz="950" dirty="0"/>
           </a:p>
@@ -4961,7 +5953,7 @@
         </p:nvSpPr>
         <p:spPr>
           <a:xfrm>
-            <a:off x="640080" y="1691640"/>
+            <a:off x="640080" y="1783080"/>
             <a:ext cx="384048" cy="384048"/>
           </a:xfrm>
           <a:prstGeom prst="ellipse">
@@ -4986,7 +5978,7 @@
         </p:nvSpPr>
         <p:spPr>
           <a:xfrm>
-            <a:off x="640080" y="1691640"/>
+            <a:off x="640080" y="1783080"/>
             <a:ext cx="384048" cy="384048"/>
           </a:xfrm>
           <a:prstGeom prst="rect">
@@ -5025,7 +6017,7 @@
         </p:nvSpPr>
         <p:spPr>
           <a:xfrm>
-            <a:off x="1207008" y="1655064"/>
+            <a:off x="1207008" y="1746504"/>
             <a:ext cx="4828032" cy="731520"/>
           </a:xfrm>
           <a:prstGeom prst="rect">
@@ -5064,7 +6056,7 @@
         </p:nvSpPr>
         <p:spPr>
           <a:xfrm>
-            <a:off x="640080" y="2532888"/>
+            <a:off x="640080" y="2862072"/>
             <a:ext cx="384048" cy="384048"/>
           </a:xfrm>
           <a:prstGeom prst="ellipse">
@@ -5089,7 +6081,7 @@
         </p:nvSpPr>
         <p:spPr>
           <a:xfrm>
-            <a:off x="640080" y="2532888"/>
+            <a:off x="640080" y="2862072"/>
             <a:ext cx="384048" cy="384048"/>
           </a:xfrm>
           <a:prstGeom prst="rect">
@@ -5128,7 +6120,7 @@
         </p:nvSpPr>
         <p:spPr>
           <a:xfrm>
-            <a:off x="1207008" y="2496312"/>
+            <a:off x="1207008" y="2825496"/>
             <a:ext cx="4828032" cy="731520"/>
           </a:xfrm>
           <a:prstGeom prst="rect">
@@ -5167,7 +6159,7 @@
         </p:nvSpPr>
         <p:spPr>
           <a:xfrm>
-            <a:off x="640080" y="3374136"/>
+            <a:off x="640080" y="3941064"/>
             <a:ext cx="384048" cy="384048"/>
           </a:xfrm>
           <a:prstGeom prst="ellipse">
@@ -5192,7 +6184,7 @@
         </p:nvSpPr>
         <p:spPr>
           <a:xfrm>
-            <a:off x="640080" y="3374136"/>
+            <a:off x="640080" y="3941064"/>
             <a:ext cx="384048" cy="384048"/>
           </a:xfrm>
           <a:prstGeom prst="rect">
@@ -5231,7 +6223,7 @@
         </p:nvSpPr>
         <p:spPr>
           <a:xfrm>
-            <a:off x="1207008" y="3337560"/>
+            <a:off x="1207008" y="3904488"/>
             <a:ext cx="4828032" cy="731520"/>
           </a:xfrm>
           <a:prstGeom prst="rect">
@@ -5270,7 +6262,7 @@
         </p:nvSpPr>
         <p:spPr>
           <a:xfrm>
-            <a:off x="640080" y="4215384"/>
+            <a:off x="640080" y="5020056"/>
             <a:ext cx="384048" cy="384048"/>
           </a:xfrm>
           <a:prstGeom prst="ellipse">
@@ -5295,7 +6287,7 @@
         </p:nvSpPr>
         <p:spPr>
           <a:xfrm>
-            <a:off x="640080" y="4215384"/>
+            <a:off x="640080" y="5020056"/>
             <a:ext cx="384048" cy="384048"/>
           </a:xfrm>
           <a:prstGeom prst="rect">
@@ -5334,7 +6326,7 @@
         </p:nvSpPr>
         <p:spPr>
           <a:xfrm>
-            <a:off x="1207008" y="4178808"/>
+            <a:off x="1207008" y="4983480"/>
             <a:ext cx="4828032" cy="731520"/>
           </a:xfrm>
           <a:prstGeom prst="rect">
@@ -5359,7 +6351,7 @@
                 <a:ea typeface="Calibri" pitchFamily="34" charset="-122"/>
                 <a:cs typeface="Calibri" pitchFamily="34" charset="-120"/>
               </a:rPr>
-              <a:t>Mover o curso de fase</a:t>
+              <a:t>A aprovação do projeto pela TI</a:t>
             </a:r>
             <a:endParaRPr lang="en-US" sz="1550" dirty="0"/>
           </a:p>
@@ -5373,7 +6365,7 @@
         </p:nvSpPr>
         <p:spPr>
           <a:xfrm>
-            <a:off x="6492240" y="1691640"/>
+            <a:off x="6492240" y="1783080"/>
             <a:ext cx="384048" cy="384048"/>
           </a:xfrm>
           <a:prstGeom prst="ellipse">
@@ -5398,7 +6390,7 @@
         </p:nvSpPr>
         <p:spPr>
           <a:xfrm>
-            <a:off x="6492240" y="1691640"/>
+            <a:off x="6492240" y="1783080"/>
             <a:ext cx="384048" cy="384048"/>
           </a:xfrm>
           <a:prstGeom prst="rect">
@@ -5437,7 +6429,7 @@
         </p:nvSpPr>
         <p:spPr>
           <a:xfrm>
-            <a:off x="7059168" y="1655064"/>
+            <a:off x="7059168" y="1746504"/>
             <a:ext cx="4828032" cy="731520"/>
           </a:xfrm>
           <a:prstGeom prst="rect">
@@ -5462,7 +6454,7 @@
                 <a:ea typeface="Calibri" pitchFamily="34" charset="-122"/>
                 <a:cs typeface="Calibri" pitchFamily="34" charset="-120"/>
               </a:rPr>
-              <a:t>Checklist e apontamentos</a:t>
+              <a:t>Mover o curso de fase</a:t>
             </a:r>
             <a:endParaRPr lang="en-US" sz="1550" dirty="0"/>
           </a:p>
@@ -5476,7 +6468,7 @@
         </p:nvSpPr>
         <p:spPr>
           <a:xfrm>
-            <a:off x="6492240" y="2532888"/>
+            <a:off x="6492240" y="2862072"/>
             <a:ext cx="384048" cy="384048"/>
           </a:xfrm>
           <a:prstGeom prst="ellipse">
@@ -5501,7 +6493,7 @@
         </p:nvSpPr>
         <p:spPr>
           <a:xfrm>
-            <a:off x="6492240" y="2532888"/>
+            <a:off x="6492240" y="2862072"/>
             <a:ext cx="384048" cy="384048"/>
           </a:xfrm>
           <a:prstGeom prst="rect">
@@ -5540,7 +6532,7 @@
         </p:nvSpPr>
         <p:spPr>
           <a:xfrm>
-            <a:off x="7059168" y="2496312"/>
+            <a:off x="7059168" y="2825496"/>
             <a:ext cx="4828032" cy="731520"/>
           </a:xfrm>
           <a:prstGeom prst="rect">
@@ -5579,7 +6571,7 @@
         </p:nvSpPr>
         <p:spPr>
           <a:xfrm>
-            <a:off x="6492240" y="3374136"/>
+            <a:off x="6492240" y="3941064"/>
             <a:ext cx="384048" cy="384048"/>
           </a:xfrm>
           <a:prstGeom prst="ellipse">
@@ -5604,7 +6596,7 @@
         </p:nvSpPr>
         <p:spPr>
           <a:xfrm>
-            <a:off x="6492240" y="3374136"/>
+            <a:off x="6492240" y="3941064"/>
             <a:ext cx="384048" cy="384048"/>
           </a:xfrm>
           <a:prstGeom prst="rect">
@@ -5643,7 +6635,7 @@
         </p:nvSpPr>
         <p:spPr>
           <a:xfrm>
-            <a:off x="7059168" y="3337560"/>
+            <a:off x="7059168" y="3904488"/>
             <a:ext cx="4828032" cy="731520"/>
           </a:xfrm>
           <a:prstGeom prst="rect">
@@ -5682,7 +6674,7 @@
         </p:nvSpPr>
         <p:spPr>
           <a:xfrm>
-            <a:off x="6492240" y="4215384"/>
+            <a:off x="6492240" y="5020056"/>
             <a:ext cx="384048" cy="384048"/>
           </a:xfrm>
           <a:prstGeom prst="ellipse">
@@ -5707,7 +6699,7 @@
         </p:nvSpPr>
         <p:spPr>
           <a:xfrm>
-            <a:off x="6492240" y="4215384"/>
+            <a:off x="6492240" y="5020056"/>
             <a:ext cx="384048" cy="384048"/>
           </a:xfrm>
           <a:prstGeom prst="rect">
@@ -5746,7 +6738,7 @@
         </p:nvSpPr>
         <p:spPr>
           <a:xfrm>
-            <a:off x="7059168" y="4178808"/>
+            <a:off x="7059168" y="4983480"/>
             <a:ext cx="4828032" cy="731520"/>
           </a:xfrm>
           <a:prstGeom prst="rect">
@@ -5771,7 +6763,7 @@
                 <a:ea typeface="Calibri" pitchFamily="34" charset="-122"/>
                 <a:cs typeface="Calibri" pitchFamily="34" charset="-120"/>
               </a:rPr>
-              <a:t>Modelos, perfil e ajuda</a:t>
+              <a:t>Analisar os vídeos da MB</a:t>
             </a:r>
             <a:endParaRPr lang="en-US" sz="1550" dirty="0"/>
           </a:p>
@@ -5849,7 +6841,7 @@
                 <a:ea typeface="Calibri" pitchFamily="34" charset="-122"/>
                 <a:cs typeface="Calibri" pitchFamily="34" charset="-120"/>
               </a:rPr>
-              <a:t>2 / 13</a:t>
+              <a:t>2 / 14</a:t>
             </a:r>
             <a:endParaRPr lang="en-US" sz="950" dirty="0"/>
           </a:p>
@@ -6309,7 +7301,7 @@
                 <a:ea typeface="Calibri" pitchFamily="34" charset="-122"/>
                 <a:cs typeface="Calibri" pitchFamily="34" charset="-120"/>
               </a:rPr>
-              <a:t> (institucional) e </a:t>
+              <a:t> e </a:t>
             </a:r>
             <a:pPr indent="0" marL="0">
               <a:buNone/>
@@ -6337,7 +7329,7 @@
                 <a:ea typeface="Calibri" pitchFamily="34" charset="-122"/>
                 <a:cs typeface="Calibri" pitchFamily="34" charset="-120"/>
               </a:rPr>
-              <a:t> (entregue pela TI);</a:t>
+              <a:t> (entregues pela TI);</a:t>
             </a:r>
             <a:endParaRPr lang="en-US" sz="1400" dirty="0"/>
           </a:p>
@@ -6700,7 +7692,7 @@
                 <a:ea typeface="Calibri" pitchFamily="34" charset="-122"/>
                 <a:cs typeface="Calibri" pitchFamily="34" charset="-120"/>
               </a:rPr>
-              <a:t>3 / 13</a:t>
+              <a:t>3 / 14</a:t>
             </a:r>
             <a:endParaRPr lang="en-US" sz="950" dirty="0"/>
           </a:p>
@@ -7064,11 +8056,11 @@
         <p:spPr>
           <a:xfrm>
             <a:off x="8321040" y="3063240"/>
-            <a:ext cx="3291840" cy="3108960"/>
+            <a:ext cx="3291840" cy="2331720"/>
           </a:xfrm>
           <a:prstGeom prst="roundRect">
             <a:avLst>
-              <a:gd name="adj" fmla="val 2647"/>
+              <a:gd name="adj" fmla="val 3529"/>
             </a:avLst>
           </a:prstGeom>
           <a:solidFill>
@@ -7130,7 +8122,7 @@
         <p:spPr>
           <a:xfrm>
             <a:off x="8522208" y="3538728"/>
-            <a:ext cx="2889504" cy="2505456"/>
+            <a:ext cx="2889504" cy="1728216"/>
           </a:xfrm>
           <a:prstGeom prst="rect">
             <a:avLst/>
@@ -7186,7 +8178,7 @@
                 <a:ea typeface="Calibri" pitchFamily="34" charset="-122"/>
                 <a:cs typeface="Calibri" pitchFamily="34" charset="-120"/>
               </a:rPr>
-              <a:t>O botão Abrir leva à página completa do curso — é lá que quase tudo acontece.</a:t>
+              <a:t>O botão Abrir leva à página completa do curso.</a:t>
             </a:r>
             <a:endParaRPr lang="en-US" sz="1300" dirty="0"/>
           </a:p>
@@ -7264,7 +8256,7 @@
                 <a:ea typeface="Calibri" pitchFamily="34" charset="-122"/>
                 <a:cs typeface="Calibri" pitchFamily="34" charset="-120"/>
               </a:rPr>
-              <a:t>4 / 13</a:t>
+              <a:t>4 / 14</a:t>
             </a:r>
             <a:endParaRPr lang="en-US" sz="950" dirty="0"/>
           </a:p>
@@ -7598,7 +8590,7 @@
                 <a:ea typeface="Calibri" pitchFamily="34" charset="-122"/>
                 <a:cs typeface="Calibri" pitchFamily="34" charset="-120"/>
               </a:rPr>
-              <a:t>Preencha o formulário (detalhes no próximo slide);</a:t>
+              <a:t>Preencha o formulário (campos no próximo slide);</a:t>
             </a:r>
             <a:endParaRPr lang="en-US" sz="1400" dirty="0"/>
           </a:p>
@@ -7832,7 +8824,7 @@
                 <a:ea typeface="Calibri" pitchFamily="34" charset="-122"/>
                 <a:cs typeface="Calibri" pitchFamily="34" charset="-120"/>
               </a:rPr>
-              <a:t>O curso é criado na fase "Curso Proposto" e a equipe do CECAPE recebe um e-mail automaticamente.</a:t>
+              <a:t>O curso é criado na fase "Curso Proposto" e a equipe do CECAPE recebe um e-mail.</a:t>
             </a:r>
             <a:endParaRPr lang="en-US" sz="1300" dirty="0"/>
           </a:p>
@@ -7861,7 +8853,7 @@
                 <a:ea typeface="Calibri" pitchFamily="34" charset="-122"/>
                 <a:cs typeface="Calibri" pitchFamily="34" charset="-120"/>
               </a:rPr>
-              <a:t>Você não precisa avisar ninguém — o sistema faz isso a cada passo.</a:t>
+              <a:t>A TI analisa o projeto e define a carga horária oficial — veja o próximo slide.</a:t>
             </a:r>
             <a:endParaRPr lang="en-US" sz="1300" dirty="0"/>
           </a:p>
@@ -8041,7 +9033,7 @@
                 <a:ea typeface="Calibri" pitchFamily="34" charset="-122"/>
                 <a:cs typeface="Calibri" pitchFamily="34" charset="-120"/>
               </a:rPr>
-              <a:t>5 / 13</a:t>
+              <a:t>5 / 14</a:t>
             </a:r>
             <a:endParaRPr lang="en-US" sz="950" dirty="0"/>
           </a:p>
@@ -8166,7 +9158,7 @@
         <p:spPr>
           <a:xfrm>
             <a:off x="640080" y="1508760"/>
-            <a:ext cx="2651760" cy="502920"/>
+            <a:ext cx="2834640" cy="502920"/>
           </a:xfrm>
           <a:prstGeom prst="rect">
             <a:avLst/>
@@ -8204,8 +9196,8 @@
         </p:nvSpPr>
         <p:spPr>
           <a:xfrm>
-            <a:off x="3383280" y="1508760"/>
-            <a:ext cx="8229600" cy="502920"/>
+            <a:off x="3566160" y="1508760"/>
+            <a:ext cx="8046720" cy="502920"/>
           </a:xfrm>
           <a:prstGeom prst="rect">
             <a:avLst/>
@@ -8267,7 +9259,7 @@
         <p:spPr>
           <a:xfrm>
             <a:off x="640080" y="2084832"/>
-            <a:ext cx="2651760" cy="502920"/>
+            <a:ext cx="2834640" cy="502920"/>
           </a:xfrm>
           <a:prstGeom prst="rect">
             <a:avLst/>
@@ -8291,7 +9283,7 @@
                 <a:ea typeface="Calibri" pitchFamily="34" charset="-122"/>
                 <a:cs typeface="Calibri" pitchFamily="34" charset="-120"/>
               </a:rPr>
-              <a:t>Carga horária *</a:t>
+              <a:t>Carga horária sugerida *</a:t>
             </a:r>
             <a:endParaRPr lang="en-US" sz="1350" dirty="0"/>
           </a:p>
@@ -8305,8 +9297,8 @@
         </p:nvSpPr>
         <p:spPr>
           <a:xfrm>
-            <a:off x="3383280" y="2084832"/>
-            <a:ext cx="8229600" cy="502920"/>
+            <a:off x="3566160" y="2084832"/>
+            <a:ext cx="8046720" cy="502920"/>
           </a:xfrm>
           <a:prstGeom prst="rect">
             <a:avLst/>
@@ -8330,7 +9322,7 @@
                 <a:ea typeface="Calibri" pitchFamily="34" charset="-122"/>
                 <a:cs typeface="Calibri" pitchFamily="34" charset="-120"/>
               </a:rPr>
-              <a:t>Lista suspensa: 10, 20, 30 ou 40 horas — mostra módulos e minutos de vídeo</a:t>
+              <a:t>Apenas a sua sugestão — a oficial é definida pela TI ao aprovar o projeto</a:t>
             </a:r>
             <a:endParaRPr lang="en-US" sz="1300" dirty="0"/>
           </a:p>
@@ -8368,7 +9360,7 @@
         <p:spPr>
           <a:xfrm>
             <a:off x="640080" y="2660904"/>
-            <a:ext cx="2651760" cy="502920"/>
+            <a:ext cx="2834640" cy="502920"/>
           </a:xfrm>
           <a:prstGeom prst="rect">
             <a:avLst/>
@@ -8406,8 +9398,8 @@
         </p:nvSpPr>
         <p:spPr>
           <a:xfrm>
-            <a:off x="3383280" y="2660904"/>
-            <a:ext cx="8229600" cy="502920"/>
+            <a:off x="3566160" y="2660904"/>
+            <a:ext cx="8046720" cy="502920"/>
           </a:xfrm>
           <a:prstGeom prst="rect">
             <a:avLst/>
@@ -8469,7 +9461,7 @@
         <p:spPr>
           <a:xfrm>
             <a:off x="640080" y="3236976"/>
-            <a:ext cx="2651760" cy="502920"/>
+            <a:ext cx="2834640" cy="502920"/>
           </a:xfrm>
           <a:prstGeom prst="rect">
             <a:avLst/>
@@ -8507,8 +9499,8 @@
         </p:nvSpPr>
         <p:spPr>
           <a:xfrm>
-            <a:off x="3383280" y="3236976"/>
-            <a:ext cx="8229600" cy="502920"/>
+            <a:off x="3566160" y="3236976"/>
+            <a:ext cx="8046720" cy="502920"/>
           </a:xfrm>
           <a:prstGeom prst="rect">
             <a:avLst/>
@@ -8570,7 +9562,7 @@
         <p:spPr>
           <a:xfrm>
             <a:off x="640080" y="3813048"/>
-            <a:ext cx="2651760" cy="502920"/>
+            <a:ext cx="2834640" cy="502920"/>
           </a:xfrm>
           <a:prstGeom prst="rect">
             <a:avLst/>
@@ -8608,8 +9600,8 @@
         </p:nvSpPr>
         <p:spPr>
           <a:xfrm>
-            <a:off x="3383280" y="3813048"/>
-            <a:ext cx="8229600" cy="502920"/>
+            <a:off x="3566160" y="3813048"/>
+            <a:ext cx="8046720" cy="502920"/>
           </a:xfrm>
           <a:prstGeom prst="rect">
             <a:avLst/>
@@ -8633,7 +9625,7 @@
                 <a:ea typeface="Calibri" pitchFamily="34" charset="-122"/>
                 <a:cs typeface="Calibri" pitchFamily="34" charset="-120"/>
               </a:rPr>
-              <a:t>Comece a digitar: a lista de escolas cadastradas aparece — clique na sua</a:t>
+              <a:t>Comece a digitar: a lista de escolas cadastradas aparece</a:t>
             </a:r>
             <a:endParaRPr lang="en-US" sz="1300" dirty="0"/>
           </a:p>
@@ -8671,7 +9663,7 @@
         <p:spPr>
           <a:xfrm>
             <a:off x="640080" y="4389120"/>
-            <a:ext cx="2651760" cy="502920"/>
+            <a:ext cx="2834640" cy="502920"/>
           </a:xfrm>
           <a:prstGeom prst="rect">
             <a:avLst/>
@@ -8709,8 +9701,8 @@
         </p:nvSpPr>
         <p:spPr>
           <a:xfrm>
-            <a:off x="3383280" y="4389120"/>
-            <a:ext cx="8229600" cy="502920"/>
+            <a:off x="3566160" y="4389120"/>
+            <a:ext cx="8046720" cy="502920"/>
           </a:xfrm>
           <a:prstGeom prst="rect">
             <a:avLst/>
@@ -8772,7 +9764,7 @@
         <p:spPr>
           <a:xfrm>
             <a:off x="640080" y="4965192"/>
-            <a:ext cx="2651760" cy="502920"/>
+            <a:ext cx="2834640" cy="502920"/>
           </a:xfrm>
           <a:prstGeom prst="rect">
             <a:avLst/>
@@ -8810,8 +9802,8 @@
         </p:nvSpPr>
         <p:spPr>
           <a:xfrm>
-            <a:off x="3383280" y="4965192"/>
-            <a:ext cx="8229600" cy="502920"/>
+            <a:off x="3566160" y="4965192"/>
+            <a:ext cx="8046720" cy="502920"/>
           </a:xfrm>
           <a:prstGeom prst="rect">
             <a:avLst/>
@@ -8873,7 +9865,7 @@
         <p:spPr>
           <a:xfrm>
             <a:off x="640080" y="5541264"/>
-            <a:ext cx="2651760" cy="502920"/>
+            <a:ext cx="2834640" cy="502920"/>
           </a:xfrm>
           <a:prstGeom prst="rect">
             <a:avLst/>
@@ -8911,8 +9903,8 @@
         </p:nvSpPr>
         <p:spPr>
           <a:xfrm>
-            <a:off x="3383280" y="5541264"/>
-            <a:ext cx="8229600" cy="502920"/>
+            <a:off x="3566160" y="5541264"/>
+            <a:ext cx="8046720" cy="502920"/>
           </a:xfrm>
           <a:prstGeom prst="rect">
             <a:avLst/>
@@ -8950,7 +9942,7 @@
         </p:nvSpPr>
         <p:spPr>
           <a:xfrm>
-            <a:off x="640080" y="6172200"/>
+            <a:off x="640080" y="6035040"/>
             <a:ext cx="4572000" cy="274320"/>
           </a:xfrm>
           <a:prstGeom prst="rect">
@@ -9053,7 +10045,7 @@
                 <a:ea typeface="Calibri" pitchFamily="34" charset="-122"/>
                 <a:cs typeface="Calibri" pitchFamily="34" charset="-120"/>
               </a:rPr>
-              <a:t>6 / 13</a:t>
+              <a:t>6 / 14</a:t>
             </a:r>
             <a:endParaRPr lang="en-US" sz="950" dirty="0"/>
           </a:p>
@@ -9124,7 +10116,7 @@
                 <a:ea typeface="Calibri" pitchFamily="34" charset="-122"/>
                 <a:cs typeface="Calibri" pitchFamily="34" charset="-120"/>
               </a:rPr>
-              <a:t>PASSO A PASSO</a:t>
+              <a:t>NOVIDADE</a:t>
             </a:r>
             <a:endParaRPr lang="en-US" sz="1200" dirty="0"/>
           </a:p>
@@ -9163,7 +10155,7 @@
                 <a:ea typeface="Calibri" pitchFamily="34" charset="-122"/>
                 <a:cs typeface="Calibri" pitchFamily="34" charset="-120"/>
               </a:rPr>
-              <a:t>4. Mover o curso de fase</a:t>
+              <a:t>4. A aprovação do projeto pela TI</a:t>
             </a:r>
             <a:endParaRPr lang="en-US" sz="3000" dirty="0"/>
           </a:p>
@@ -9171,89 +10163,33 @@
       </p:sp>
       <p:sp>
         <p:nvSpPr>
-          <p:cNvPr id="4" name="Shape 2"/>
-          <p:cNvSpPr/>
-          <p:nvPr/>
-        </p:nvSpPr>
-        <p:spPr>
-          <a:xfrm>
-            <a:off x="640080" y="1737360"/>
-            <a:ext cx="310896" cy="310896"/>
-          </a:xfrm>
-          <a:prstGeom prst="ellipse">
-            <a:avLst/>
-          </a:prstGeom>
-          <a:solidFill>
-            <a:srgbClr val="22D3EE"/>
-          </a:solidFill>
-          <a:ln/>
-        </p:spPr>
-      </p:sp>
-      <p:sp>
-        <p:nvSpPr>
-          <p:cNvPr id="5" name="Text 3"/>
-          <p:cNvSpPr/>
-          <p:nvPr/>
-        </p:nvSpPr>
-        <p:spPr>
-          <a:xfrm>
-            <a:off x="640080" y="1737360"/>
-            <a:ext cx="310896" cy="310896"/>
-          </a:xfrm>
-          <a:prstGeom prst="rect">
-            <a:avLst/>
-          </a:prstGeom>
-          <a:noFill/>
-          <a:ln/>
-        </p:spPr>
-        <p:txBody>
-          <a:bodyPr wrap="square" lIns="0" tIns="0" rIns="0" bIns="0" rtlCol="0" anchor="ctr"/>
-          <a:lstStyle/>
-          <a:p>
-            <a:pPr algn="ctr" indent="0" marL="0">
-              <a:buNone/>
-            </a:pPr>
-            <a:r>
-              <a:rPr lang="en-US" sz="1300" b="1" dirty="0">
-                <a:solidFill>
-                  <a:srgbClr val="07101F"/>
-                </a:solidFill>
-                <a:latin typeface="Calibri" pitchFamily="34" charset="0"/>
-                <a:ea typeface="Calibri" pitchFamily="34" charset="-122"/>
-                <a:cs typeface="Calibri" pitchFamily="34" charset="-120"/>
-              </a:rPr>
-              <a:t>1</a:t>
-            </a:r>
-            <a:endParaRPr lang="en-US" sz="1300" dirty="0"/>
-          </a:p>
-        </p:txBody>
-      </p:sp>
-      <p:sp>
-        <p:nvSpPr>
-          <p:cNvPr id="6" name="Text 4"/>
-          <p:cNvSpPr/>
-          <p:nvPr/>
-        </p:nvSpPr>
-        <p:spPr>
-          <a:xfrm>
-            <a:off x="1097280" y="1691640"/>
-            <a:ext cx="5394960" cy="868680"/>
-          </a:xfrm>
-          <a:prstGeom prst="rect">
-            <a:avLst/>
-          </a:prstGeom>
-          <a:noFill/>
-          <a:ln/>
-        </p:spPr>
-        <p:txBody>
-          <a:bodyPr wrap="square" lIns="0" tIns="0" rIns="0" bIns="0" rtlCol="0" anchor="t"/>
-          <a:lstStyle/>
-          <a:p>
-            <a:pPr indent="0" marL="0">
-              <a:buNone/>
-            </a:pPr>
-            <a:r>
-              <a:rPr lang="en-US" sz="1400" dirty="0">
+          <p:cNvPr id="4" name="Text 2"/>
+          <p:cNvSpPr/>
+          <p:nvPr/>
+        </p:nvSpPr>
+        <p:spPr>
+          <a:xfrm>
+            <a:off x="640080" y="1554480"/>
+            <a:ext cx="10972800" cy="731520"/>
+          </a:xfrm>
+          <a:prstGeom prst="rect">
+            <a:avLst/>
+          </a:prstGeom>
+          <a:noFill/>
+          <a:ln/>
+        </p:spPr>
+        <p:txBody>
+          <a:bodyPr wrap="square" lIns="0" tIns="0" rIns="0" bIns="0" rtlCol="0" anchor="ctr"/>
+          <a:lstStyle/>
+          <a:p>
+            <a:pPr indent="0" marL="0">
+              <a:lnSpc>
+                <a:spcPct val="115000"/>
+              </a:lnSpc>
+              <a:buNone/>
+            </a:pPr>
+            <a:r>
+              <a:rPr lang="en-US" sz="1450" dirty="0">
                 <a:solidFill>
                   <a:srgbClr val="E8EEF7"/>
                 </a:solidFill>
@@ -9261,404 +10197,302 @@
                 <a:ea typeface="Calibri" pitchFamily="34" charset="-122"/>
                 <a:cs typeface="Calibri" pitchFamily="34" charset="-120"/>
               </a:rPr>
-              <a:t>Abra o curso (botão </a:t>
-            </a:r>
-            <a:pPr indent="0" marL="0">
-              <a:buNone/>
-            </a:pPr>
-            <a:r>
-              <a:rPr lang="en-US" sz="1400" b="1" dirty="0">
-                <a:solidFill>
-                  <a:srgbClr val="22D3EE"/>
-                </a:solidFill>
-                <a:latin typeface="Calibri" pitchFamily="34" charset="0"/>
-                <a:ea typeface="Calibri" pitchFamily="34" charset="-122"/>
-                <a:cs typeface="Calibri" pitchFamily="34" charset="-120"/>
-              </a:rPr>
-              <a:t>Abrir</a:t>
-            </a:r>
-            <a:pPr indent="0" marL="0">
-              <a:buNone/>
-            </a:pPr>
-            <a:r>
-              <a:rPr lang="en-US" sz="1400" dirty="0">
-                <a:solidFill>
-                  <a:srgbClr val="E8EEF7"/>
-                </a:solidFill>
-                <a:latin typeface="Calibri" pitchFamily="34" charset="0"/>
-                <a:ea typeface="Calibri" pitchFamily="34" charset="-122"/>
-                <a:cs typeface="Calibri" pitchFamily="34" charset="-120"/>
-              </a:rPr>
-              <a:t>);</a:t>
-            </a:r>
-            <a:endParaRPr lang="en-US" sz="1400" dirty="0"/>
-          </a:p>
-        </p:txBody>
-      </p:sp>
-      <p:sp>
-        <p:nvSpPr>
-          <p:cNvPr id="7" name="Shape 5"/>
-          <p:cNvSpPr/>
-          <p:nvPr/>
-        </p:nvSpPr>
-        <p:spPr>
-          <a:xfrm>
-            <a:off x="640080" y="2606040"/>
-            <a:ext cx="310896" cy="310896"/>
-          </a:xfrm>
-          <a:prstGeom prst="ellipse">
-            <a:avLst/>
-          </a:prstGeom>
-          <a:solidFill>
-            <a:srgbClr val="22D3EE"/>
-          </a:solidFill>
-          <a:ln/>
-        </p:spPr>
-      </p:sp>
-      <p:sp>
-        <p:nvSpPr>
-          <p:cNvPr id="8" name="Text 6"/>
-          <p:cNvSpPr/>
-          <p:nvPr/>
-        </p:nvSpPr>
-        <p:spPr>
-          <a:xfrm>
-            <a:off x="640080" y="2606040"/>
-            <a:ext cx="310896" cy="310896"/>
-          </a:xfrm>
-          <a:prstGeom prst="rect">
-            <a:avLst/>
-          </a:prstGeom>
-          <a:noFill/>
-          <a:ln/>
-        </p:spPr>
-        <p:txBody>
-          <a:bodyPr wrap="square" lIns="0" tIns="0" rIns="0" bIns="0" rtlCol="0" anchor="ctr"/>
-          <a:lstStyle/>
-          <a:p>
-            <a:pPr algn="ctr" indent="0" marL="0">
-              <a:buNone/>
-            </a:pPr>
-            <a:r>
-              <a:rPr lang="en-US" sz="1300" b="1" dirty="0">
-                <a:solidFill>
-                  <a:srgbClr val="07101F"/>
-                </a:solidFill>
-                <a:latin typeface="Calibri" pitchFamily="34" charset="0"/>
-                <a:ea typeface="Calibri" pitchFamily="34" charset="-122"/>
-                <a:cs typeface="Calibri" pitchFamily="34" charset="-120"/>
-              </a:rPr>
-              <a:t>2</a:t>
-            </a:r>
-            <a:endParaRPr lang="en-US" sz="1300" dirty="0"/>
-          </a:p>
-        </p:txBody>
-      </p:sp>
-      <p:sp>
-        <p:nvSpPr>
-          <p:cNvPr id="9" name="Text 7"/>
-          <p:cNvSpPr/>
-          <p:nvPr/>
-        </p:nvSpPr>
-        <p:spPr>
-          <a:xfrm>
-            <a:off x="1097280" y="2560320"/>
-            <a:ext cx="5394960" cy="868680"/>
-          </a:xfrm>
-          <a:prstGeom prst="rect">
-            <a:avLst/>
-          </a:prstGeom>
-          <a:noFill/>
-          <a:ln/>
-        </p:spPr>
-        <p:txBody>
-          <a:bodyPr wrap="square" lIns="0" tIns="0" rIns="0" bIns="0" rtlCol="0" anchor="t"/>
-          <a:lstStyle/>
-          <a:p>
-            <a:pPr indent="0" marL="0">
-              <a:buNone/>
-            </a:pPr>
-            <a:r>
-              <a:rPr lang="en-US" sz="1400" dirty="0">
-                <a:solidFill>
-                  <a:srgbClr val="E8EEF7"/>
-                </a:solidFill>
-                <a:latin typeface="Calibri" pitchFamily="34" charset="0"/>
-                <a:ea typeface="Calibri" pitchFamily="34" charset="-122"/>
-                <a:cs typeface="Calibri" pitchFamily="34" charset="-120"/>
-              </a:rPr>
-              <a:t>No quadro </a:t>
-            </a:r>
-            <a:pPr indent="0" marL="0">
-              <a:buNone/>
-            </a:pPr>
-            <a:r>
-              <a:rPr lang="en-US" sz="1400" b="1" dirty="0">
-                <a:solidFill>
-                  <a:srgbClr val="E8EEF7"/>
-                </a:solidFill>
-                <a:latin typeface="Calibri" pitchFamily="34" charset="0"/>
-                <a:ea typeface="Calibri" pitchFamily="34" charset="-122"/>
-                <a:cs typeface="Calibri" pitchFamily="34" charset="-120"/>
-              </a:rPr>
-              <a:t>Ações de Status</a:t>
-            </a:r>
-            <a:pPr indent="0" marL="0">
-              <a:buNone/>
-            </a:pPr>
-            <a:r>
-              <a:rPr lang="en-US" sz="1400" dirty="0">
-                <a:solidFill>
-                  <a:srgbClr val="E8EEF7"/>
-                </a:solidFill>
-                <a:latin typeface="Calibri" pitchFamily="34" charset="0"/>
-                <a:ea typeface="Calibri" pitchFamily="34" charset="-122"/>
-                <a:cs typeface="Calibri" pitchFamily="34" charset="-120"/>
-              </a:rPr>
-              <a:t>, clique na lista suspensa — ela mostra apenas as fases permitidas a você, na ordem certa;</a:t>
-            </a:r>
-            <a:endParaRPr lang="en-US" sz="1400" dirty="0"/>
-          </a:p>
-        </p:txBody>
-      </p:sp>
-      <p:sp>
-        <p:nvSpPr>
-          <p:cNvPr id="10" name="Shape 8"/>
-          <p:cNvSpPr/>
-          <p:nvPr/>
-        </p:nvSpPr>
-        <p:spPr>
-          <a:xfrm>
-            <a:off x="640080" y="3474720"/>
-            <a:ext cx="310896" cy="310896"/>
-          </a:xfrm>
-          <a:prstGeom prst="ellipse">
-            <a:avLst/>
-          </a:prstGeom>
-          <a:solidFill>
-            <a:srgbClr val="22D3EE"/>
-          </a:solidFill>
-          <a:ln/>
-        </p:spPr>
-      </p:sp>
-      <p:sp>
-        <p:nvSpPr>
-          <p:cNvPr id="11" name="Text 9"/>
-          <p:cNvSpPr/>
-          <p:nvPr/>
-        </p:nvSpPr>
-        <p:spPr>
-          <a:xfrm>
-            <a:off x="640080" y="3474720"/>
-            <a:ext cx="310896" cy="310896"/>
-          </a:xfrm>
-          <a:prstGeom prst="rect">
-            <a:avLst/>
-          </a:prstGeom>
-          <a:noFill/>
-          <a:ln/>
-        </p:spPr>
-        <p:txBody>
-          <a:bodyPr wrap="square" lIns="0" tIns="0" rIns="0" bIns="0" rtlCol="0" anchor="ctr"/>
-          <a:lstStyle/>
-          <a:p>
-            <a:pPr algn="ctr" indent="0" marL="0">
-              <a:buNone/>
-            </a:pPr>
-            <a:r>
-              <a:rPr lang="en-US" sz="1300" b="1" dirty="0">
-                <a:solidFill>
-                  <a:srgbClr val="07101F"/>
-                </a:solidFill>
-                <a:latin typeface="Calibri" pitchFamily="34" charset="0"/>
-                <a:ea typeface="Calibri" pitchFamily="34" charset="-122"/>
-                <a:cs typeface="Calibri" pitchFamily="34" charset="-120"/>
-              </a:rPr>
-              <a:t>3</a:t>
-            </a:r>
-            <a:endParaRPr lang="en-US" sz="1300" dirty="0"/>
-          </a:p>
-        </p:txBody>
-      </p:sp>
-      <p:sp>
-        <p:nvSpPr>
-          <p:cNvPr id="12" name="Text 10"/>
-          <p:cNvSpPr/>
-          <p:nvPr/>
-        </p:nvSpPr>
-        <p:spPr>
-          <a:xfrm>
-            <a:off x="1097280" y="3429000"/>
-            <a:ext cx="5394960" cy="868680"/>
-          </a:xfrm>
-          <a:prstGeom prst="rect">
-            <a:avLst/>
-          </a:prstGeom>
-          <a:noFill/>
-          <a:ln/>
-        </p:spPr>
-        <p:txBody>
-          <a:bodyPr wrap="square" lIns="0" tIns="0" rIns="0" bIns="0" rtlCol="0" anchor="t"/>
-          <a:lstStyle/>
-          <a:p>
-            <a:pPr indent="0" marL="0">
-              <a:buNone/>
-            </a:pPr>
-            <a:r>
-              <a:rPr lang="en-US" sz="1400" dirty="0">
-                <a:solidFill>
-                  <a:srgbClr val="E8EEF7"/>
-                </a:solidFill>
-                <a:latin typeface="Calibri" pitchFamily="34" charset="0"/>
-                <a:ea typeface="Calibri" pitchFamily="34" charset="-122"/>
-                <a:cs typeface="Calibri" pitchFamily="34" charset="-120"/>
-              </a:rPr>
-              <a:t>Se quiser, escreva uma observação (opcional);</a:t>
-            </a:r>
-            <a:endParaRPr lang="en-US" sz="1400" dirty="0"/>
-          </a:p>
-        </p:txBody>
-      </p:sp>
-      <p:sp>
-        <p:nvSpPr>
-          <p:cNvPr id="13" name="Shape 11"/>
-          <p:cNvSpPr/>
-          <p:nvPr/>
-        </p:nvSpPr>
-        <p:spPr>
-          <a:xfrm>
-            <a:off x="640080" y="4343400"/>
-            <a:ext cx="310896" cy="310896"/>
-          </a:xfrm>
-          <a:prstGeom prst="ellipse">
-            <a:avLst/>
-          </a:prstGeom>
-          <a:solidFill>
-            <a:srgbClr val="22D3EE"/>
-          </a:solidFill>
-          <a:ln/>
-        </p:spPr>
-      </p:sp>
-      <p:sp>
-        <p:nvSpPr>
-          <p:cNvPr id="14" name="Text 12"/>
-          <p:cNvSpPr/>
-          <p:nvPr/>
-        </p:nvSpPr>
-        <p:spPr>
-          <a:xfrm>
-            <a:off x="640080" y="4343400"/>
-            <a:ext cx="310896" cy="310896"/>
-          </a:xfrm>
-          <a:prstGeom prst="rect">
-            <a:avLst/>
-          </a:prstGeom>
-          <a:noFill/>
-          <a:ln/>
-        </p:spPr>
-        <p:txBody>
-          <a:bodyPr wrap="square" lIns="0" tIns="0" rIns="0" bIns="0" rtlCol="0" anchor="ctr"/>
-          <a:lstStyle/>
-          <a:p>
-            <a:pPr algn="ctr" indent="0" marL="0">
-              <a:buNone/>
-            </a:pPr>
-            <a:r>
-              <a:rPr lang="en-US" sz="1300" b="1" dirty="0">
-                <a:solidFill>
-                  <a:srgbClr val="07101F"/>
-                </a:solidFill>
-                <a:latin typeface="Calibri" pitchFamily="34" charset="0"/>
-                <a:ea typeface="Calibri" pitchFamily="34" charset="-122"/>
-                <a:cs typeface="Calibri" pitchFamily="34" charset="-120"/>
-              </a:rPr>
-              <a:t>4</a:t>
-            </a:r>
-            <a:endParaRPr lang="en-US" sz="1300" dirty="0"/>
-          </a:p>
-        </p:txBody>
-      </p:sp>
-      <p:sp>
-        <p:nvSpPr>
-          <p:cNvPr id="15" name="Text 13"/>
-          <p:cNvSpPr/>
-          <p:nvPr/>
-        </p:nvSpPr>
-        <p:spPr>
-          <a:xfrm>
-            <a:off x="1097280" y="4297680"/>
-            <a:ext cx="5394960" cy="868680"/>
-          </a:xfrm>
-          <a:prstGeom prst="rect">
-            <a:avLst/>
-          </a:prstGeom>
-          <a:noFill/>
-          <a:ln/>
-        </p:spPr>
-        <p:txBody>
-          <a:bodyPr wrap="square" lIns="0" tIns="0" rIns="0" bIns="0" rtlCol="0" anchor="t"/>
-          <a:lstStyle/>
-          <a:p>
-            <a:pPr indent="0" marL="0">
-              <a:buNone/>
-            </a:pPr>
-            <a:r>
-              <a:rPr lang="en-US" sz="1400" dirty="0">
-                <a:solidFill>
-                  <a:srgbClr val="E8EEF7"/>
-                </a:solidFill>
-                <a:latin typeface="Calibri" pitchFamily="34" charset="0"/>
-                <a:ea typeface="Calibri" pitchFamily="34" charset="-122"/>
-                <a:cs typeface="Calibri" pitchFamily="34" charset="-120"/>
-              </a:rPr>
-              <a:t>Clique em </a:t>
-            </a:r>
-            <a:pPr indent="0" marL="0">
-              <a:buNone/>
-            </a:pPr>
-            <a:r>
-              <a:rPr lang="en-US" sz="1400" b="1" dirty="0">
-                <a:solidFill>
-                  <a:srgbClr val="22D3EE"/>
-                </a:solidFill>
-                <a:latin typeface="Calibri" pitchFamily="34" charset="0"/>
-                <a:ea typeface="Calibri" pitchFamily="34" charset="-122"/>
-                <a:cs typeface="Calibri" pitchFamily="34" charset="-120"/>
-              </a:rPr>
-              <a:t>Atualizar Status</a:t>
-            </a:r>
-            <a:pPr indent="0" marL="0">
-              <a:buNone/>
-            </a:pPr>
-            <a:r>
-              <a:rPr lang="en-US" sz="1400" dirty="0">
-                <a:solidFill>
-                  <a:srgbClr val="E8EEF7"/>
-                </a:solidFill>
-                <a:latin typeface="Calibri" pitchFamily="34" charset="0"/>
-                <a:ea typeface="Calibri" pitchFamily="34" charset="-122"/>
-                <a:cs typeface="Calibri" pitchFamily="34" charset="-120"/>
-              </a:rPr>
-              <a:t> e confirme.</a:t>
-            </a:r>
-            <a:endParaRPr lang="en-US" sz="1400" dirty="0"/>
-          </a:p>
-        </p:txBody>
-      </p:sp>
-      <p:sp>
-        <p:nvSpPr>
-          <p:cNvPr id="16" name="Shape 14"/>
-          <p:cNvSpPr/>
-          <p:nvPr/>
-        </p:nvSpPr>
-        <p:spPr>
-          <a:xfrm>
-            <a:off x="640080" y="5074920"/>
-            <a:ext cx="5852160" cy="1051560"/>
+              <a:t>Depois de propor, o curso fica em "Curso Proposto" e você aguarda: a equipe de TI analisa o projeto e define a carga horária oficial, movendo o curso para "Projeto Aprovado". Só então você segue para o planejamento.</a:t>
+            </a:r>
+            <a:endParaRPr lang="en-US" sz="1450" dirty="0"/>
+          </a:p>
+        </p:txBody>
+      </p:sp>
+      <p:sp>
+        <p:nvSpPr>
+          <p:cNvPr id="5" name="Shape 3"/>
+          <p:cNvSpPr/>
+          <p:nvPr/>
+        </p:nvSpPr>
+        <p:spPr>
+          <a:xfrm>
+            <a:off x="640080" y="2377440"/>
+            <a:ext cx="1382573" cy="402336"/>
           </a:xfrm>
           <a:prstGeom prst="roundRect">
             <a:avLst>
-              <a:gd name="adj" fmla="val 7826"/>
+              <a:gd name="adj" fmla="val 50000"/>
+            </a:avLst>
+          </a:prstGeom>
+          <a:solidFill>
+            <a:srgbClr val="10233F"/>
+          </a:solidFill>
+          <a:ln w="15240">
+            <a:solidFill>
+              <a:srgbClr val="1D3A5F"/>
+            </a:solidFill>
+            <a:prstDash val="solid"/>
+          </a:ln>
+        </p:spPr>
+      </p:sp>
+      <p:sp>
+        <p:nvSpPr>
+          <p:cNvPr id="6" name="Text 4"/>
+          <p:cNvSpPr/>
+          <p:nvPr/>
+        </p:nvSpPr>
+        <p:spPr>
+          <a:xfrm>
+            <a:off x="640080" y="2377440"/>
+            <a:ext cx="1382573" cy="402336"/>
+          </a:xfrm>
+          <a:prstGeom prst="rect">
+            <a:avLst/>
+          </a:prstGeom>
+          <a:noFill/>
+          <a:ln/>
+        </p:spPr>
+        <p:txBody>
+          <a:bodyPr wrap="square" lIns="0" tIns="0" rIns="0" bIns="0" rtlCol="0" anchor="ctr"/>
+          <a:lstStyle/>
+          <a:p>
+            <a:pPr algn="ctr" indent="0" marL="0">
+              <a:buNone/>
+            </a:pPr>
+            <a:r>
+              <a:rPr lang="en-US" sz="1250" dirty="0">
+                <a:solidFill>
+                  <a:srgbClr val="E8EEF7"/>
+                </a:solidFill>
+                <a:latin typeface="Calibri" pitchFamily="34" charset="0"/>
+                <a:ea typeface="Calibri" pitchFamily="34" charset="-122"/>
+                <a:cs typeface="Calibri" pitchFamily="34" charset="-120"/>
+              </a:rPr>
+              <a:t>Curso Proposto</a:t>
+            </a:r>
+            <a:endParaRPr lang="en-US" sz="1250" dirty="0"/>
+          </a:p>
+        </p:txBody>
+      </p:sp>
+      <p:sp>
+        <p:nvSpPr>
+          <p:cNvPr id="7" name="Text 5"/>
+          <p:cNvSpPr/>
+          <p:nvPr/>
+        </p:nvSpPr>
+        <p:spPr>
+          <a:xfrm>
+            <a:off x="2059229" y="2377440"/>
+            <a:ext cx="274320" cy="402336"/>
+          </a:xfrm>
+          <a:prstGeom prst="rect">
+            <a:avLst/>
+          </a:prstGeom>
+          <a:noFill/>
+          <a:ln/>
+        </p:spPr>
+        <p:txBody>
+          <a:bodyPr wrap="square" lIns="0" tIns="0" rIns="0" bIns="0" rtlCol="0" anchor="ctr"/>
+          <a:lstStyle/>
+          <a:p>
+            <a:pPr algn="ctr" indent="0" marL="0">
+              <a:buNone/>
+            </a:pPr>
+            <a:r>
+              <a:rPr lang="en-US" sz="1500" b="1" dirty="0">
+                <a:solidFill>
+                  <a:srgbClr val="06B6D4"/>
+                </a:solidFill>
+                <a:latin typeface="Calibri" pitchFamily="34" charset="0"/>
+                <a:ea typeface="Calibri" pitchFamily="34" charset="-122"/>
+                <a:cs typeface="Calibri" pitchFamily="34" charset="-120"/>
+              </a:rPr>
+              <a:t>→</a:t>
+            </a:r>
+            <a:endParaRPr lang="en-US" sz="1500" dirty="0"/>
+          </a:p>
+        </p:txBody>
+      </p:sp>
+      <p:sp>
+        <p:nvSpPr>
+          <p:cNvPr id="8" name="Shape 6"/>
+          <p:cNvSpPr/>
+          <p:nvPr/>
+        </p:nvSpPr>
+        <p:spPr>
+          <a:xfrm>
+            <a:off x="2370125" y="2377440"/>
+            <a:ext cx="1543507" cy="402336"/>
+          </a:xfrm>
+          <a:prstGeom prst="roundRect">
+            <a:avLst>
+              <a:gd name="adj" fmla="val 50000"/>
+            </a:avLst>
+          </a:prstGeom>
+          <a:solidFill>
+            <a:srgbClr val="10233F"/>
+          </a:solidFill>
+          <a:ln w="15240">
+            <a:solidFill>
+              <a:srgbClr val="1D3A5F"/>
+            </a:solidFill>
+            <a:prstDash val="solid"/>
+          </a:ln>
+        </p:spPr>
+      </p:sp>
+      <p:sp>
+        <p:nvSpPr>
+          <p:cNvPr id="9" name="Text 7"/>
+          <p:cNvSpPr/>
+          <p:nvPr/>
+        </p:nvSpPr>
+        <p:spPr>
+          <a:xfrm>
+            <a:off x="2370125" y="2377440"/>
+            <a:ext cx="1543507" cy="402336"/>
+          </a:xfrm>
+          <a:prstGeom prst="rect">
+            <a:avLst/>
+          </a:prstGeom>
+          <a:noFill/>
+          <a:ln/>
+        </p:spPr>
+        <p:txBody>
+          <a:bodyPr wrap="square" lIns="0" tIns="0" rIns="0" bIns="0" rtlCol="0" anchor="ctr"/>
+          <a:lstStyle/>
+          <a:p>
+            <a:pPr algn="ctr" indent="0" marL="0">
+              <a:buNone/>
+            </a:pPr>
+            <a:r>
+              <a:rPr lang="en-US" sz="1250" dirty="0">
+                <a:solidFill>
+                  <a:srgbClr val="E8EEF7"/>
+                </a:solidFill>
+                <a:latin typeface="Calibri" pitchFamily="34" charset="0"/>
+                <a:ea typeface="Calibri" pitchFamily="34" charset="-122"/>
+                <a:cs typeface="Calibri" pitchFamily="34" charset="-120"/>
+              </a:rPr>
+              <a:t>Projeto Aprovado</a:t>
+            </a:r>
+            <a:endParaRPr lang="en-US" sz="1250" dirty="0"/>
+          </a:p>
+        </p:txBody>
+      </p:sp>
+      <p:sp>
+        <p:nvSpPr>
+          <p:cNvPr id="10" name="Text 8"/>
+          <p:cNvSpPr/>
+          <p:nvPr/>
+        </p:nvSpPr>
+        <p:spPr>
+          <a:xfrm>
+            <a:off x="3950208" y="2377440"/>
+            <a:ext cx="274320" cy="402336"/>
+          </a:xfrm>
+          <a:prstGeom prst="rect">
+            <a:avLst/>
+          </a:prstGeom>
+          <a:noFill/>
+          <a:ln/>
+        </p:spPr>
+        <p:txBody>
+          <a:bodyPr wrap="square" lIns="0" tIns="0" rIns="0" bIns="0" rtlCol="0" anchor="ctr"/>
+          <a:lstStyle/>
+          <a:p>
+            <a:pPr algn="ctr" indent="0" marL="0">
+              <a:buNone/>
+            </a:pPr>
+            <a:r>
+              <a:rPr lang="en-US" sz="1500" b="1" dirty="0">
+                <a:solidFill>
+                  <a:srgbClr val="06B6D4"/>
+                </a:solidFill>
+                <a:latin typeface="Calibri" pitchFamily="34" charset="0"/>
+                <a:ea typeface="Calibri" pitchFamily="34" charset="-122"/>
+                <a:cs typeface="Calibri" pitchFamily="34" charset="-120"/>
+              </a:rPr>
+              <a:t>→</a:t>
+            </a:r>
+            <a:endParaRPr lang="en-US" sz="1500" dirty="0"/>
+          </a:p>
+        </p:txBody>
+      </p:sp>
+      <p:sp>
+        <p:nvSpPr>
+          <p:cNvPr id="11" name="Shape 9"/>
+          <p:cNvSpPr/>
+          <p:nvPr/>
+        </p:nvSpPr>
+        <p:spPr>
+          <a:xfrm>
+            <a:off x="4261104" y="2377440"/>
+            <a:ext cx="1463040" cy="402336"/>
+          </a:xfrm>
+          <a:prstGeom prst="roundRect">
+            <a:avLst>
+              <a:gd name="adj" fmla="val 50000"/>
+            </a:avLst>
+          </a:prstGeom>
+          <a:solidFill>
+            <a:srgbClr val="10233F"/>
+          </a:solidFill>
+          <a:ln w="15240">
+            <a:solidFill>
+              <a:srgbClr val="1D3A5F"/>
+            </a:solidFill>
+            <a:prstDash val="solid"/>
+          </a:ln>
+        </p:spPr>
+      </p:sp>
+      <p:sp>
+        <p:nvSpPr>
+          <p:cNvPr id="12" name="Text 10"/>
+          <p:cNvSpPr/>
+          <p:nvPr/>
+        </p:nvSpPr>
+        <p:spPr>
+          <a:xfrm>
+            <a:off x="4261104" y="2377440"/>
+            <a:ext cx="1463040" cy="402336"/>
+          </a:xfrm>
+          <a:prstGeom prst="rect">
+            <a:avLst/>
+          </a:prstGeom>
+          <a:noFill/>
+          <a:ln/>
+        </p:spPr>
+        <p:txBody>
+          <a:bodyPr wrap="square" lIns="0" tIns="0" rIns="0" bIns="0" rtlCol="0" anchor="ctr"/>
+          <a:lstStyle/>
+          <a:p>
+            <a:pPr algn="ctr" indent="0" marL="0">
+              <a:buNone/>
+            </a:pPr>
+            <a:r>
+              <a:rPr lang="en-US" sz="1250" dirty="0">
+                <a:solidFill>
+                  <a:srgbClr val="E8EEF7"/>
+                </a:solidFill>
+                <a:latin typeface="Calibri" pitchFamily="34" charset="0"/>
+                <a:ea typeface="Calibri" pitchFamily="34" charset="-122"/>
+                <a:cs typeface="Calibri" pitchFamily="34" charset="-120"/>
+              </a:rPr>
+              <a:t>Em Planejamento</a:t>
+            </a:r>
+            <a:endParaRPr lang="en-US" sz="1250" dirty="0"/>
+          </a:p>
+        </p:txBody>
+      </p:sp>
+      <p:sp>
+        <p:nvSpPr>
+          <p:cNvPr id="13" name="Shape 11"/>
+          <p:cNvSpPr/>
+          <p:nvPr/>
+        </p:nvSpPr>
+        <p:spPr>
+          <a:xfrm>
+            <a:off x="1259247" y="2971800"/>
+            <a:ext cx="9734465" cy="1737360"/>
+          </a:xfrm>
+          <a:prstGeom prst="roundRect">
+            <a:avLst>
+              <a:gd name="adj" fmla="val 4737"/>
             </a:avLst>
           </a:prstGeom>
           <a:solidFill>
@@ -9672,101 +10506,44 @@
           </a:ln>
         </p:spPr>
       </p:sp>
-      <p:sp>
-        <p:nvSpPr>
-          <p:cNvPr id="17" name="Text 15"/>
-          <p:cNvSpPr/>
-          <p:nvPr/>
-        </p:nvSpPr>
-        <p:spPr>
-          <a:xfrm>
-            <a:off x="841248" y="5221224"/>
-            <a:ext cx="5449824" cy="329184"/>
-          </a:xfrm>
-          <a:prstGeom prst="rect">
-            <a:avLst/>
-          </a:prstGeom>
-          <a:noFill/>
-          <a:ln/>
-        </p:spPr>
-        <p:txBody>
-          <a:bodyPr wrap="square" lIns="0" tIns="0" rIns="0" bIns="0" rtlCol="0" anchor="ctr"/>
-          <a:lstStyle/>
-          <a:p>
-            <a:pPr indent="0" marL="0">
-              <a:buNone/>
-            </a:pPr>
-            <a:r>
-              <a:rPr lang="en-US" sz="1400" b="1" dirty="0">
-                <a:solidFill>
-                  <a:srgbClr val="22D3EE"/>
-                </a:solidFill>
-                <a:latin typeface="Calibri" pitchFamily="34" charset="0"/>
-                <a:ea typeface="Calibri" pitchFamily="34" charset="-122"/>
-                <a:cs typeface="Calibri" pitchFamily="34" charset="-120"/>
-              </a:rPr>
-              <a:t>Ninguém fica sem saber</a:t>
-            </a:r>
-            <a:endParaRPr lang="en-US" sz="1400" dirty="0"/>
-          </a:p>
-        </p:txBody>
-      </p:sp>
-      <p:sp>
-        <p:nvSpPr>
-          <p:cNvPr id="18" name="Text 16"/>
-          <p:cNvSpPr/>
-          <p:nvPr/>
-        </p:nvSpPr>
-        <p:spPr>
-          <a:xfrm>
-            <a:off x="841248" y="5550408"/>
-            <a:ext cx="5449824" cy="448056"/>
-          </a:xfrm>
-          <a:prstGeom prst="rect">
-            <a:avLst/>
-          </a:prstGeom>
-          <a:noFill/>
-          <a:ln/>
-        </p:spPr>
-        <p:txBody>
-          <a:bodyPr wrap="square" lIns="0" tIns="0" rIns="0" bIns="0" rtlCol="0" anchor="t"/>
-          <a:lstStyle/>
-          <a:p>
-            <a:pPr indent="0" marL="0">
-              <a:lnSpc>
-                <a:spcPct val="112000"/>
-              </a:lnSpc>
-              <a:buNone/>
-            </a:pPr>
-            <a:r>
-              <a:rPr lang="en-US" sz="1300" dirty="0">
-                <a:solidFill>
-                  <a:srgbClr val="E8EEF7"/>
-                </a:solidFill>
-                <a:latin typeface="Calibri" pitchFamily="34" charset="0"/>
-                <a:ea typeface="Calibri" pitchFamily="34" charset="-122"/>
-                <a:cs typeface="Calibri" pitchFamily="34" charset="-120"/>
-              </a:rPr>
-              <a:t>A cada movimentação, quem age na próxima etapa recebe e-mail automático.</a:t>
-            </a:r>
-            <a:endParaRPr lang="en-US" sz="1300" dirty="0"/>
-          </a:p>
-        </p:txBody>
-      </p:sp>
-      <p:sp>
-        <p:nvSpPr>
-          <p:cNvPr id="19" name="Shape 17"/>
-          <p:cNvSpPr/>
-          <p:nvPr/>
-        </p:nvSpPr>
-        <p:spPr>
-          <a:xfrm>
-            <a:off x="6858000" y="1737360"/>
-            <a:ext cx="4754880" cy="1260234"/>
+      <p:pic>
+        <p:nvPicPr>
+          <p:cNvPr id="14" name="Image 0" descr="/home/user/AutoriaSCS-Scrum-cursos/docs/tutoriais/img/curso-identificacao.png">    </p:cNvPr>
+          <p:cNvPicPr>
+            <a:picLocks noChangeAspect="1"/>
+          </p:cNvPicPr>
+          <p:nvPr/>
+        </p:nvPicPr>
+        <p:blipFill>
+          <a:blip r:embed="rId1"/>
+          <a:stretch>
+            <a:fillRect/>
+          </a:stretch>
+        </p:blipFill>
+        <p:spPr>
+          <a:xfrm>
+            <a:off x="1368975" y="3081528"/>
+            <a:ext cx="9515009" cy="1517904"/>
+          </a:xfrm>
+          <a:prstGeom prst="rect">
+            <a:avLst/>
+          </a:prstGeom>
+        </p:spPr>
+      </p:pic>
+      <p:sp>
+        <p:nvSpPr>
+          <p:cNvPr id="15" name="Shape 12"/>
+          <p:cNvSpPr/>
+          <p:nvPr/>
+        </p:nvSpPr>
+        <p:spPr>
+          <a:xfrm>
+            <a:off x="640080" y="4892040"/>
+            <a:ext cx="10972800" cy="1188720"/>
           </a:xfrm>
           <a:prstGeom prst="roundRect">
             <a:avLst>
-              <a:gd name="adj" fmla="val 6530"/>
+              <a:gd name="adj" fmla="val 6923"/>
             </a:avLst>
           </a:prstGeom>
           <a:solidFill>
@@ -9780,33 +10557,90 @@
           </a:ln>
         </p:spPr>
       </p:sp>
-      <p:pic>
-        <p:nvPicPr>
-          <p:cNvPr id="20" name="Image 0" descr="/home/user/AutoriaSCS-Scrum-cursos/docs/tutoriais/img/acoes-status.png">    </p:cNvPr>
-          <p:cNvPicPr>
-            <a:picLocks noChangeAspect="1"/>
-          </p:cNvPicPr>
-          <p:nvPr/>
-        </p:nvPicPr>
-        <p:blipFill>
-          <a:blip r:embed="rId1"/>
-          <a:stretch>
-            <a:fillRect/>
-          </a:stretch>
-        </p:blipFill>
-        <p:spPr>
-          <a:xfrm>
-            <a:off x="6967728" y="1847088"/>
-            <a:ext cx="4535424" cy="1040778"/>
-          </a:xfrm>
-          <a:prstGeom prst="rect">
-            <a:avLst/>
-          </a:prstGeom>
-        </p:spPr>
-      </p:pic>
-      <p:sp>
-        <p:nvSpPr>
-          <p:cNvPr id="21" name="Text 18"/>
+      <p:sp>
+        <p:nvSpPr>
+          <p:cNvPr id="16" name="Text 13"/>
+          <p:cNvSpPr/>
+          <p:nvPr/>
+        </p:nvSpPr>
+        <p:spPr>
+          <a:xfrm>
+            <a:off x="841248" y="5038344"/>
+            <a:ext cx="10570464" cy="329184"/>
+          </a:xfrm>
+          <a:prstGeom prst="rect">
+            <a:avLst/>
+          </a:prstGeom>
+          <a:noFill/>
+          <a:ln/>
+        </p:spPr>
+        <p:txBody>
+          <a:bodyPr wrap="square" lIns="0" tIns="0" rIns="0" bIns="0" rtlCol="0" anchor="ctr"/>
+          <a:lstStyle/>
+          <a:p>
+            <a:pPr indent="0" marL="0">
+              <a:buNone/>
+            </a:pPr>
+            <a:r>
+              <a:rPr lang="en-US" sz="1400" b="1" dirty="0">
+                <a:solidFill>
+                  <a:srgbClr val="22D3EE"/>
+                </a:solidFill>
+                <a:latin typeface="Calibri" pitchFamily="34" charset="0"/>
+                <a:ea typeface="Calibri" pitchFamily="34" charset="-122"/>
+                <a:cs typeface="Calibri" pitchFamily="34" charset="-120"/>
+              </a:rPr>
+              <a:t>A identificação oficial do curso</a:t>
+            </a:r>
+            <a:endParaRPr lang="en-US" sz="1400" dirty="0"/>
+          </a:p>
+        </p:txBody>
+      </p:sp>
+      <p:sp>
+        <p:nvSpPr>
+          <p:cNvPr id="17" name="Text 14"/>
+          <p:cNvSpPr/>
+          <p:nvPr/>
+        </p:nvSpPr>
+        <p:spPr>
+          <a:xfrm>
+            <a:off x="841248" y="5367528"/>
+            <a:ext cx="10570464" cy="585216"/>
+          </a:xfrm>
+          <a:prstGeom prst="rect">
+            <a:avLst/>
+          </a:prstGeom>
+          <a:noFill/>
+          <a:ln/>
+        </p:spPr>
+        <p:txBody>
+          <a:bodyPr wrap="square" lIns="0" tIns="0" rIns="0" bIns="0" rtlCol="0" anchor="t"/>
+          <a:lstStyle/>
+          <a:p>
+            <a:pPr indent="0" marL="0">
+              <a:lnSpc>
+                <a:spcPct val="112000"/>
+              </a:lnSpc>
+              <a:buNone/>
+            </a:pPr>
+            <a:r>
+              <a:rPr lang="en-US" sz="1300" dirty="0">
+                <a:solidFill>
+                  <a:srgbClr val="E8EEF7"/>
+                </a:solidFill>
+                <a:latin typeface="Calibri" pitchFamily="34" charset="0"/>
+                <a:ea typeface="Calibri" pitchFamily="34" charset="-122"/>
+                <a:cs typeface="Calibri" pitchFamily="34" charset="-120"/>
+              </a:rPr>
+              <a:t>Ao aprovar, o sistema monta o nome oficial — Nome do curso - Formador(a) - Carga horária — e envia por e-mail à MB Estúdios e à TI. É esse o nome usado na pasta do curso e no pacote de materiais.</a:t>
+            </a:r>
+            <a:endParaRPr lang="en-US" sz="1300" dirty="0"/>
+          </a:p>
+        </p:txBody>
+      </p:sp>
+      <p:sp>
+        <p:nvSpPr>
+          <p:cNvPr id="18" name="Text 15"/>
           <p:cNvSpPr/>
           <p:nvPr/>
         </p:nvSpPr>
@@ -9845,7 +10679,7 @@
       </p:sp>
       <p:sp>
         <p:nvSpPr>
-          <p:cNvPr id="22" name="Text 19"/>
+          <p:cNvPr id="19" name="Text 16"/>
           <p:cNvSpPr/>
           <p:nvPr/>
         </p:nvSpPr>
@@ -9876,7 +10710,7 @@
                 <a:ea typeface="Calibri" pitchFamily="34" charset="-122"/>
                 <a:cs typeface="Calibri" pitchFamily="34" charset="-120"/>
               </a:rPr>
-              <a:t>7 / 13</a:t>
+              <a:t>7 / 14</a:t>
             </a:r>
             <a:endParaRPr lang="en-US" sz="950" dirty="0"/>
           </a:p>
@@ -9986,7 +10820,7 @@
                 <a:ea typeface="Calibri" pitchFamily="34" charset="-122"/>
                 <a:cs typeface="Calibri" pitchFamily="34" charset="-120"/>
               </a:rPr>
-              <a:t>4.1 As suas fases, na ordem</a:t>
+              <a:t>5. As suas fases, na ordem</a:t>
             </a:r>
             <a:endParaRPr lang="en-US" sz="3000" dirty="0"/>
           </a:p>
@@ -10040,7 +10874,7 @@
         <p:spPr>
           <a:xfrm>
             <a:off x="640080" y="1938528"/>
-            <a:ext cx="1382573" cy="402336"/>
+            <a:ext cx="1543507" cy="402336"/>
           </a:xfrm>
           <a:prstGeom prst="roundRect">
             <a:avLst>
@@ -10067,7 +10901,7 @@
         <p:spPr>
           <a:xfrm>
             <a:off x="640080" y="1938528"/>
-            <a:ext cx="1382573" cy="402336"/>
+            <a:ext cx="1543507" cy="402336"/>
           </a:xfrm>
           <a:prstGeom prst="rect">
             <a:avLst/>
@@ -10091,7 +10925,7 @@
                 <a:ea typeface="Calibri" pitchFamily="34" charset="-122"/>
                 <a:cs typeface="Calibri" pitchFamily="34" charset="-120"/>
               </a:rPr>
-              <a:t>Curso Proposto</a:t>
+              <a:t>Projeto Aprovado</a:t>
             </a:r>
             <a:endParaRPr lang="en-US" sz="1250" dirty="0"/>
           </a:p>
@@ -10105,7 +10939,7 @@
         </p:nvSpPr>
         <p:spPr>
           <a:xfrm>
-            <a:off x="2059229" y="1938528"/>
+            <a:off x="2220163" y="1938528"/>
             <a:ext cx="274320" cy="402336"/>
           </a:xfrm>
           <a:prstGeom prst="rect">
@@ -10144,7 +10978,7 @@
         </p:nvSpPr>
         <p:spPr>
           <a:xfrm>
-            <a:off x="2370125" y="1938528"/>
+            <a:off x="2531059" y="1938528"/>
             <a:ext cx="1463040" cy="402336"/>
           </a:xfrm>
           <a:prstGeom prst="roundRect">
@@ -10171,7 +11005,7 @@
         </p:nvSpPr>
         <p:spPr>
           <a:xfrm>
-            <a:off x="2370125" y="1938528"/>
+            <a:off x="2531059" y="1938528"/>
             <a:ext cx="1463040" cy="402336"/>
           </a:xfrm>
           <a:prstGeom prst="rect">
@@ -10210,7 +11044,7 @@
         </p:nvSpPr>
         <p:spPr>
           <a:xfrm>
-            <a:off x="3869741" y="1938528"/>
+            <a:off x="4030675" y="1938528"/>
             <a:ext cx="274320" cy="402336"/>
           </a:xfrm>
           <a:prstGeom prst="rect">
@@ -10249,7 +11083,7 @@
         </p:nvSpPr>
         <p:spPr>
           <a:xfrm>
-            <a:off x="4180637" y="1938528"/>
+            <a:off x="4341571" y="1938528"/>
             <a:ext cx="1704442" cy="402336"/>
           </a:xfrm>
           <a:prstGeom prst="roundRect">
@@ -10276,7 +11110,7 @@
         </p:nvSpPr>
         <p:spPr>
           <a:xfrm>
-            <a:off x="4180637" y="1938528"/>
+            <a:off x="4341571" y="1938528"/>
             <a:ext cx="1704442" cy="402336"/>
           </a:xfrm>
           <a:prstGeom prst="rect">
@@ -10315,7 +11149,7 @@
         </p:nvSpPr>
         <p:spPr>
           <a:xfrm>
-            <a:off x="5921654" y="1938528"/>
+            <a:off x="6082589" y="1938528"/>
             <a:ext cx="274320" cy="402336"/>
           </a:xfrm>
           <a:prstGeom prst="rect">
@@ -10354,7 +11188,7 @@
         </p:nvSpPr>
         <p:spPr>
           <a:xfrm>
-            <a:off x="6232550" y="1938528"/>
+            <a:off x="6393485" y="1938528"/>
             <a:ext cx="1784909" cy="402336"/>
           </a:xfrm>
           <a:prstGeom prst="roundRect">
@@ -10381,7 +11215,7 @@
         </p:nvSpPr>
         <p:spPr>
           <a:xfrm>
-            <a:off x="6232550" y="1938528"/>
+            <a:off x="6393485" y="1938528"/>
             <a:ext cx="1784909" cy="402336"/>
           </a:xfrm>
           <a:prstGeom prst="rect">
@@ -10459,7 +11293,7 @@
                 <a:ea typeface="Calibri" pitchFamily="34" charset="-122"/>
                 <a:cs typeface="Calibri" pitchFamily="34" charset="-120"/>
               </a:rPr>
-              <a:t>envie todos os materiais (slides 10 a 12).</a:t>
+              <a:t>envie todos os materiais (slides 9 e 10).</a:t>
             </a:r>
             <a:endParaRPr lang="en-US" sz="1250" dirty="0"/>
           </a:p>
@@ -11128,7 +11962,7 @@
                 <a:ea typeface="Calibri" pitchFamily="34" charset="-122"/>
                 <a:cs typeface="Calibri" pitchFamily="34" charset="-120"/>
               </a:rPr>
-              <a:t>Ao marcar "Validado" você confirma que conferiu o curso montado e está tudo certo — a TI então agenda a publicação.</a:t>
+              <a:t>Cada movimentação avisa por e-mail quem age na etapa seguinte — você não precisa avisar ninguém.</a:t>
             </a:r>
             <a:endParaRPr lang="en-US" sz="1250" dirty="0"/>
           </a:p>
@@ -11206,7 +12040,7 @@
                 <a:ea typeface="Calibri" pitchFamily="34" charset="-122"/>
                 <a:cs typeface="Calibri" pitchFamily="34" charset="-120"/>
               </a:rPr>
-              <a:t>8 / 13</a:t>
+              <a:t>8 / 14</a:t>
             </a:r>
             <a:endParaRPr lang="en-US" sz="950" dirty="0"/>
           </a:p>
@@ -11253,7 +12087,7 @@
         <p:spPr>
           <a:xfrm>
             <a:off x="548640" y="320040"/>
-            <a:ext cx="5486400" cy="292608"/>
+            <a:ext cx="7315200" cy="292608"/>
           </a:xfrm>
           <a:prstGeom prst="rect">
             <a:avLst/>
@@ -11277,7 +12111,7 @@
                 <a:ea typeface="Calibri" pitchFamily="34" charset="-122"/>
                 <a:cs typeface="Calibri" pitchFamily="34" charset="-120"/>
               </a:rPr>
-              <a:t>PASSO A PASSO</a:t>
+              <a:t>A PARTE MAIS IMPORTANTE</a:t>
             </a:r>
             <a:endParaRPr lang="en-US" sz="1200" dirty="0"/>
           </a:p>
@@ -11316,7 +12150,7 @@
                 <a:ea typeface="Calibri" pitchFamily="34" charset="-122"/>
                 <a:cs typeface="Calibri" pitchFamily="34" charset="-120"/>
               </a:rPr>
-              <a:t>5. Checklist e apontamentos</a:t>
+              <a:t>6. Enviar os materiais do curso</a:t>
             </a:r>
             <a:endParaRPr lang="en-US" sz="3000" dirty="0"/>
           </a:p>
@@ -11330,12 +12164,516 @@
         </p:nvSpPr>
         <p:spPr>
           <a:xfrm>
-            <a:off x="1274316" y="1554480"/>
-            <a:ext cx="4309368" cy="4023360"/>
+            <a:off x="640080" y="1737360"/>
+            <a:ext cx="310896" cy="310896"/>
+          </a:xfrm>
+          <a:prstGeom prst="ellipse">
+            <a:avLst/>
+          </a:prstGeom>
+          <a:solidFill>
+            <a:srgbClr val="22D3EE"/>
+          </a:solidFill>
+          <a:ln/>
+        </p:spPr>
+      </p:sp>
+      <p:sp>
+        <p:nvSpPr>
+          <p:cNvPr id="5" name="Text 3"/>
+          <p:cNvSpPr/>
+          <p:nvPr/>
+        </p:nvSpPr>
+        <p:spPr>
+          <a:xfrm>
+            <a:off x="640080" y="1737360"/>
+            <a:ext cx="310896" cy="310896"/>
+          </a:xfrm>
+          <a:prstGeom prst="rect">
+            <a:avLst/>
+          </a:prstGeom>
+          <a:noFill/>
+          <a:ln/>
+        </p:spPr>
+        <p:txBody>
+          <a:bodyPr wrap="square" lIns="0" tIns="0" rIns="0" bIns="0" rtlCol="0" anchor="ctr"/>
+          <a:lstStyle/>
+          <a:p>
+            <a:pPr algn="ctr" indent="0" marL="0">
+              <a:buNone/>
+            </a:pPr>
+            <a:r>
+              <a:rPr lang="en-US" sz="1300" b="1" dirty="0">
+                <a:solidFill>
+                  <a:srgbClr val="07101F"/>
+                </a:solidFill>
+                <a:latin typeface="Calibri" pitchFamily="34" charset="0"/>
+                <a:ea typeface="Calibri" pitchFamily="34" charset="-122"/>
+                <a:cs typeface="Calibri" pitchFamily="34" charset="-120"/>
+              </a:rPr>
+              <a:t>1</a:t>
+            </a:r>
+            <a:endParaRPr lang="en-US" sz="1300" dirty="0"/>
+          </a:p>
+        </p:txBody>
+      </p:sp>
+      <p:sp>
+        <p:nvSpPr>
+          <p:cNvPr id="6" name="Text 4"/>
+          <p:cNvSpPr/>
+          <p:nvPr/>
+        </p:nvSpPr>
+        <p:spPr>
+          <a:xfrm>
+            <a:off x="1097280" y="1691640"/>
+            <a:ext cx="5303520" cy="658368"/>
+          </a:xfrm>
+          <a:prstGeom prst="rect">
+            <a:avLst/>
+          </a:prstGeom>
+          <a:noFill/>
+          <a:ln/>
+        </p:spPr>
+        <p:txBody>
+          <a:bodyPr wrap="square" lIns="0" tIns="0" rIns="0" bIns="0" rtlCol="0" anchor="t"/>
+          <a:lstStyle/>
+          <a:p>
+            <a:pPr indent="0" marL="0">
+              <a:buNone/>
+            </a:pPr>
+            <a:r>
+              <a:rPr lang="en-US" sz="1400" dirty="0">
+                <a:solidFill>
+                  <a:srgbClr val="E8EEF7"/>
+                </a:solidFill>
+                <a:latin typeface="Calibri" pitchFamily="34" charset="0"/>
+                <a:ea typeface="Calibri" pitchFamily="34" charset="-122"/>
+                <a:cs typeface="Calibri" pitchFamily="34" charset="-120"/>
+              </a:rPr>
+              <a:t>Escolha o </a:t>
+            </a:r>
+            <a:pPr indent="0" marL="0">
+              <a:buNone/>
+            </a:pPr>
+            <a:r>
+              <a:rPr lang="en-US" sz="1400" b="1" dirty="0">
+                <a:solidFill>
+                  <a:srgbClr val="22D3EE"/>
+                </a:solidFill>
+                <a:latin typeface="Calibri" pitchFamily="34" charset="0"/>
+                <a:ea typeface="Calibri" pitchFamily="34" charset="-122"/>
+                <a:cs typeface="Calibri" pitchFamily="34" charset="-120"/>
+              </a:rPr>
+              <a:t>Módulo</a:t>
+            </a:r>
+            <a:pPr indent="0" marL="0">
+              <a:buNone/>
+            </a:pPr>
+            <a:r>
+              <a:rPr lang="en-US" sz="1400" dirty="0">
+                <a:solidFill>
+                  <a:srgbClr val="E8EEF7"/>
+                </a:solidFill>
+                <a:latin typeface="Calibri" pitchFamily="34" charset="0"/>
+                <a:ea typeface="Calibri" pitchFamily="34" charset="-122"/>
+                <a:cs typeface="Calibri" pitchFamily="34" charset="-120"/>
+              </a:rPr>
+              <a:t> — Geral (curso inteiro) ou Módulo 1 a 8;</a:t>
+            </a:r>
+            <a:endParaRPr lang="en-US" sz="1400" dirty="0"/>
+          </a:p>
+        </p:txBody>
+      </p:sp>
+      <p:sp>
+        <p:nvSpPr>
+          <p:cNvPr id="7" name="Shape 5"/>
+          <p:cNvSpPr/>
+          <p:nvPr/>
+        </p:nvSpPr>
+        <p:spPr>
+          <a:xfrm>
+            <a:off x="640080" y="2395728"/>
+            <a:ext cx="310896" cy="310896"/>
+          </a:xfrm>
+          <a:prstGeom prst="ellipse">
+            <a:avLst/>
+          </a:prstGeom>
+          <a:solidFill>
+            <a:srgbClr val="22D3EE"/>
+          </a:solidFill>
+          <a:ln/>
+        </p:spPr>
+      </p:sp>
+      <p:sp>
+        <p:nvSpPr>
+          <p:cNvPr id="8" name="Text 6"/>
+          <p:cNvSpPr/>
+          <p:nvPr/>
+        </p:nvSpPr>
+        <p:spPr>
+          <a:xfrm>
+            <a:off x="640080" y="2395728"/>
+            <a:ext cx="310896" cy="310896"/>
+          </a:xfrm>
+          <a:prstGeom prst="rect">
+            <a:avLst/>
+          </a:prstGeom>
+          <a:noFill/>
+          <a:ln/>
+        </p:spPr>
+        <p:txBody>
+          <a:bodyPr wrap="square" lIns="0" tIns="0" rIns="0" bIns="0" rtlCol="0" anchor="ctr"/>
+          <a:lstStyle/>
+          <a:p>
+            <a:pPr algn="ctr" indent="0" marL="0">
+              <a:buNone/>
+            </a:pPr>
+            <a:r>
+              <a:rPr lang="en-US" sz="1300" b="1" dirty="0">
+                <a:solidFill>
+                  <a:srgbClr val="07101F"/>
+                </a:solidFill>
+                <a:latin typeface="Calibri" pitchFamily="34" charset="0"/>
+                <a:ea typeface="Calibri" pitchFamily="34" charset="-122"/>
+                <a:cs typeface="Calibri" pitchFamily="34" charset="-120"/>
+              </a:rPr>
+              <a:t>2</a:t>
+            </a:r>
+            <a:endParaRPr lang="en-US" sz="1300" dirty="0"/>
+          </a:p>
+        </p:txBody>
+      </p:sp>
+      <p:sp>
+        <p:nvSpPr>
+          <p:cNvPr id="9" name="Text 7"/>
+          <p:cNvSpPr/>
+          <p:nvPr/>
+        </p:nvSpPr>
+        <p:spPr>
+          <a:xfrm>
+            <a:off x="1097280" y="2350008"/>
+            <a:ext cx="5303520" cy="658368"/>
+          </a:xfrm>
+          <a:prstGeom prst="rect">
+            <a:avLst/>
+          </a:prstGeom>
+          <a:noFill/>
+          <a:ln/>
+        </p:spPr>
+        <p:txBody>
+          <a:bodyPr wrap="square" lIns="0" tIns="0" rIns="0" bIns="0" rtlCol="0" anchor="t"/>
+          <a:lstStyle/>
+          <a:p>
+            <a:pPr indent="0" marL="0">
+              <a:buNone/>
+            </a:pPr>
+            <a:r>
+              <a:rPr lang="en-US" sz="1400" dirty="0">
+                <a:solidFill>
+                  <a:srgbClr val="E8EEF7"/>
+                </a:solidFill>
+                <a:latin typeface="Calibri" pitchFamily="34" charset="0"/>
+                <a:ea typeface="Calibri" pitchFamily="34" charset="-122"/>
+                <a:cs typeface="Calibri" pitchFamily="34" charset="-120"/>
+              </a:rPr>
+              <a:t>Escolha a </a:t>
+            </a:r>
+            <a:pPr indent="0" marL="0">
+              <a:buNone/>
+            </a:pPr>
+            <a:r>
+              <a:rPr lang="en-US" sz="1400" b="1" dirty="0">
+                <a:solidFill>
+                  <a:srgbClr val="22D3EE"/>
+                </a:solidFill>
+                <a:latin typeface="Calibri" pitchFamily="34" charset="0"/>
+                <a:ea typeface="Calibri" pitchFamily="34" charset="-122"/>
+                <a:cs typeface="Calibri" pitchFamily="34" charset="-120"/>
+              </a:rPr>
+              <a:t>Categoria</a:t>
+            </a:r>
+            <a:pPr indent="0" marL="0">
+              <a:buNone/>
+            </a:pPr>
+            <a:r>
+              <a:rPr lang="en-US" sz="1400" dirty="0">
+                <a:solidFill>
+                  <a:srgbClr val="E8EEF7"/>
+                </a:solidFill>
+                <a:latin typeface="Calibri" pitchFamily="34" charset="0"/>
+                <a:ea typeface="Calibri" pitchFamily="34" charset="-122"/>
+                <a:cs typeface="Calibri" pitchFamily="34" charset="-120"/>
+              </a:rPr>
+              <a:t> — só a próxima etapa da sequência está liberada;</a:t>
+            </a:r>
+            <a:endParaRPr lang="en-US" sz="1400" dirty="0"/>
+          </a:p>
+        </p:txBody>
+      </p:sp>
+      <p:sp>
+        <p:nvSpPr>
+          <p:cNvPr id="10" name="Shape 8"/>
+          <p:cNvSpPr/>
+          <p:nvPr/>
+        </p:nvSpPr>
+        <p:spPr>
+          <a:xfrm>
+            <a:off x="640080" y="3054096"/>
+            <a:ext cx="310896" cy="310896"/>
+          </a:xfrm>
+          <a:prstGeom prst="ellipse">
+            <a:avLst/>
+          </a:prstGeom>
+          <a:solidFill>
+            <a:srgbClr val="22D3EE"/>
+          </a:solidFill>
+          <a:ln/>
+        </p:spPr>
+      </p:sp>
+      <p:sp>
+        <p:nvSpPr>
+          <p:cNvPr id="11" name="Text 9"/>
+          <p:cNvSpPr/>
+          <p:nvPr/>
+        </p:nvSpPr>
+        <p:spPr>
+          <a:xfrm>
+            <a:off x="640080" y="3054096"/>
+            <a:ext cx="310896" cy="310896"/>
+          </a:xfrm>
+          <a:prstGeom prst="rect">
+            <a:avLst/>
+          </a:prstGeom>
+          <a:noFill/>
+          <a:ln/>
+        </p:spPr>
+        <p:txBody>
+          <a:bodyPr wrap="square" lIns="0" tIns="0" rIns="0" bIns="0" rtlCol="0" anchor="ctr"/>
+          <a:lstStyle/>
+          <a:p>
+            <a:pPr algn="ctr" indent="0" marL="0">
+              <a:buNone/>
+            </a:pPr>
+            <a:r>
+              <a:rPr lang="en-US" sz="1300" b="1" dirty="0">
+                <a:solidFill>
+                  <a:srgbClr val="07101F"/>
+                </a:solidFill>
+                <a:latin typeface="Calibri" pitchFamily="34" charset="0"/>
+                <a:ea typeface="Calibri" pitchFamily="34" charset="-122"/>
+                <a:cs typeface="Calibri" pitchFamily="34" charset="-120"/>
+              </a:rPr>
+              <a:t>3</a:t>
+            </a:r>
+            <a:endParaRPr lang="en-US" sz="1300" dirty="0"/>
+          </a:p>
+        </p:txBody>
+      </p:sp>
+      <p:sp>
+        <p:nvSpPr>
+          <p:cNvPr id="12" name="Text 10"/>
+          <p:cNvSpPr/>
+          <p:nvPr/>
+        </p:nvSpPr>
+        <p:spPr>
+          <a:xfrm>
+            <a:off x="1097280" y="3008376"/>
+            <a:ext cx="5303520" cy="658368"/>
+          </a:xfrm>
+          <a:prstGeom prst="rect">
+            <a:avLst/>
+          </a:prstGeom>
+          <a:noFill/>
+          <a:ln/>
+        </p:spPr>
+        <p:txBody>
+          <a:bodyPr wrap="square" lIns="0" tIns="0" rIns="0" bIns="0" rtlCol="0" anchor="t"/>
+          <a:lstStyle/>
+          <a:p>
+            <a:pPr indent="0" marL="0">
+              <a:buNone/>
+            </a:pPr>
+            <a:r>
+              <a:rPr lang="en-US" sz="1400" dirty="0">
+                <a:solidFill>
+                  <a:srgbClr val="E8EEF7"/>
+                </a:solidFill>
+                <a:latin typeface="Calibri" pitchFamily="34" charset="0"/>
+                <a:ea typeface="Calibri" pitchFamily="34" charset="-122"/>
+                <a:cs typeface="Calibri" pitchFamily="34" charset="-120"/>
+              </a:rPr>
+              <a:t>Clique em </a:t>
+            </a:r>
+            <a:pPr indent="0" marL="0">
+              <a:buNone/>
+            </a:pPr>
+            <a:r>
+              <a:rPr lang="en-US" sz="1400" b="1" dirty="0">
+                <a:solidFill>
+                  <a:srgbClr val="E8EEF7"/>
+                </a:solidFill>
+                <a:latin typeface="Calibri" pitchFamily="34" charset="0"/>
+                <a:ea typeface="Calibri" pitchFamily="34" charset="-122"/>
+                <a:cs typeface="Calibri" pitchFamily="34" charset="-120"/>
+              </a:rPr>
+              <a:t>Escolher arquivo</a:t>
+            </a:r>
+            <a:pPr indent="0" marL="0">
+              <a:buNone/>
+            </a:pPr>
+            <a:r>
+              <a:rPr lang="en-US" sz="1400" dirty="0">
+                <a:solidFill>
+                  <a:srgbClr val="E8EEF7"/>
+                </a:solidFill>
+                <a:latin typeface="Calibri" pitchFamily="34" charset="0"/>
+                <a:ea typeface="Calibri" pitchFamily="34" charset="-122"/>
+                <a:cs typeface="Calibri" pitchFamily="34" charset="-120"/>
+              </a:rPr>
+              <a:t> (até 25MB — PDF, DOCX, PPTX, MP4, ZIP);</a:t>
+            </a:r>
+            <a:endParaRPr lang="en-US" sz="1400" dirty="0"/>
+          </a:p>
+        </p:txBody>
+      </p:sp>
+      <p:sp>
+        <p:nvSpPr>
+          <p:cNvPr id="13" name="Shape 11"/>
+          <p:cNvSpPr/>
+          <p:nvPr/>
+        </p:nvSpPr>
+        <p:spPr>
+          <a:xfrm>
+            <a:off x="640080" y="3712464"/>
+            <a:ext cx="310896" cy="310896"/>
+          </a:xfrm>
+          <a:prstGeom prst="ellipse">
+            <a:avLst/>
+          </a:prstGeom>
+          <a:solidFill>
+            <a:srgbClr val="22D3EE"/>
+          </a:solidFill>
+          <a:ln/>
+        </p:spPr>
+      </p:sp>
+      <p:sp>
+        <p:nvSpPr>
+          <p:cNvPr id="14" name="Text 12"/>
+          <p:cNvSpPr/>
+          <p:nvPr/>
+        </p:nvSpPr>
+        <p:spPr>
+          <a:xfrm>
+            <a:off x="640080" y="3712464"/>
+            <a:ext cx="310896" cy="310896"/>
+          </a:xfrm>
+          <a:prstGeom prst="rect">
+            <a:avLst/>
+          </a:prstGeom>
+          <a:noFill/>
+          <a:ln/>
+        </p:spPr>
+        <p:txBody>
+          <a:bodyPr wrap="square" lIns="0" tIns="0" rIns="0" bIns="0" rtlCol="0" anchor="ctr"/>
+          <a:lstStyle/>
+          <a:p>
+            <a:pPr algn="ctr" indent="0" marL="0">
+              <a:buNone/>
+            </a:pPr>
+            <a:r>
+              <a:rPr lang="en-US" sz="1300" b="1" dirty="0">
+                <a:solidFill>
+                  <a:srgbClr val="07101F"/>
+                </a:solidFill>
+                <a:latin typeface="Calibri" pitchFamily="34" charset="0"/>
+                <a:ea typeface="Calibri" pitchFamily="34" charset="-122"/>
+                <a:cs typeface="Calibri" pitchFamily="34" charset="-120"/>
+              </a:rPr>
+              <a:t>4</a:t>
+            </a:r>
+            <a:endParaRPr lang="en-US" sz="1300" dirty="0"/>
+          </a:p>
+        </p:txBody>
+      </p:sp>
+      <p:sp>
+        <p:nvSpPr>
+          <p:cNvPr id="15" name="Text 13"/>
+          <p:cNvSpPr/>
+          <p:nvPr/>
+        </p:nvSpPr>
+        <p:spPr>
+          <a:xfrm>
+            <a:off x="1097280" y="3666744"/>
+            <a:ext cx="5303520" cy="658368"/>
+          </a:xfrm>
+          <a:prstGeom prst="rect">
+            <a:avLst/>
+          </a:prstGeom>
+          <a:noFill/>
+          <a:ln/>
+        </p:spPr>
+        <p:txBody>
+          <a:bodyPr wrap="square" lIns="0" tIns="0" rIns="0" bIns="0" rtlCol="0" anchor="t"/>
+          <a:lstStyle/>
+          <a:p>
+            <a:pPr indent="0" marL="0">
+              <a:buNone/>
+            </a:pPr>
+            <a:r>
+              <a:rPr lang="en-US" sz="1400" dirty="0">
+                <a:solidFill>
+                  <a:srgbClr val="E8EEF7"/>
+                </a:solidFill>
+                <a:latin typeface="Calibri" pitchFamily="34" charset="0"/>
+                <a:ea typeface="Calibri" pitchFamily="34" charset="-122"/>
+                <a:cs typeface="Calibri" pitchFamily="34" charset="-120"/>
+              </a:rPr>
+              <a:t>Clique em </a:t>
+            </a:r>
+            <a:pPr indent="0" marL="0">
+              <a:buNone/>
+            </a:pPr>
+            <a:r>
+              <a:rPr lang="en-US" sz="1400" b="1" dirty="0">
+                <a:solidFill>
+                  <a:srgbClr val="22D3EE"/>
+                </a:solidFill>
+                <a:latin typeface="Calibri" pitchFamily="34" charset="0"/>
+                <a:ea typeface="Calibri" pitchFamily="34" charset="-122"/>
+                <a:cs typeface="Calibri" pitchFamily="34" charset="-120"/>
+              </a:rPr>
+              <a:t>Enviar</a:t>
+            </a:r>
+            <a:pPr indent="0" marL="0">
+              <a:buNone/>
+            </a:pPr>
+            <a:r>
+              <a:rPr lang="en-US" sz="1400" dirty="0">
+                <a:solidFill>
+                  <a:srgbClr val="E8EEF7"/>
+                </a:solidFill>
+                <a:latin typeface="Calibri" pitchFamily="34" charset="0"/>
+                <a:ea typeface="Calibri" pitchFamily="34" charset="-122"/>
+                <a:cs typeface="Calibri" pitchFamily="34" charset="-120"/>
+              </a:rPr>
+              <a:t>. A próxima etapa é liberada.</a:t>
+            </a:r>
+            <a:endParaRPr lang="en-US" sz="1400" dirty="0"/>
+          </a:p>
+        </p:txBody>
+      </p:sp>
+      <p:sp>
+        <p:nvSpPr>
+          <p:cNvPr id="16" name="Shape 14"/>
+          <p:cNvSpPr/>
+          <p:nvPr/>
+        </p:nvSpPr>
+        <p:spPr>
+          <a:xfrm>
+            <a:off x="6766560" y="1828800"/>
+            <a:ext cx="4846320" cy="1828800"/>
           </a:xfrm>
           <a:prstGeom prst="roundRect">
             <a:avLst>
-              <a:gd name="adj" fmla="val 2045"/>
+              <a:gd name="adj" fmla="val 4500"/>
             </a:avLst>
           </a:prstGeom>
           <a:solidFill>
@@ -11349,56 +12687,32 @@
           </a:ln>
         </p:spPr>
       </p:sp>
-      <p:pic>
-        <p:nvPicPr>
-          <p:cNvPr id="5" name="Image 0" descr="/home/user/AutoriaSCS-Scrum-cursos/docs/tutoriais/img/checklist.png">    </p:cNvPr>
-          <p:cNvPicPr>
-            <a:picLocks noChangeAspect="1"/>
-          </p:cNvPicPr>
-          <p:nvPr/>
-        </p:nvPicPr>
-        <p:blipFill>
-          <a:blip r:embed="rId1"/>
-          <a:stretch>
-            <a:fillRect/>
-          </a:stretch>
-        </p:blipFill>
-        <p:spPr>
-          <a:xfrm>
-            <a:off x="1384044" y="1664208"/>
-            <a:ext cx="4089912" cy="3803904"/>
-          </a:xfrm>
-          <a:prstGeom prst="rect">
-            <a:avLst/>
-          </a:prstGeom>
-        </p:spPr>
-      </p:pic>
-      <p:sp>
-        <p:nvSpPr>
-          <p:cNvPr id="6" name="Text 3"/>
-          <p:cNvSpPr/>
-          <p:nvPr/>
-        </p:nvSpPr>
-        <p:spPr>
-          <a:xfrm>
-            <a:off x="640080" y="5715000"/>
-            <a:ext cx="5577840" cy="548640"/>
-          </a:xfrm>
-          <a:prstGeom prst="rect">
-            <a:avLst/>
-          </a:prstGeom>
-          <a:noFill/>
-          <a:ln/>
-        </p:spPr>
-        <p:txBody>
-          <a:bodyPr wrap="square" lIns="0" tIns="0" rIns="0" bIns="0" rtlCol="0" anchor="ctr"/>
-          <a:lstStyle/>
-          <a:p>
-            <a:pPr indent="0" marL="0">
-              <a:buNone/>
-            </a:pPr>
-            <a:r>
-              <a:rPr lang="en-US" sz="1250" b="1" dirty="0">
+      <p:sp>
+        <p:nvSpPr>
+          <p:cNvPr id="17" name="Text 15"/>
+          <p:cNvSpPr/>
+          <p:nvPr/>
+        </p:nvSpPr>
+        <p:spPr>
+          <a:xfrm>
+            <a:off x="6967728" y="1975104"/>
+            <a:ext cx="4443984" cy="329184"/>
+          </a:xfrm>
+          <a:prstGeom prst="rect">
+            <a:avLst/>
+          </a:prstGeom>
+          <a:noFill/>
+          <a:ln/>
+        </p:spPr>
+        <p:txBody>
+          <a:bodyPr wrap="square" lIns="0" tIns="0" rIns="0" bIns="0" rtlCol="0" anchor="ctr"/>
+          <a:lstStyle/>
+          <a:p>
+            <a:pPr indent="0" marL="0">
+              <a:buNone/>
+            </a:pPr>
+            <a:r>
+              <a:rPr lang="en-US" sz="1400" b="1" dirty="0">
                 <a:solidFill>
                   <a:srgbClr val="22D3EE"/>
                 </a:solidFill>
@@ -11406,9 +12720,37 @@
                 <a:ea typeface="Calibri" pitchFamily="34" charset="-122"/>
                 <a:cs typeface="Calibri" pitchFamily="34" charset="-120"/>
               </a:rPr>
-              <a:t>Checklist: </a:t>
-            </a:r>
-            <a:pPr indent="0" marL="0">
+              <a:t>Por que existe uma ordem?</a:t>
+            </a:r>
+            <a:endParaRPr lang="en-US" sz="1400" dirty="0"/>
+          </a:p>
+        </p:txBody>
+      </p:sp>
+      <p:sp>
+        <p:nvSpPr>
+          <p:cNvPr id="18" name="Text 16"/>
+          <p:cNvSpPr/>
+          <p:nvPr/>
+        </p:nvSpPr>
+        <p:spPr>
+          <a:xfrm>
+            <a:off x="6967728" y="2304288"/>
+            <a:ext cx="4443984" cy="1225296"/>
+          </a:xfrm>
+          <a:prstGeom prst="rect">
+            <a:avLst/>
+          </a:prstGeom>
+          <a:noFill/>
+          <a:ln/>
+        </p:spPr>
+        <p:txBody>
+          <a:bodyPr wrap="square" lIns="0" tIns="0" rIns="0" bIns="0" rtlCol="0" anchor="t"/>
+          <a:lstStyle/>
+          <a:p>
+            <a:pPr indent="0" marL="0">
+              <a:lnSpc>
+                <a:spcPct val="112000"/>
+              </a:lnSpc>
               <a:buNone/>
             </a:pPr>
             <a:r>
@@ -11420,7 +12762,7 @@
                 <a:ea typeface="Calibri" pitchFamily="34" charset="-122"/>
                 <a:cs typeface="Calibri" pitchFamily="34" charset="-120"/>
               </a:rPr>
-              <a:t>marque cada item concluído e clique em Salvar Checklist. É o seu mapa do que falta.</a:t>
+              <a:t>É a sequência em que a MB Estúdios monta o curso na plataforma. O sistema garante que nada chegue faltando ou fora de lugar.</a:t>
             </a:r>
             <a:endParaRPr lang="en-US" sz="1250" dirty="0"/>
           </a:p>
@@ -11428,18 +12770,18 @@
       </p:sp>
       <p:sp>
         <p:nvSpPr>
-          <p:cNvPr id="7" name="Shape 4"/>
-          <p:cNvSpPr/>
-          <p:nvPr/>
-        </p:nvSpPr>
-        <p:spPr>
-          <a:xfrm>
-            <a:off x="6492240" y="1554480"/>
-            <a:ext cx="5120640" cy="1119586"/>
+          <p:cNvPr id="19" name="Shape 17"/>
+          <p:cNvSpPr/>
+          <p:nvPr/>
+        </p:nvSpPr>
+        <p:spPr>
+          <a:xfrm>
+            <a:off x="640080" y="4343400"/>
+            <a:ext cx="10972800" cy="1696352"/>
           </a:xfrm>
           <a:prstGeom prst="roundRect">
             <a:avLst>
-              <a:gd name="adj" fmla="val 7351"/>
+              <a:gd name="adj" fmla="val 4851"/>
             </a:avLst>
           </a:prstGeom>
           <a:solidFill>
@@ -11455,22 +12797,22 @@
       </p:sp>
       <p:pic>
         <p:nvPicPr>
-          <p:cNvPr id="8" name="Image 1" descr="/home/user/AutoriaSCS-Scrum-cursos/docs/tutoriais/img/apontamentos-lista.png">    </p:cNvPr>
+          <p:cNvPr id="20" name="Image 0" descr="/home/user/AutoriaSCS-Scrum-cursos/docs/tutoriais/img/upload-form.png">    </p:cNvPr>
           <p:cNvPicPr>
             <a:picLocks noChangeAspect="1"/>
           </p:cNvPicPr>
           <p:nvPr/>
         </p:nvPicPr>
         <p:blipFill>
-          <a:blip r:embed="rId2"/>
+          <a:blip r:embed="rId1"/>
           <a:stretch>
             <a:fillRect/>
           </a:stretch>
         </p:blipFill>
         <p:spPr>
           <a:xfrm>
-            <a:off x="6601968" y="1664208"/>
-            <a:ext cx="4901184" cy="900130"/>
+            <a:off x="749808" y="4453128"/>
+            <a:ext cx="10753344" cy="1476896"/>
           </a:xfrm>
           <a:prstGeom prst="rect">
             <a:avLst/>
@@ -11479,66 +12821,7 @@
       </p:pic>
       <p:sp>
         <p:nvSpPr>
-          <p:cNvPr id="9" name="Text 5"/>
-          <p:cNvSpPr/>
-          <p:nvPr/>
-        </p:nvSpPr>
-        <p:spPr>
-          <a:xfrm>
-            <a:off x="6492240" y="4709160"/>
-            <a:ext cx="5120640" cy="1371600"/>
-          </a:xfrm>
-          <a:prstGeom prst="rect">
-            <a:avLst/>
-          </a:prstGeom>
-          <a:noFill/>
-          <a:ln/>
-        </p:spPr>
-        <p:txBody>
-          <a:bodyPr wrap="square" lIns="0" tIns="0" rIns="0" bIns="0" rtlCol="0" anchor="ctr"/>
-          <a:lstStyle/>
-          <a:p>
-            <a:pPr indent="0" marL="0">
-              <a:lnSpc>
-                <a:spcPct val="112000"/>
-              </a:lnSpc>
-              <a:buNone/>
-            </a:pPr>
-            <a:r>
-              <a:rPr lang="en-US" sz="1250" b="1" dirty="0">
-                <a:solidFill>
-                  <a:srgbClr val="22D3EE"/>
-                </a:solidFill>
-                <a:latin typeface="Calibri" pitchFamily="34" charset="0"/>
-                <a:ea typeface="Calibri" pitchFamily="34" charset="-122"/>
-                <a:cs typeface="Calibri" pitchFamily="34" charset="-120"/>
-              </a:rPr>
-              <a:t>Apontamentos: </a:t>
-            </a:r>
-            <a:pPr indent="0" marL="0">
-              <a:lnSpc>
-                <a:spcPct val="112000"/>
-              </a:lnSpc>
-              <a:buNone/>
-            </a:pPr>
-            <a:r>
-              <a:rPr lang="en-US" sz="1250" dirty="0">
-                <a:solidFill>
-                  <a:srgbClr val="E8EEF7"/>
-                </a:solidFill>
-                <a:latin typeface="Calibri" pitchFamily="34" charset="0"/>
-                <a:ea typeface="Calibri" pitchFamily="34" charset="-122"/>
-                <a:cs typeface="Calibri" pitchFamily="34" charset="-120"/>
-              </a:rPr>
-              <a:t>se a revisão pedir ajustes, cada item aparece aqui (Técnico, Pedagógico, ABNT). Corrija, marque como Resolvido e devolva o curso: Em Ajuste → Pronto para Nova Análise.</a:t>
-            </a:r>
-            <a:endParaRPr lang="en-US" sz="1250" dirty="0"/>
-          </a:p>
-        </p:txBody>
-      </p:sp>
-      <p:sp>
-        <p:nvSpPr>
-          <p:cNvPr id="10" name="Text 6"/>
+          <p:cNvPr id="21" name="Text 18"/>
           <p:cNvSpPr/>
           <p:nvPr/>
         </p:nvSpPr>
@@ -11577,7 +12860,7 @@
       </p:sp>
       <p:sp>
         <p:nvSpPr>
-          <p:cNvPr id="11" name="Text 7"/>
+          <p:cNvPr id="22" name="Text 19"/>
           <p:cNvSpPr/>
           <p:nvPr/>
         </p:nvSpPr>
@@ -11608,7 +12891,7 @@
                 <a:ea typeface="Calibri" pitchFamily="34" charset="-122"/>
                 <a:cs typeface="Calibri" pitchFamily="34" charset="-120"/>
               </a:rPr>
-              <a:t>9 / 13</a:t>
+              <a:t>9 / 14</a:t>
             </a:r>
             <a:endParaRPr lang="en-US" sz="950" dirty="0"/>
           </a:p>

--- a/docs/tutoriais/Tutorial-Formador.pptx
+++ b/docs/tutoriais/Tutorial-Formador.pptx
@@ -5280,12 +5280,12 @@
         </p:nvSpPr>
         <p:spPr>
           <a:xfrm>
-            <a:off x="640080" y="1691640"/>
-            <a:ext cx="10881360" cy="1024128"/>
+            <a:off x="640080" y="1645920"/>
+            <a:ext cx="10881360" cy="914400"/>
           </a:xfrm>
           <a:prstGeom prst="roundRect">
             <a:avLst>
-              <a:gd name="adj" fmla="val 8036"/>
+              <a:gd name="adj" fmla="val 9000"/>
             </a:avLst>
           </a:prstGeom>
           <a:solidFill>
@@ -5307,7 +5307,7 @@
         </p:nvSpPr>
         <p:spPr>
           <a:xfrm>
-            <a:off x="841248" y="1837944"/>
+            <a:off x="841248" y="1792224"/>
             <a:ext cx="10479024" cy="329184"/>
           </a:xfrm>
           <a:prstGeom prst="rect">
@@ -5346,8 +5346,8 @@
         </p:nvSpPr>
         <p:spPr>
           <a:xfrm>
-            <a:off x="841248" y="2167128"/>
-            <a:ext cx="10479024" cy="420624"/>
+            <a:off x="841248" y="2121408"/>
+            <a:ext cx="10479024" cy="310896"/>
           </a:xfrm>
           <a:prstGeom prst="rect">
             <a:avLst/>
@@ -5366,7 +5366,7 @@
               <a:buNone/>
             </a:pPr>
             <a:r>
-              <a:rPr lang="en-US" sz="1300" dirty="0">
+              <a:rPr lang="en-US" sz="1250" dirty="0">
                 <a:solidFill>
                   <a:srgbClr val="E8EEF7"/>
                 </a:solidFill>
@@ -5376,7 +5376,7 @@
               </a:rPr>
               <a:t>O projeto precisa ser aprovado pela TI, que define a carga horária. Assim que isso acontecer, a opção aparece.</a:t>
             </a:r>
-            <a:endParaRPr lang="en-US" sz="1300" dirty="0"/>
+            <a:endParaRPr lang="en-US" sz="1250" dirty="0"/>
           </a:p>
         </p:txBody>
       </p:sp>
@@ -5388,12 +5388,12 @@
         </p:nvSpPr>
         <p:spPr>
           <a:xfrm>
-            <a:off x="640080" y="2862072"/>
-            <a:ext cx="10881360" cy="1024128"/>
+            <a:off x="640080" y="2679192"/>
+            <a:ext cx="10881360" cy="914400"/>
           </a:xfrm>
           <a:prstGeom prst="roundRect">
             <a:avLst>
-              <a:gd name="adj" fmla="val 8036"/>
+              <a:gd name="adj" fmla="val 9000"/>
             </a:avLst>
           </a:prstGeom>
           <a:solidFill>
@@ -5415,7 +5415,7 @@
         </p:nvSpPr>
         <p:spPr>
           <a:xfrm>
-            <a:off x="841248" y="3008376"/>
+            <a:off x="841248" y="2825496"/>
             <a:ext cx="10479024" cy="329184"/>
           </a:xfrm>
           <a:prstGeom prst="rect">
@@ -5454,8 +5454,8 @@
         </p:nvSpPr>
         <p:spPr>
           <a:xfrm>
-            <a:off x="841248" y="3337560"/>
-            <a:ext cx="10479024" cy="420624"/>
+            <a:off x="841248" y="3154680"/>
+            <a:ext cx="10479024" cy="310896"/>
           </a:xfrm>
           <a:prstGeom prst="rect">
             <a:avLst/>
@@ -5474,7 +5474,7 @@
               <a:buNone/>
             </a:pPr>
             <a:r>
-              <a:rPr lang="en-US" sz="1300" dirty="0">
+              <a:rPr lang="en-US" sz="1250" dirty="0">
                 <a:solidFill>
                   <a:srgbClr val="E8EEF7"/>
                 </a:solidFill>
@@ -5484,7 +5484,7 @@
               </a:rPr>
               <a:t>Clique no link do e-mail ou abra o curso e use o botão 🎬 Vídeos.</a:t>
             </a:r>
-            <a:endParaRPr lang="en-US" sz="1300" dirty="0"/>
+            <a:endParaRPr lang="en-US" sz="1250" dirty="0"/>
           </a:p>
         </p:txBody>
       </p:sp>
@@ -5496,12 +5496,12 @@
         </p:nvSpPr>
         <p:spPr>
           <a:xfrm>
-            <a:off x="640080" y="4032504"/>
-            <a:ext cx="10881360" cy="1024128"/>
+            <a:off x="640080" y="3712464"/>
+            <a:ext cx="10881360" cy="914400"/>
           </a:xfrm>
           <a:prstGeom prst="roundRect">
             <a:avLst>
-              <a:gd name="adj" fmla="val 8036"/>
+              <a:gd name="adj" fmla="val 9000"/>
             </a:avLst>
           </a:prstGeom>
           <a:solidFill>
@@ -5523,7 +5523,7 @@
         </p:nvSpPr>
         <p:spPr>
           <a:xfrm>
-            <a:off x="841248" y="4178808"/>
+            <a:off x="841248" y="3858768"/>
             <a:ext cx="10479024" cy="329184"/>
           </a:xfrm>
           <a:prstGeom prst="rect">
@@ -5562,8 +5562,8 @@
         </p:nvSpPr>
         <p:spPr>
           <a:xfrm>
-            <a:off x="841248" y="4507992"/>
-            <a:ext cx="10479024" cy="420624"/>
+            <a:off x="841248" y="4187952"/>
+            <a:ext cx="10479024" cy="310896"/>
           </a:xfrm>
           <a:prstGeom prst="rect">
             <a:avLst/>
@@ -5582,7 +5582,7 @@
               <a:buNone/>
             </a:pPr>
             <a:r>
-              <a:rPr lang="en-US" sz="1300" dirty="0">
+              <a:rPr lang="en-US" sz="1250" dirty="0">
                 <a:solidFill>
                   <a:srgbClr val="E8EEF7"/>
                 </a:solidFill>
@@ -5592,7 +5592,7 @@
               </a:rPr>
               <a:t>Os vídeos são produzidos e enviados pela MB Estúdios. Você analisa e aprova.</a:t>
             </a:r>
-            <a:endParaRPr lang="en-US" sz="1300" dirty="0"/>
+            <a:endParaRPr lang="en-US" sz="1250" dirty="0"/>
           </a:p>
         </p:txBody>
       </p:sp>
@@ -5604,12 +5604,12 @@
         </p:nvSpPr>
         <p:spPr>
           <a:xfrm>
-            <a:off x="640080" y="5202936"/>
-            <a:ext cx="10881360" cy="1024128"/>
+            <a:off x="640080" y="4745736"/>
+            <a:ext cx="10881360" cy="914400"/>
           </a:xfrm>
           <a:prstGeom prst="roundRect">
             <a:avLst>
-              <a:gd name="adj" fmla="val 8036"/>
+              <a:gd name="adj" fmla="val 9000"/>
             </a:avLst>
           </a:prstGeom>
           <a:solidFill>
@@ -5631,7 +5631,7 @@
         </p:nvSpPr>
         <p:spPr>
           <a:xfrm>
-            <a:off x="841248" y="5349240"/>
+            <a:off x="841248" y="4892040"/>
             <a:ext cx="10479024" cy="329184"/>
           </a:xfrm>
           <a:prstGeom prst="rect">
@@ -5670,8 +5670,8 @@
         </p:nvSpPr>
         <p:spPr>
           <a:xfrm>
-            <a:off x="841248" y="5678424"/>
-            <a:ext cx="10479024" cy="420624"/>
+            <a:off x="841248" y="5221224"/>
+            <a:ext cx="10479024" cy="310896"/>
           </a:xfrm>
           <a:prstGeom prst="rect">
             <a:avLst/>
@@ -5690,7 +5690,7 @@
               <a:buNone/>
             </a:pPr>
             <a:r>
-              <a:rPr lang="en-US" sz="1300" dirty="0">
+              <a:rPr lang="en-US" sz="1250" dirty="0">
                 <a:solidFill>
                   <a:srgbClr val="E8EEF7"/>
                 </a:solidFill>
@@ -5700,7 +5700,7 @@
               </a:rPr>
               <a:t>Alguma etapa anterior do módulo não foi concluída — veja o painel "Ordem de entrega".</a:t>
             </a:r>
-            <a:endParaRPr lang="en-US" sz="1300" dirty="0"/>
+            <a:endParaRPr lang="en-US" sz="1250" dirty="0"/>
           </a:p>
         </p:txBody>
       </p:sp>
@@ -5712,24 +5712,24 @@
         </p:nvSpPr>
         <p:spPr>
           <a:xfrm>
-            <a:off x="640080" y="5943600"/>
-            <a:ext cx="10058400" cy="365760"/>
-          </a:xfrm>
-          <a:prstGeom prst="rect">
-            <a:avLst/>
-          </a:prstGeom>
-          <a:noFill/>
-          <a:ln/>
-        </p:spPr>
-        <p:txBody>
-          <a:bodyPr wrap="square" lIns="0" tIns="0" rIns="0" bIns="0" rtlCol="0" anchor="ctr"/>
-          <a:lstStyle/>
-          <a:p>
-            <a:pPr indent="0" marL="0">
-              <a:buNone/>
-            </a:pPr>
-            <a:r>
-              <a:rPr lang="en-US" sz="1600" dirty="0">
+            <a:off x="640080" y="5989320"/>
+            <a:ext cx="10058400" cy="347472"/>
+          </a:xfrm>
+          <a:prstGeom prst="rect">
+            <a:avLst/>
+          </a:prstGeom>
+          <a:noFill/>
+          <a:ln/>
+        </p:spPr>
+        <p:txBody>
+          <a:bodyPr wrap="square" lIns="0" tIns="0" rIns="0" bIns="0" rtlCol="0" anchor="ctr"/>
+          <a:lstStyle/>
+          <a:p>
+            <a:pPr indent="0" marL="0">
+              <a:buNone/>
+            </a:pPr>
+            <a:r>
+              <a:rPr lang="en-US" sz="1500" dirty="0">
                 <a:solidFill>
                   <a:srgbClr val="8BAAC8"/>
                 </a:solidFill>
@@ -5743,7 +5743,7 @@
               <a:buNone/>
             </a:pPr>
             <a:r>
-              <a:rPr lang="en-US" sz="1600" b="1" dirty="0">
+              <a:rPr lang="en-US" sz="1500" b="1" dirty="0">
                 <a:solidFill>
                   <a:srgbClr val="22D3EE"/>
                 </a:solidFill>
@@ -5753,7 +5753,7 @@
               </a:rPr>
               <a:t>ti.cecape@scseduca.com.br</a:t>
             </a:r>
-            <a:endParaRPr lang="en-US" sz="1600" dirty="0"/>
+            <a:endParaRPr lang="en-US" sz="1500" dirty="0"/>
           </a:p>
         </p:txBody>
       </p:sp>
@@ -12777,11 +12777,11 @@
         <p:spPr>
           <a:xfrm>
             <a:off x="640080" y="4343400"/>
-            <a:ext cx="10972800" cy="1696352"/>
+            <a:ext cx="10972800" cy="1391667"/>
           </a:xfrm>
           <a:prstGeom prst="roundRect">
             <a:avLst>
-              <a:gd name="adj" fmla="val 4851"/>
+              <a:gd name="adj" fmla="val 5913"/>
             </a:avLst>
           </a:prstGeom>
           <a:solidFill>
@@ -12812,7 +12812,7 @@
         <p:spPr>
           <a:xfrm>
             <a:off x="749808" y="4453128"/>
-            <a:ext cx="10753344" cy="1476896"/>
+            <a:ext cx="10753344" cy="1172211"/>
           </a:xfrm>
           <a:prstGeom prst="rect">
             <a:avLst/>
